--- a/slides/Day3_State_Management.pptx
+++ b/slides/Day3_State_Management.pptx
@@ -1,6 +1,6 @@
 
 <file path=ppt/presentation.xml><?xml version="1.0" encoding="utf-8"?>
-<p:presentation xmlns:a="http://schemas.openxmlformats.org/drawingml/2006/main" xmlns:r="http://schemas.openxmlformats.org/officeDocument/2006/relationships" xmlns:p="http://schemas.openxmlformats.org/presentationml/2006/main" saveSubsetFonts="1" autoCompressPictures="0">
+<p:presentation xmlns:a="http://schemas.openxmlformats.org/drawingml/2006/main" xmlns:p="http://schemas.openxmlformats.org/presentationml/2006/main" xmlns:r="http://schemas.openxmlformats.org/officeDocument/2006/relationships" saveSubsetFonts="1" autoCompressPictures="0">
   <p:sldMasterIdLst>
     <p:sldMasterId id="2147483648" r:id="rId1"/>
   </p:sldMasterIdLst>
@@ -35,7 +35,6 @@
     <p:sldId id="283" r:id="rId29"/>
     <p:sldId id="284" r:id="rId30"/>
     <p:sldId id="285" r:id="rId31"/>
-    <p:sldId id="286" r:id="rId32"/>
     <p:sldId id="287" r:id="rId33"/>
     <p:sldId id="288" r:id="rId34"/>
     <p:sldId id="289" r:id="rId35"/>
@@ -499,4104 +498,6 @@
     </a:lvl9pPr>
   </p:notesStyle>
 </p:notesMaster>
-</file>
-
-<file path=ppt/notesSlides/notesSlide1.xml><?xml version="1.0" encoding="utf-8"?>
-<p:notes xmlns:a="http://schemas.openxmlformats.org/drawingml/2006/main" xmlns:ns2="http://schemas.microsoft.com/office/powerpoint/2010/main" xmlns:p="http://schemas.openxmlformats.org/presentationml/2006/main">
-  <p:cSld>
-    <p:spTree>
-      <p:nvGrpSpPr>
-        <p:cNvPr id="1" name=""/>
-        <p:cNvGrpSpPr/>
-        <p:nvPr/>
-      </p:nvGrpSpPr>
-      <p:grpSpPr>
-        <a:xfrm>
-          <a:off x="0" y="0"/>
-          <a:ext cx="0" cy="0"/>
-          <a:chOff x="0" y="0"/>
-          <a:chExt cx="0" cy="0"/>
-        </a:xfrm>
-      </p:grpSpPr>
-      <p:sp>
-        <p:nvSpPr>
-          <p:cNvPr id="2" name="Slide Image Placeholder 1"/>
-          <p:cNvSpPr>
-            <a:spLocks noGrp="1" noRot="1" noChangeAspect="1"/>
-          </p:cNvSpPr>
-          <p:nvPr>
-            <p:ph type="sldImg"/>
-          </p:nvPr>
-        </p:nvSpPr>
-        <p:spPr/>
-      </p:sp>
-      <p:sp>
-        <p:nvSpPr>
-          <p:cNvPr id="3" name="Notes Placeholder 2"/>
-          <p:cNvSpPr>
-            <a:spLocks noGrp="1"/>
-          </p:cNvSpPr>
-          <p:nvPr>
-            <p:ph type="body" idx="1"/>
-          </p:nvPr>
-        </p:nvSpPr>
-        <p:spPr/>
-        <p:txBody>
-          <a:bodyPr/>
-          <a:lstStyle/>
-          <a:p>
-            <a:r>
-              <a:rPr lang="en-US" dirty="0"/>
-              <a:t>SCRIPT: Yesterday you built a real form and two brands, with the brand living in a State object at the root and threaded down by hand. Today we fix that properly, and by 16:00 the quote flow runs idle → loading → loaded/failed through a Riverpod notifier, with the service injected and testable without a widget.
-OPENER: two delegates present homework Q1 (classify state) and Q3 (why Riverpod) at the whiteboard. Then slide 3.
-PRESENTER CHECKLIST: emulator running; Day 2 app finished, building and committed; flutter_riverpod resolved and pinned in pubspec (run flutter pub get BEFORE class, venue Wi-Fi is not to be trusted); DevTools open; ProviderScope retry disabled in main for demos (see Riverpod 3 notes slide).</a:t>
-            </a:r>
-            <a:endParaRPr lang="en-US" dirty="0"/>
-          </a:p>
-        </p:txBody>
-      </p:sp>
-      <p:sp>
-        <p:nvSpPr>
-          <p:cNvPr id="4" name="Slide Number Placeholder 3"/>
-          <p:cNvSpPr>
-            <a:spLocks noGrp="1"/>
-          </p:cNvSpPr>
-          <p:nvPr>
-            <p:ph type="sldNum" sz="quarter" idx="10"/>
-          </p:nvPr>
-        </p:nvSpPr>
-        <p:spPr/>
-        <p:txBody>
-          <a:bodyPr/>
-          <a:lstStyle/>
-          <a:p>
-            <a:fld id="{F7021451-1387-4CA6-816F-3879F97B5CBC}" type="slidenum">
-              <a:rPr lang="en-US"/>
-              <a:t>1</a:t>
-            </a:fld>
-            <a:endParaRPr lang="en-US"/>
-          </a:p>
-        </p:txBody>
-      </p:sp>
-    </p:spTree>
-    <p:extLst>
-      <p:ext uri="{BB962C8B-B14F-4D97-AF65-F5344CB8AC3E}">
-        <ns2:creationId val="1024086991"/>
-      </p:ext>
-    </p:extLst>
-  </p:cSld>
-  <p:clrMapOvr>
-    <a:masterClrMapping/>
-  </p:clrMapOvr>
-</p:notes>
-</file>
-
-<file path=ppt/notesSlides/notesSlide10.xml><?xml version="1.0" encoding="utf-8"?>
-<p:notes xmlns:a="http://schemas.openxmlformats.org/drawingml/2006/main" xmlns:r="http://schemas.openxmlformats.org/officeDocument/2006/relationships" xmlns:p="http://schemas.openxmlformats.org/presentationml/2006/main">
-  <p:cSld>
-    <p:spTree>
-      <p:nvGrpSpPr>
-        <p:cNvPr id="1" name=""/>
-        <p:cNvGrpSpPr/>
-        <p:nvPr/>
-      </p:nvGrpSpPr>
-      <p:grpSpPr>
-        <a:xfrm>
-          <a:off x="0" y="0"/>
-          <a:ext cx="0" cy="0"/>
-          <a:chOff x="0" y="0"/>
-          <a:chExt cx="0" cy="0"/>
-        </a:xfrm>
-      </p:grpSpPr>
-      <p:sp>
-        <p:nvSpPr>
-          <p:cNvPr id="2" name="Slide Image Placeholder 1"/>
-          <p:cNvSpPr>
-            <a:spLocks noGrp="1" noRot="1" noChangeAspect="1"/>
-          </p:cNvSpPr>
-          <p:nvPr>
-            <p:ph type="sldImg"/>
-          </p:nvPr>
-        </p:nvSpPr>
-        <p:spPr/>
-      </p:sp>
-      <p:sp>
-        <p:nvSpPr>
-          <p:cNvPr id="3" name="Notes Placeholder 2"/>
-          <p:cNvSpPr>
-            <a:spLocks noGrp="1"/>
-          </p:cNvSpPr>
-          <p:nvPr>
-            <p:ph type="body" idx="1"/>
-          </p:nvPr>
-        </p:nvSpPr>
-        <p:spPr/>
-        <p:txBody>
-          <a:bodyPr/>
-          <a:lstStyle/>
-          <a:p>
-            <a:r>
-              <a:rPr lang="en-US" dirty="0"/>
-              <a:t>SCRIPT: Two commands and one wrapper. Both OS identical.
-"Global variables?" - the question will come. Answer: the provider is a global DESCRIPTION (like a route definition); the state is created lazily inside ProviderScope and can be overridden per scope (tests, per-brand). Nothing is shared between scopes.
-VENUE WI-FI: pub add downloads packages. If the room's network is slow, you pre-warmed the pub cache on the USB stick: copy into ~/.pub-cache (mac) or %LOCALAPPDATA%\Pub\Cache (win), then flutter pub get resolves offline with --offline flag: flutter pub get --offline.</a:t>
-            </a:r>
-            <a:endParaRPr lang="en-US" dirty="0"/>
-          </a:p>
-        </p:txBody>
-      </p:sp>
-      <p:sp>
-        <p:nvSpPr>
-          <p:cNvPr id="4" name="Slide Number Placeholder 3"/>
-          <p:cNvSpPr>
-            <a:spLocks noGrp="1"/>
-          </p:cNvSpPr>
-          <p:nvPr>
-            <p:ph type="sldNum" sz="quarter" idx="10"/>
-          </p:nvPr>
-        </p:nvSpPr>
-        <p:spPr/>
-        <p:txBody>
-          <a:bodyPr/>
-          <a:lstStyle/>
-          <a:p>
-            <a:fld id="{F7021451-1387-4CA6-816F-3879F97B5CBC}" type="slidenum">
-              <a:rPr lang="en-US"/>
-              <a:t>10</a:t>
-            </a:fld>
-            <a:endParaRPr lang="en-US"/>
-          </a:p>
-        </p:txBody>
-      </p:sp>
-    </p:spTree>
-    <p:extLst>
-      <p:ext uri="{BB962C8B-B14F-4D97-AF65-F5344CB8AC3E}">
-        <p14:creationId xmlns:p14="http://schemas.microsoft.com/office/powerpoint/2010/main" val="1024086991"/>
-      </p:ext>
-    </p:extLst>
-  </p:cSld>
-  <p:clrMapOvr>
-    <a:masterClrMapping/>
-  </p:clrMapOvr>
-</p:notes>
-</file>
-
-<file path=ppt/notesSlides/notesSlide11.xml><?xml version="1.0" encoding="utf-8"?>
-<p:notes xmlns:a="http://schemas.openxmlformats.org/drawingml/2006/main" xmlns:r="http://schemas.openxmlformats.org/officeDocument/2006/relationships" xmlns:p="http://schemas.openxmlformats.org/presentationml/2006/main">
-  <p:cSld>
-    <p:spTree>
-      <p:nvGrpSpPr>
-        <p:cNvPr id="1" name=""/>
-        <p:cNvGrpSpPr/>
-        <p:nvPr/>
-      </p:nvGrpSpPr>
-      <p:grpSpPr>
-        <a:xfrm>
-          <a:off x="0" y="0"/>
-          <a:ext cx="0" cy="0"/>
-          <a:chOff x="0" y="0"/>
-          <a:chExt cx="0" cy="0"/>
-        </a:xfrm>
-      </p:grpSpPr>
-      <p:sp>
-        <p:nvSpPr>
-          <p:cNvPr id="2" name="Slide Image Placeholder 1"/>
-          <p:cNvSpPr>
-            <a:spLocks noGrp="1" noRot="1" noChangeAspect="1"/>
-          </p:cNvSpPr>
-          <p:nvPr>
-            <p:ph type="sldImg"/>
-          </p:nvPr>
-        </p:nvSpPr>
-        <p:spPr/>
-      </p:sp>
-      <p:sp>
-        <p:nvSpPr>
-          <p:cNvPr id="3" name="Notes Placeholder 2"/>
-          <p:cNvSpPr>
-            <a:spLocks noGrp="1"/>
-          </p:cNvSpPr>
-          <p:nvPr>
-            <p:ph type="body" idx="1"/>
-          </p:nvPr>
-        </p:nvSpPr>
-        <p:spPr/>
-        <p:txBody>
-          <a:bodyPr/>
-          <a:lstStyle/>
-          <a:p>
-            <a:r>
-              <a:rPr lang="en-US" dirty="0"/>
-              <a:t>SCRIPT: This is yesterday's brand toggle as two providers. BrandKeyNotifier holds the key and exposes toggle(). brandProvider derives the BrandTheme; it is read-only and recomputes only on key change.
-IMMUTABILITY: state = newValue. For a list, state = [...state, item]; for an object, state = state.copyWith(...). If you mutate in place and do not reassign, Riverpod sees the same reference (well, same == value in 3.x) and nothing rebuilds. This is the #1 support question.
-Angular: Notifier ≈ a service holding a BehaviorSubject; Provider ≈ a computed observable. React: Notifier ≈ a Zustand store slice.</a:t>
-            </a:r>
-            <a:endParaRPr lang="en-US" dirty="0"/>
-          </a:p>
-        </p:txBody>
-      </p:sp>
-      <p:sp>
-        <p:nvSpPr>
-          <p:cNvPr id="4" name="Slide Number Placeholder 3"/>
-          <p:cNvSpPr>
-            <a:spLocks noGrp="1"/>
-          </p:cNvSpPr>
-          <p:nvPr>
-            <p:ph type="sldNum" sz="quarter" idx="10"/>
-          </p:nvPr>
-        </p:nvSpPr>
-        <p:spPr/>
-        <p:txBody>
-          <a:bodyPr/>
-          <a:lstStyle/>
-          <a:p>
-            <a:fld id="{F7021451-1387-4CA6-816F-3879F97B5CBC}" type="slidenum">
-              <a:rPr lang="en-US"/>
-              <a:t>11</a:t>
-            </a:fld>
-            <a:endParaRPr lang="en-US"/>
-          </a:p>
-        </p:txBody>
-      </p:sp>
-    </p:spTree>
-    <p:extLst>
-      <p:ext uri="{BB962C8B-B14F-4D97-AF65-F5344CB8AC3E}">
-        <p14:creationId xmlns:p14="http://schemas.microsoft.com/office/powerpoint/2010/main" val="1024086991"/>
-      </p:ext>
-    </p:extLst>
-  </p:cSld>
-  <p:clrMapOvr>
-    <a:masterClrMapping/>
-  </p:clrMapOvr>
-</p:notes>
-</file>
-
-<file path=ppt/notesSlides/notesSlide12.xml><?xml version="1.0" encoding="utf-8"?>
-<p:notes xmlns:a="http://schemas.openxmlformats.org/drawingml/2006/main" xmlns:ns2="http://schemas.microsoft.com/office/powerpoint/2010/main" xmlns:p="http://schemas.openxmlformats.org/presentationml/2006/main">
-  <p:cSld>
-    <p:spTree>
-      <p:nvGrpSpPr>
-        <p:cNvPr id="1" name=""/>
-        <p:cNvGrpSpPr/>
-        <p:nvPr/>
-      </p:nvGrpSpPr>
-      <p:grpSpPr>
-        <a:xfrm>
-          <a:off x="0" y="0"/>
-          <a:ext cx="0" cy="0"/>
-          <a:chOff x="0" y="0"/>
-          <a:chExt cx="0" cy="0"/>
-        </a:xfrm>
-      </p:grpSpPr>
-      <p:sp>
-        <p:nvSpPr>
-          <p:cNvPr id="2" name="Slide Image Placeholder 1"/>
-          <p:cNvSpPr>
-            <a:spLocks noGrp="1" noRot="1" noChangeAspect="1"/>
-          </p:cNvSpPr>
-          <p:nvPr>
-            <p:ph type="sldImg"/>
-          </p:nvPr>
-        </p:nvSpPr>
-        <p:spPr/>
-      </p:sp>
-      <p:sp>
-        <p:nvSpPr>
-          <p:cNvPr id="3" name="Notes Placeholder 2"/>
-          <p:cNvSpPr>
-            <a:spLocks noGrp="1"/>
-          </p:cNvSpPr>
-          <p:nvPr>
-            <p:ph type="body" idx="1"/>
-          </p:nvPr>
-        </p:nvSpPr>
-        <p:spPr/>
-        <p:txBody>
-          <a:bodyPr/>
-          <a:lstStyle/>
-          <a:p>
-            <a:r>
-              <a:rPr lang="en-US" dirty="0"/>
-              <a:t>SCRIPT: Compare with yesterday's app.dart side by side (previous slide's code is still in the deck; flip back). No State class, no callback parameters, CaptureScreen takes nothing. The AppBar button reads the notifier and calls toggle(); the header watches brandProvider and rebuilds.
-DEMO: make this change live on your finished Day 2 app - it is 20 lines and the toggle keeps working. That is the Lab 3.1 solution, which they then reproduce.
-IMPORT: flutter_riverpod/flutter_riverpod.dart gives you ProviderScope, ConsumerWidget, WidgetRef and the providers. Do not import package:riverpod directly in Flutter code.</a:t>
-            </a:r>
-            <a:endParaRPr lang="en-US" dirty="0"/>
-          </a:p>
-        </p:txBody>
-      </p:sp>
-      <p:sp>
-        <p:nvSpPr>
-          <p:cNvPr id="4" name="Slide Number Placeholder 3"/>
-          <p:cNvSpPr>
-            <a:spLocks noGrp="1"/>
-          </p:cNvSpPr>
-          <p:nvPr>
-            <p:ph type="sldNum" sz="quarter" idx="10"/>
-          </p:nvPr>
-        </p:nvSpPr>
-        <p:spPr/>
-        <p:txBody>
-          <a:bodyPr/>
-          <a:lstStyle/>
-          <a:p>
-            <a:fld id="{F7021451-1387-4CA6-816F-3879F97B5CBC}" type="slidenum">
-              <a:rPr lang="en-US"/>
-              <a:t>12</a:t>
-            </a:fld>
-            <a:endParaRPr lang="en-US"/>
-          </a:p>
-        </p:txBody>
-      </p:sp>
-    </p:spTree>
-    <p:extLst>
-      <p:ext uri="{BB962C8B-B14F-4D97-AF65-F5344CB8AC3E}">
-        <ns2:creationId val="1024086991"/>
-      </p:ext>
-    </p:extLst>
-  </p:cSld>
-  <p:clrMapOvr>
-    <a:masterClrMapping/>
-  </p:clrMapOvr>
-</p:notes>
-</file>
-
-<file path=ppt/notesSlides/notesSlide13.xml><?xml version="1.0" encoding="utf-8"?>
-<p:notes xmlns:a="http://schemas.openxmlformats.org/drawingml/2006/main" xmlns:r="http://schemas.openxmlformats.org/officeDocument/2006/relationships" xmlns:p="http://schemas.openxmlformats.org/presentationml/2006/main">
-  <p:cSld>
-    <p:spTree>
-      <p:nvGrpSpPr>
-        <p:cNvPr id="1" name=""/>
-        <p:cNvGrpSpPr/>
-        <p:nvPr/>
-      </p:nvGrpSpPr>
-      <p:grpSpPr>
-        <a:xfrm>
-          <a:off x="0" y="0"/>
-          <a:ext cx="0" cy="0"/>
-          <a:chOff x="0" y="0"/>
-          <a:chExt cx="0" cy="0"/>
-        </a:xfrm>
-      </p:grpSpPr>
-      <p:sp>
-        <p:nvSpPr>
-          <p:cNvPr id="2" name="Slide Image Placeholder 1"/>
-          <p:cNvSpPr>
-            <a:spLocks noGrp="1" noRot="1" noChangeAspect="1"/>
-          </p:cNvSpPr>
-          <p:nvPr>
-            <p:ph type="sldImg"/>
-          </p:nvPr>
-        </p:nvSpPr>
-        <p:spPr/>
-      </p:sp>
-      <p:sp>
-        <p:nvSpPr>
-          <p:cNvPr id="3" name="Notes Placeholder 2"/>
-          <p:cNvSpPr>
-            <a:spLocks noGrp="1"/>
-          </p:cNvSpPr>
-          <p:nvPr>
-            <p:ph type="body" idx="1"/>
-          </p:nvPr>
-        </p:nvSpPr>
-        <p:spPr/>
-        <p:txBody>
-          <a:bodyPr/>
-          <a:lstStyle/>
-          <a:p>
-            <a:r>
-              <a:rPr lang="en-US" dirty="0"/>
-              <a:t>SCRIPT: Slow down. Four verbs, one rule each. The bug you will see today: someone writes ref.read(brandProvider) in build, hot reloads, and the header never updates on toggle. Show it on purpose: change watch to read in the header, toggle, nothing happens, change back.
-listen: we use it this afternoon to show a SnackBar when the quote fails - the classic "side effect on state change" that must not live in build's return value.
-select: mention, use in the stretch.</a:t>
-            </a:r>
-            <a:endParaRPr lang="en-US" dirty="0"/>
-          </a:p>
-        </p:txBody>
-      </p:sp>
-      <p:sp>
-        <p:nvSpPr>
-          <p:cNvPr id="4" name="Slide Number Placeholder 3"/>
-          <p:cNvSpPr>
-            <a:spLocks noGrp="1"/>
-          </p:cNvSpPr>
-          <p:nvPr>
-            <p:ph type="sldNum" sz="quarter" idx="10"/>
-          </p:nvPr>
-        </p:nvSpPr>
-        <p:spPr/>
-        <p:txBody>
-          <a:bodyPr/>
-          <a:lstStyle/>
-          <a:p>
-            <a:fld id="{F7021451-1387-4CA6-816F-3879F97B5CBC}" type="slidenum">
-              <a:rPr lang="en-US"/>
-              <a:t>13</a:t>
-            </a:fld>
-            <a:endParaRPr lang="en-US"/>
-          </a:p>
-        </p:txBody>
-      </p:sp>
-    </p:spTree>
-    <p:extLst>
-      <p:ext uri="{BB962C8B-B14F-4D97-AF65-F5344CB8AC3E}">
-        <p14:creationId xmlns:p14="http://schemas.microsoft.com/office/powerpoint/2010/main" val="1024086991"/>
-      </p:ext>
-    </p:extLst>
-  </p:cSld>
-  <p:clrMapOvr>
-    <a:masterClrMapping/>
-  </p:clrMapOvr>
-</p:notes>
-</file>
-
-<file path=ppt/notesSlides/notesSlide14.xml><?xml version="1.0" encoding="utf-8"?>
-<p:notes xmlns:a="http://schemas.openxmlformats.org/drawingml/2006/main" xmlns:r="http://schemas.openxmlformats.org/officeDocument/2006/relationships" xmlns:p="http://schemas.openxmlformats.org/presentationml/2006/main">
-  <p:cSld>
-    <p:spTree>
-      <p:nvGrpSpPr>
-        <p:cNvPr id="1" name=""/>
-        <p:cNvGrpSpPr/>
-        <p:nvPr/>
-      </p:nvGrpSpPr>
-      <p:grpSpPr>
-        <a:xfrm>
-          <a:off x="0" y="0"/>
-          <a:ext cx="0" cy="0"/>
-          <a:chOff x="0" y="0"/>
-          <a:chExt cx="0" cy="0"/>
-        </a:xfrm>
-      </p:grpSpPr>
-      <p:sp>
-        <p:nvSpPr>
-          <p:cNvPr id="2" name="Slide Image Placeholder 1"/>
-          <p:cNvSpPr>
-            <a:spLocks noGrp="1" noRot="1" noChangeAspect="1"/>
-          </p:cNvSpPr>
-          <p:nvPr>
-            <p:ph type="sldImg"/>
-          </p:nvPr>
-        </p:nvSpPr>
-        <p:spPr/>
-      </p:sp>
-      <p:sp>
-        <p:nvSpPr>
-          <p:cNvPr id="3" name="Notes Placeholder 2"/>
-          <p:cNvSpPr>
-            <a:spLocks noGrp="1"/>
-          </p:cNvSpPr>
-          <p:nvPr>
-            <p:ph type="body" idx="1"/>
-          </p:nvPr>
-        </p:nvSpPr>
-        <p:spPr/>
-        <p:txBody>
-          <a:bodyPr/>
-          <a:lstStyle/>
-          <a:p>
-            <a:r>
-              <a:rPr lang="en-US" dirty="0"/>
-              <a:t>SCRIPT: For the C#/Angular people this is the slide that lands: providers are the DI container. Interface, implementation, registration, override in tests. No reflection, no annotations, compile-time checked.
-The fake service is the one from Day 1 Lab 1.3 with a small change (id from timestamp). Keep it - it is the offline fallback all week if an API is down.</a:t>
-            </a:r>
-            <a:endParaRPr lang="en-US" dirty="0"/>
-          </a:p>
-        </p:txBody>
-      </p:sp>
-      <p:sp>
-        <p:nvSpPr>
-          <p:cNvPr id="4" name="Slide Number Placeholder 3"/>
-          <p:cNvSpPr>
-            <a:spLocks noGrp="1"/>
-          </p:cNvSpPr>
-          <p:nvPr>
-            <p:ph type="sldNum" sz="quarter" idx="10"/>
-          </p:nvPr>
-        </p:nvSpPr>
-        <p:spPr/>
-        <p:txBody>
-          <a:bodyPr/>
-          <a:lstStyle/>
-          <a:p>
-            <a:fld id="{F7021451-1387-4CA6-816F-3879F97B5CBC}" type="slidenum">
-              <a:rPr lang="en-US"/>
-              <a:t>14</a:t>
-            </a:fld>
-            <a:endParaRPr lang="en-US"/>
-          </a:p>
-        </p:txBody>
-      </p:sp>
-    </p:spTree>
-    <p:extLst>
-      <p:ext uri="{BB962C8B-B14F-4D97-AF65-F5344CB8AC3E}">
-        <p14:creationId xmlns:p14="http://schemas.microsoft.com/office/powerpoint/2010/main" val="1024086991"/>
-      </p:ext>
-    </p:extLst>
-  </p:cSld>
-  <p:clrMapOvr>
-    <a:masterClrMapping/>
-  </p:clrMapOvr>
-</p:notes>
-</file>
-
-<file path=ppt/notesSlides/notesSlide15.xml><?xml version="1.0" encoding="utf-8"?>
-<p:notes xmlns:a="http://schemas.openxmlformats.org/drawingml/2006/main" xmlns:ns2="http://schemas.microsoft.com/office/powerpoint/2010/main" xmlns:p="http://schemas.openxmlformats.org/presentationml/2006/main">
-  <p:cSld>
-    <p:spTree>
-      <p:nvGrpSpPr>
-        <p:cNvPr id="1" name=""/>
-        <p:cNvGrpSpPr/>
-        <p:nvPr/>
-      </p:nvGrpSpPr>
-      <p:grpSpPr>
-        <a:xfrm>
-          <a:off x="0" y="0"/>
-          <a:ext cx="0" cy="0"/>
-          <a:chOff x="0" y="0"/>
-          <a:chExt cx="0" cy="0"/>
-        </a:xfrm>
-      </p:grpSpPr>
-      <p:sp>
-        <p:nvSpPr>
-          <p:cNvPr id="2" name="Slide Image Placeholder 1"/>
-          <p:cNvSpPr>
-            <a:spLocks noGrp="1" noRot="1" noChangeAspect="1"/>
-          </p:cNvSpPr>
-          <p:nvPr>
-            <p:ph type="sldImg"/>
-          </p:nvPr>
-        </p:nvSpPr>
-        <p:spPr/>
-      </p:sp>
-      <p:sp>
-        <p:nvSpPr>
-          <p:cNvPr id="3" name="Notes Placeholder 2"/>
-          <p:cNvSpPr>
-            <a:spLocks noGrp="1"/>
-          </p:cNvSpPr>
-          <p:nvPr>
-            <p:ph type="body" idx="1"/>
-          </p:nvPr>
-        </p:nvSpPr>
-        <p:spPr/>
-        <p:txBody>
-          <a:bodyPr/>
-          <a:lstStyle/>
-          <a:p>
-            <a:r>
-              <a:rPr lang="en-US" dirty="0"/>
-              <a:t>RUN THE LAB: 35 min. Walk with one question: "watch or read - and why?"
-COMMON ERRORS: "ProviderScope not found" / "No ProviderScope found" → main.dart not wrapped or hot reload instead of restart. "The argument type 'WidgetRef' can't be assigned" → still a StatelessWidget, change to ConsumerWidget. Toggle does nothing → ref.read in build. "Undefined name 'ref'" in a State class → must be ConsumerState, not State.
-PUB GET FAILURE (network): flutter pub get --offline after copying the pre-warmed cache; or share the .pub-cache folder over the LAN.
-SOLUTION: Appendix C, and the Lab 3.1 section of the delegate handbook.</a:t>
-            </a:r>
-            <a:endParaRPr lang="en-US" dirty="0"/>
-          </a:p>
-        </p:txBody>
-      </p:sp>
-      <p:sp>
-        <p:nvSpPr>
-          <p:cNvPr id="4" name="Slide Number Placeholder 3"/>
-          <p:cNvSpPr>
-            <a:spLocks noGrp="1"/>
-          </p:cNvSpPr>
-          <p:nvPr>
-            <p:ph type="sldNum" sz="quarter" idx="10"/>
-          </p:nvPr>
-        </p:nvSpPr>
-        <p:spPr/>
-        <p:txBody>
-          <a:bodyPr/>
-          <a:lstStyle/>
-          <a:p>
-            <a:fld id="{F7021451-1387-4CA6-816F-3879F97B5CBC}" type="slidenum">
-              <a:rPr lang="en-US"/>
-              <a:t>15</a:t>
-            </a:fld>
-            <a:endParaRPr lang="en-US"/>
-          </a:p>
-        </p:txBody>
-      </p:sp>
-    </p:spTree>
-    <p:extLst>
-      <p:ext uri="{BB962C8B-B14F-4D97-AF65-F5344CB8AC3E}">
-        <ns2:creationId val="1024086991"/>
-      </p:ext>
-    </p:extLst>
-  </p:cSld>
-  <p:clrMapOvr>
-    <a:masterClrMapping/>
-  </p:clrMapOvr>
-</p:notes>
-</file>
-
-<file path=ppt/notesSlides/notesSlide16.xml><?xml version="1.0" encoding="utf-8"?>
-<p:notes xmlns:a="http://schemas.openxmlformats.org/drawingml/2006/main" xmlns:r="http://schemas.openxmlformats.org/officeDocument/2006/relationships" xmlns:p="http://schemas.openxmlformats.org/presentationml/2006/main">
-  <p:cSld>
-    <p:spTree>
-      <p:nvGrpSpPr>
-        <p:cNvPr id="1" name=""/>
-        <p:cNvGrpSpPr/>
-        <p:nvPr/>
-      </p:nvGrpSpPr>
-      <p:grpSpPr>
-        <a:xfrm>
-          <a:off x="0" y="0"/>
-          <a:ext cx="0" cy="0"/>
-          <a:chOff x="0" y="0"/>
-          <a:chExt cx="0" cy="0"/>
-        </a:xfrm>
-      </p:grpSpPr>
-      <p:sp>
-        <p:nvSpPr>
-          <p:cNvPr id="2" name="Slide Image Placeholder 1"/>
-          <p:cNvSpPr>
-            <a:spLocks noGrp="1" noRot="1" noChangeAspect="1"/>
-          </p:cNvSpPr>
-          <p:nvPr>
-            <p:ph type="sldImg"/>
-          </p:nvPr>
-        </p:nvSpPr>
-        <p:spPr/>
-      </p:sp>
-      <p:sp>
-        <p:nvSpPr>
-          <p:cNvPr id="3" name="Notes Placeholder 2"/>
-          <p:cNvSpPr>
-            <a:spLocks noGrp="1"/>
-          </p:cNvSpPr>
-          <p:nvPr>
-            <p:ph type="body" idx="1"/>
-          </p:nvPr>
-        </p:nvSpPr>
-        <p:spPr/>
-        <p:txBody>
-          <a:bodyPr/>
-          <a:lstStyle/>
-          <a:p>
-            <a:r>
-              <a:rPr lang="en-US" dirty="0"/>
-              <a:t>SCRIPT: Two halves. First, async in Riverpod - the shape this afternoon's refactor uses. Second, Bloc awareness with an honest comparison; some of these developers will join teams that use Bloc.</a:t>
-            </a:r>
-            <a:endParaRPr lang="en-US" dirty="0"/>
-          </a:p>
-        </p:txBody>
-      </p:sp>
-      <p:sp>
-        <p:nvSpPr>
-          <p:cNvPr id="4" name="Slide Number Placeholder 3"/>
-          <p:cNvSpPr>
-            <a:spLocks noGrp="1"/>
-          </p:cNvSpPr>
-          <p:nvPr>
-            <p:ph type="sldNum" sz="quarter" idx="10"/>
-          </p:nvPr>
-        </p:nvSpPr>
-        <p:spPr/>
-        <p:txBody>
-          <a:bodyPr/>
-          <a:lstStyle/>
-          <a:p>
-            <a:fld id="{F7021451-1387-4CA6-816F-3879F97B5CBC}" type="slidenum">
-              <a:rPr lang="en-US"/>
-              <a:t>16</a:t>
-            </a:fld>
-            <a:endParaRPr lang="en-US"/>
-          </a:p>
-        </p:txBody>
-      </p:sp>
-    </p:spTree>
-    <p:extLst>
-      <p:ext uri="{BB962C8B-B14F-4D97-AF65-F5344CB8AC3E}">
-        <p14:creationId xmlns:p14="http://schemas.microsoft.com/office/powerpoint/2010/main" val="1024086991"/>
-      </p:ext>
-    </p:extLst>
-  </p:cSld>
-  <p:clrMapOvr>
-    <a:masterClrMapping/>
-  </p:clrMapOvr>
-</p:notes>
-</file>
-
-<file path=ppt/notesSlides/notesSlide17.xml><?xml version="1.0" encoding="utf-8"?>
-<p:notes xmlns:a="http://schemas.openxmlformats.org/drawingml/2006/main" xmlns:r="http://schemas.openxmlformats.org/officeDocument/2006/relationships" xmlns:p="http://schemas.openxmlformats.org/presentationml/2006/main">
-  <p:cSld>
-    <p:spTree>
-      <p:nvGrpSpPr>
-        <p:cNvPr id="1" name=""/>
-        <p:cNvGrpSpPr/>
-        <p:nvPr/>
-      </p:nvGrpSpPr>
-      <p:grpSpPr>
-        <a:xfrm>
-          <a:off x="0" y="0"/>
-          <a:ext cx="0" cy="0"/>
-          <a:chOff x="0" y="0"/>
-          <a:chExt cx="0" cy="0"/>
-        </a:xfrm>
-      </p:grpSpPr>
-      <p:sp>
-        <p:nvSpPr>
-          <p:cNvPr id="2" name="Slide Image Placeholder 1"/>
-          <p:cNvSpPr>
-            <a:spLocks noGrp="1" noRot="1" noChangeAspect="1"/>
-          </p:cNvSpPr>
-          <p:nvPr>
-            <p:ph type="sldImg"/>
-          </p:nvPr>
-        </p:nvSpPr>
-        <p:spPr/>
-      </p:sp>
-      <p:sp>
-        <p:nvSpPr>
-          <p:cNvPr id="3" name="Notes Placeholder 2"/>
-          <p:cNvSpPr>
-            <a:spLocks noGrp="1"/>
-          </p:cNvSpPr>
-          <p:nvPr>
-            <p:ph type="body" idx="1"/>
-          </p:nvPr>
-        </p:nvSpPr>
-        <p:spPr/>
-        <p:txBody>
-          <a:bodyPr/>
-          <a:lstStyle/>
-          <a:p>
-            <a:r>
-              <a:rPr lang="en-US" dirty="0"/>
-              <a:t>SCRIPT: This is the heart of Lab 3.2. Sealed state from Day 1, a Notifier with two methods, the service read from a provider. Emphasise: the UI never sees an exception; the notifier turns it into QuoteFailed with a message.
-Exception message cleanup: Dart's Exception.toString() is "Exception: text"; the replaceFirst strips the prefix for display. On Day 4 with dio we map DioException to friendlier messages.
-Why not AsyncNotifier here? Because our state has a fourth case (Idle) and a domain meaning. Next slide shows when AsyncNotifier is the better fit.</a:t>
-            </a:r>
-            <a:endParaRPr lang="en-US" dirty="0"/>
-          </a:p>
-        </p:txBody>
-      </p:sp>
-      <p:sp>
-        <p:nvSpPr>
-          <p:cNvPr id="4" name="Slide Number Placeholder 3"/>
-          <p:cNvSpPr>
-            <a:spLocks noGrp="1"/>
-          </p:cNvSpPr>
-          <p:nvPr>
-            <p:ph type="sldNum" sz="quarter" idx="10"/>
-          </p:nvPr>
-        </p:nvSpPr>
-        <p:spPr/>
-        <p:txBody>
-          <a:bodyPr/>
-          <a:lstStyle/>
-          <a:p>
-            <a:fld id="{F7021451-1387-4CA6-816F-3879F97B5CBC}" type="slidenum">
-              <a:rPr lang="en-US"/>
-              <a:t>17</a:t>
-            </a:fld>
-            <a:endParaRPr lang="en-US"/>
-          </a:p>
-        </p:txBody>
-      </p:sp>
-    </p:spTree>
-    <p:extLst>
-      <p:ext uri="{BB962C8B-B14F-4D97-AF65-F5344CB8AC3E}">
-        <p14:creationId xmlns:p14="http://schemas.microsoft.com/office/powerpoint/2010/main" val="1024086991"/>
-      </p:ext>
-    </p:extLst>
-  </p:cSld>
-  <p:clrMapOvr>
-    <a:masterClrMapping/>
-  </p:clrMapOvr>
-</p:notes>
-</file>
-
-<file path=ppt/notesSlides/notesSlide18.xml><?xml version="1.0" encoding="utf-8"?>
-<p:notes xmlns:a="http://schemas.openxmlformats.org/drawingml/2006/main" xmlns:r="http://schemas.openxmlformats.org/officeDocument/2006/relationships" xmlns:p="http://schemas.openxmlformats.org/presentationml/2006/main">
-  <p:cSld>
-    <p:spTree>
-      <p:nvGrpSpPr>
-        <p:cNvPr id="1" name=""/>
-        <p:cNvGrpSpPr/>
-        <p:nvPr/>
-      </p:nvGrpSpPr>
-      <p:grpSpPr>
-        <a:xfrm>
-          <a:off x="0" y="0"/>
-          <a:ext cx="0" cy="0"/>
-          <a:chOff x="0" y="0"/>
-          <a:chExt cx="0" cy="0"/>
-        </a:xfrm>
-      </p:grpSpPr>
-      <p:sp>
-        <p:nvSpPr>
-          <p:cNvPr id="2" name="Slide Image Placeholder 1"/>
-          <p:cNvSpPr>
-            <a:spLocks noGrp="1" noRot="1" noChangeAspect="1"/>
-          </p:cNvSpPr>
-          <p:nvPr>
-            <p:ph type="sldImg"/>
-          </p:nvPr>
-        </p:nvSpPr>
-        <p:spPr/>
-      </p:sp>
-      <p:sp>
-        <p:nvSpPr>
-          <p:cNvPr id="3" name="Notes Placeholder 2"/>
-          <p:cNvSpPr>
-            <a:spLocks noGrp="1"/>
-          </p:cNvSpPr>
-          <p:nvPr>
-            <p:ph type="body" idx="1"/>
-          </p:nvPr>
-        </p:nvSpPr>
-        <p:spPr/>
-        <p:txBody>
-          <a:bodyPr/>
-          <a:lstStyle/>
-          <a:p>
-            <a:r>
-              <a:rPr lang="en-US" dirty="0"/>
-              <a:t>SCRIPT: Three things on this slide: ref.watch for the state, a switch expression that is exhaustive (add QuoteExpired later and this fails to compile until handled), and ref.listen for the SnackBar - a side effect, so it is not part of the returned widget tree.
-CaptureForm gains an enabled flag (Appendix D) so the button shows a spinner and disables during loading. That is how you prevent double submits.
-ref.listen must be called inside build (before return) - it registers per build and Riverpod dedupes it.</a:t>
-            </a:r>
-            <a:endParaRPr lang="en-US" dirty="0"/>
-          </a:p>
-        </p:txBody>
-      </p:sp>
-      <p:sp>
-        <p:nvSpPr>
-          <p:cNvPr id="4" name="Slide Number Placeholder 3"/>
-          <p:cNvSpPr>
-            <a:spLocks noGrp="1"/>
-          </p:cNvSpPr>
-          <p:nvPr>
-            <p:ph type="sldNum" sz="quarter" idx="10"/>
-          </p:nvPr>
-        </p:nvSpPr>
-        <p:spPr/>
-        <p:txBody>
-          <a:bodyPr/>
-          <a:lstStyle/>
-          <a:p>
-            <a:fld id="{F7021451-1387-4CA6-816F-3879F97B5CBC}" type="slidenum">
-              <a:rPr lang="en-US"/>
-              <a:t>18</a:t>
-            </a:fld>
-            <a:endParaRPr lang="en-US"/>
-          </a:p>
-        </p:txBody>
-      </p:sp>
-    </p:spTree>
-    <p:extLst>
-      <p:ext uri="{BB962C8B-B14F-4D97-AF65-F5344CB8AC3E}">
-        <p14:creationId xmlns:p14="http://schemas.microsoft.com/office/powerpoint/2010/main" val="1024086991"/>
-      </p:ext>
-    </p:extLst>
-  </p:cSld>
-  <p:clrMapOvr>
-    <a:masterClrMapping/>
-  </p:clrMapOvr>
-</p:notes>
-</file>
-
-<file path=ppt/notesSlides/notesSlide19.xml><?xml version="1.0" encoding="utf-8"?>
-<p:notes xmlns:a="http://schemas.openxmlformats.org/drawingml/2006/main" xmlns:r="http://schemas.openxmlformats.org/officeDocument/2006/relationships" xmlns:p="http://schemas.openxmlformats.org/presentationml/2006/main">
-  <p:cSld>
-    <p:spTree>
-      <p:nvGrpSpPr>
-        <p:cNvPr id="1" name=""/>
-        <p:cNvGrpSpPr/>
-        <p:nvPr/>
-      </p:nvGrpSpPr>
-      <p:grpSpPr>
-        <a:xfrm>
-          <a:off x="0" y="0"/>
-          <a:ext cx="0" cy="0"/>
-          <a:chOff x="0" y="0"/>
-          <a:chExt cx="0" cy="0"/>
-        </a:xfrm>
-      </p:grpSpPr>
-      <p:sp>
-        <p:nvSpPr>
-          <p:cNvPr id="2" name="Slide Image Placeholder 1"/>
-          <p:cNvSpPr>
-            <a:spLocks noGrp="1" noRot="1" noChangeAspect="1"/>
-          </p:cNvSpPr>
-          <p:nvPr>
-            <p:ph type="sldImg"/>
-          </p:nvPr>
-        </p:nvSpPr>
-        <p:spPr/>
-      </p:sp>
-      <p:sp>
-        <p:nvSpPr>
-          <p:cNvPr id="3" name="Notes Placeholder 2"/>
-          <p:cNvSpPr>
-            <a:spLocks noGrp="1"/>
-          </p:cNvSpPr>
-          <p:nvPr>
-            <p:ph type="body" idx="1"/>
-          </p:nvPr>
-        </p:nvSpPr>
-        <p:spPr/>
-        <p:txBody>
-          <a:bodyPr/>
-          <a:lstStyle/>
-          <a:p>
-            <a:r>
-              <a:rPr lang="en-US" dirty="0"/>
-              <a:t>SCRIPT: Tomorrow's saved quotes list is exactly this: the state is the list from SQLite, so AsyncNotifier fits and the UI uses when(). AsyncValue.guard catches exceptions into AsyncError so the notifier never throws.
-Show .when() and say it is a switch expression on AsyncValue; you can also pattern-match: switch (async) { AsyncData(:final value) =&gt; ..., AsyncError(:final error) =&gt; ..., _ =&gt; loading }.
-quoteRepositoryProvider does not exist yet - Day 4 creates it. Today the code is read-only on the slide.</a:t>
-            </a:r>
-            <a:endParaRPr lang="en-US" dirty="0"/>
-          </a:p>
-        </p:txBody>
-      </p:sp>
-      <p:sp>
-        <p:nvSpPr>
-          <p:cNvPr id="4" name="Slide Number Placeholder 3"/>
-          <p:cNvSpPr>
-            <a:spLocks noGrp="1"/>
-          </p:cNvSpPr>
-          <p:nvPr>
-            <p:ph type="sldNum" sz="quarter" idx="10"/>
-          </p:nvPr>
-        </p:nvSpPr>
-        <p:spPr/>
-        <p:txBody>
-          <a:bodyPr/>
-          <a:lstStyle/>
-          <a:p>
-            <a:fld id="{F7021451-1387-4CA6-816F-3879F97B5CBC}" type="slidenum">
-              <a:rPr lang="en-US"/>
-              <a:t>19</a:t>
-            </a:fld>
-            <a:endParaRPr lang="en-US"/>
-          </a:p>
-        </p:txBody>
-      </p:sp>
-    </p:spTree>
-    <p:extLst>
-      <p:ext uri="{BB962C8B-B14F-4D97-AF65-F5344CB8AC3E}">
-        <p14:creationId xmlns:p14="http://schemas.microsoft.com/office/powerpoint/2010/main" val="1024086991"/>
-      </p:ext>
-    </p:extLst>
-  </p:cSld>
-  <p:clrMapOvr>
-    <a:masterClrMapping/>
-  </p:clrMapOvr>
-</p:notes>
-</file>
-
-<file path=ppt/notesSlides/notesSlide2.xml><?xml version="1.0" encoding="utf-8"?>
-<p:notes xmlns:a="http://schemas.openxmlformats.org/drawingml/2006/main" xmlns:r="http://schemas.openxmlformats.org/officeDocument/2006/relationships" xmlns:p="http://schemas.openxmlformats.org/presentationml/2006/main">
-  <p:cSld>
-    <p:spTree>
-      <p:nvGrpSpPr>
-        <p:cNvPr id="1" name=""/>
-        <p:cNvGrpSpPr/>
-        <p:nvPr/>
-      </p:nvGrpSpPr>
-      <p:grpSpPr>
-        <a:xfrm>
-          <a:off x="0" y="0"/>
-          <a:ext cx="0" cy="0"/>
-          <a:chOff x="0" y="0"/>
-          <a:chExt cx="0" cy="0"/>
-        </a:xfrm>
-      </p:grpSpPr>
-      <p:sp>
-        <p:nvSpPr>
-          <p:cNvPr id="2" name="Slide Image Placeholder 1"/>
-          <p:cNvSpPr>
-            <a:spLocks noGrp="1" noRot="1" noChangeAspect="1"/>
-          </p:cNvSpPr>
-          <p:nvPr>
-            <p:ph type="sldImg"/>
-          </p:nvPr>
-        </p:nvSpPr>
-        <p:spPr/>
-      </p:sp>
-      <p:sp>
-        <p:nvSpPr>
-          <p:cNvPr id="3" name="Notes Placeholder 2"/>
-          <p:cNvSpPr>
-            <a:spLocks noGrp="1"/>
-          </p:cNvSpPr>
-          <p:nvPr>
-            <p:ph type="body" idx="1"/>
-          </p:nvPr>
-        </p:nvSpPr>
-        <p:spPr/>
-        <p:txBody>
-          <a:bodyPr/>
-          <a:lstStyle/>
-          <a:p>
-            <a:r>
-              <a:rPr lang="en-US" dirty="0"/>
-              <a:t>SCRIPT: The day has a shape: problem (block 1), the course pattern (block 2), the wider landscape (block 3), and the refactor that proves it (block 4).
-TIMING: block 2 is the core. If block 1 runs long, skip the ValueNotifier slide (it is in the appendix).</a:t>
-            </a:r>
-            <a:endParaRPr lang="en-US" dirty="0"/>
-          </a:p>
-        </p:txBody>
-      </p:sp>
-      <p:sp>
-        <p:nvSpPr>
-          <p:cNvPr id="4" name="Slide Number Placeholder 3"/>
-          <p:cNvSpPr>
-            <a:spLocks noGrp="1"/>
-          </p:cNvSpPr>
-          <p:nvPr>
-            <p:ph type="sldNum" sz="quarter" idx="10"/>
-          </p:nvPr>
-        </p:nvSpPr>
-        <p:spPr/>
-        <p:txBody>
-          <a:bodyPr/>
-          <a:lstStyle/>
-          <a:p>
-            <a:fld id="{F7021451-1387-4CA6-816F-3879F97B5CBC}" type="slidenum">
-              <a:rPr lang="en-US"/>
-              <a:t>2</a:t>
-            </a:fld>
-            <a:endParaRPr lang="en-US"/>
-          </a:p>
-        </p:txBody>
-      </p:sp>
-    </p:spTree>
-    <p:extLst>
-      <p:ext uri="{BB962C8B-B14F-4D97-AF65-F5344CB8AC3E}">
-        <p14:creationId xmlns:p14="http://schemas.microsoft.com/office/powerpoint/2010/main" val="1024086991"/>
-      </p:ext>
-    </p:extLst>
-  </p:cSld>
-  <p:clrMapOvr>
-    <a:masterClrMapping/>
-  </p:clrMapOvr>
-</p:notes>
-</file>
-
-<file path=ppt/notesSlides/notesSlide20.xml><?xml version="1.0" encoding="utf-8"?>
-<p:notes xmlns:a="http://schemas.openxmlformats.org/drawingml/2006/main" xmlns:r="http://schemas.openxmlformats.org/officeDocument/2006/relationships" xmlns:p="http://schemas.openxmlformats.org/presentationml/2006/main">
-  <p:cSld>
-    <p:spTree>
-      <p:nvGrpSpPr>
-        <p:cNvPr id="1" name=""/>
-        <p:cNvGrpSpPr/>
-        <p:nvPr/>
-      </p:nvGrpSpPr>
-      <p:grpSpPr>
-        <a:xfrm>
-          <a:off x="0" y="0"/>
-          <a:ext cx="0" cy="0"/>
-          <a:chOff x="0" y="0"/>
-          <a:chExt cx="0" cy="0"/>
-        </a:xfrm>
-      </p:grpSpPr>
-      <p:sp>
-        <p:nvSpPr>
-          <p:cNvPr id="2" name="Slide Image Placeholder 1"/>
-          <p:cNvSpPr>
-            <a:spLocks noGrp="1" noRot="1" noChangeAspect="1"/>
-          </p:cNvSpPr>
-          <p:nvPr>
-            <p:ph type="sldImg"/>
-          </p:nvPr>
-        </p:nvSpPr>
-        <p:spPr/>
-      </p:sp>
-      <p:sp>
-        <p:nvSpPr>
-          <p:cNvPr id="3" name="Notes Placeholder 2"/>
-          <p:cNvSpPr>
-            <a:spLocks noGrp="1"/>
-          </p:cNvSpPr>
-          <p:nvPr>
-            <p:ph type="body" idx="1"/>
-          </p:nvPr>
-        </p:nvSpPr>
-        <p:spPr/>
-        <p:txBody>
-          <a:bodyPr/>
-          <a:lstStyle/>
-          <a:p>
-            <a:r>
-              <a:rPr lang="en-US" dirty="0"/>
-              <a:t>SCRIPT: Reference-level; the stretch lane uses it. family: Day 4's quote detail route (quote/:id) will watch quoteByIdProvider(id).
-RIVERPOD 3 CHANGE: FamilyNotifier/AutoDisposeNotifier classes are gone; family arg moves to the notifier constructor and autoDispose is a modifier on the provider. If a delegate finds 2.x tutorials online, the build(String id) signature is the old way.</a:t>
-            </a:r>
-            <a:endParaRPr lang="en-US" dirty="0"/>
-          </a:p>
-        </p:txBody>
-      </p:sp>
-      <p:sp>
-        <p:nvSpPr>
-          <p:cNvPr id="4" name="Slide Number Placeholder 3"/>
-          <p:cNvSpPr>
-            <a:spLocks noGrp="1"/>
-          </p:cNvSpPr>
-          <p:nvPr>
-            <p:ph type="sldNum" sz="quarter" idx="10"/>
-          </p:nvPr>
-        </p:nvSpPr>
-        <p:spPr/>
-        <p:txBody>
-          <a:bodyPr/>
-          <a:lstStyle/>
-          <a:p>
-            <a:fld id="{F7021451-1387-4CA6-816F-3879F97B5CBC}" type="slidenum">
-              <a:rPr lang="en-US"/>
-              <a:t>20</a:t>
-            </a:fld>
-            <a:endParaRPr lang="en-US"/>
-          </a:p>
-        </p:txBody>
-      </p:sp>
-    </p:spTree>
-    <p:extLst>
-      <p:ext uri="{BB962C8B-B14F-4D97-AF65-F5344CB8AC3E}">
-        <p14:creationId xmlns:p14="http://schemas.microsoft.com/office/powerpoint/2010/main" val="1024086991"/>
-      </p:ext>
-    </p:extLst>
-  </p:cSld>
-  <p:clrMapOvr>
-    <a:masterClrMapping/>
-  </p:clrMapOvr>
-</p:notes>
-</file>
-
-<file path=ppt/notesSlides/notesSlide21.xml><?xml version="1.0" encoding="utf-8"?>
-<p:notes xmlns:a="http://schemas.openxmlformats.org/drawingml/2006/main" xmlns:r="http://schemas.openxmlformats.org/officeDocument/2006/relationships" xmlns:p="http://schemas.openxmlformats.org/presentationml/2006/main">
-  <p:cSld>
-    <p:spTree>
-      <p:nvGrpSpPr>
-        <p:cNvPr id="1" name=""/>
-        <p:cNvGrpSpPr/>
-        <p:nvPr/>
-      </p:nvGrpSpPr>
-      <p:grpSpPr>
-        <a:xfrm>
-          <a:off x="0" y="0"/>
-          <a:ext cx="0" cy="0"/>
-          <a:chOff x="0" y="0"/>
-          <a:chExt cx="0" cy="0"/>
-        </a:xfrm>
-      </p:grpSpPr>
-      <p:sp>
-        <p:nvSpPr>
-          <p:cNvPr id="2" name="Slide Image Placeholder 1"/>
-          <p:cNvSpPr>
-            <a:spLocks noGrp="1" noRot="1" noChangeAspect="1"/>
-          </p:cNvSpPr>
-          <p:nvPr>
-            <p:ph type="sldImg"/>
-          </p:nvPr>
-        </p:nvSpPr>
-        <p:spPr/>
-      </p:sp>
-      <p:sp>
-        <p:nvSpPr>
-          <p:cNvPr id="3" name="Notes Placeholder 2"/>
-          <p:cNvSpPr>
-            <a:spLocks noGrp="1"/>
-          </p:cNvSpPr>
-          <p:nvPr>
-            <p:ph type="body" idx="1"/>
-          </p:nvPr>
-        </p:nvSpPr>
-        <p:spPr/>
-        <p:txBody>
-          <a:bodyPr/>
-          <a:lstStyle/>
-          <a:p>
-            <a:r>
-              <a:rPr lang="en-US" dirty="0"/>
-              <a:t>SCRIPT: The five things that make a 2.x tutorial not compile, or make a demo look broken. The retry is the one that bites in class: your FakeQuoteService throws for year &lt; 2000, and with retry on, a FutureProvider would silently re-run. Our sealed Notifier catches exceptions itself so it is unaffected, but AsyncNotifier build() failures ARE retried. Disable for the demo with retry: (count, error) =&gt; null on ProviderScope, re-enable for production.
-LINK: riverpod.dev/docs/3.0_migration - put it in the workbook.</a:t>
-            </a:r>
-            <a:endParaRPr lang="en-US" dirty="0"/>
-          </a:p>
-        </p:txBody>
-      </p:sp>
-      <p:sp>
-        <p:nvSpPr>
-          <p:cNvPr id="4" name="Slide Number Placeholder 3"/>
-          <p:cNvSpPr>
-            <a:spLocks noGrp="1"/>
-          </p:cNvSpPr>
-          <p:nvPr>
-            <p:ph type="sldNum" sz="quarter" idx="10"/>
-          </p:nvPr>
-        </p:nvSpPr>
-        <p:spPr/>
-        <p:txBody>
-          <a:bodyPr/>
-          <a:lstStyle/>
-          <a:p>
-            <a:fld id="{F7021451-1387-4CA6-816F-3879F97B5CBC}" type="slidenum">
-              <a:rPr lang="en-US"/>
-              <a:t>21</a:t>
-            </a:fld>
-            <a:endParaRPr lang="en-US"/>
-          </a:p>
-        </p:txBody>
-      </p:sp>
-    </p:spTree>
-    <p:extLst>
-      <p:ext uri="{BB962C8B-B14F-4D97-AF65-F5344CB8AC3E}">
-        <p14:creationId xmlns:p14="http://schemas.microsoft.com/office/powerpoint/2010/main" val="1024086991"/>
-      </p:ext>
-    </p:extLst>
-  </p:cSld>
-  <p:clrMapOvr>
-    <a:masterClrMapping/>
-  </p:clrMapOvr>
-</p:notes>
-</file>
-
-<file path=ppt/notesSlides/notesSlide22.xml><?xml version="1.0" encoding="utf-8"?>
-<p:notes xmlns:a="http://schemas.openxmlformats.org/drawingml/2006/main" xmlns:r="http://schemas.openxmlformats.org/officeDocument/2006/relationships" xmlns:p="http://schemas.openxmlformats.org/presentationml/2006/main">
-  <p:cSld>
-    <p:spTree>
-      <p:nvGrpSpPr>
-        <p:cNvPr id="1" name=""/>
-        <p:cNvGrpSpPr/>
-        <p:nvPr/>
-      </p:nvGrpSpPr>
-      <p:grpSpPr>
-        <a:xfrm>
-          <a:off x="0" y="0"/>
-          <a:ext cx="0" cy="0"/>
-          <a:chOff x="0" y="0"/>
-          <a:chExt cx="0" cy="0"/>
-        </a:xfrm>
-      </p:grpSpPr>
-      <p:sp>
-        <p:nvSpPr>
-          <p:cNvPr id="2" name="Slide Image Placeholder 1"/>
-          <p:cNvSpPr>
-            <a:spLocks noGrp="1" noRot="1" noChangeAspect="1"/>
-          </p:cNvSpPr>
-          <p:nvPr>
-            <p:ph type="sldImg"/>
-          </p:nvPr>
-        </p:nvSpPr>
-        <p:spPr/>
-      </p:sp>
-      <p:sp>
-        <p:nvSpPr>
-          <p:cNvPr id="3" name="Notes Placeholder 2"/>
-          <p:cNvSpPr>
-            <a:spLocks noGrp="1"/>
-          </p:cNvSpPr>
-          <p:nvPr>
-            <p:ph type="body" idx="1"/>
-          </p:nvPr>
-        </p:nvSpPr>
-        <p:spPr/>
-        <p:txBody>
-          <a:bodyPr/>
-          <a:lstStyle/>
-          <a:p>
-            <a:r>
-              <a:rPr lang="en-US" dirty="0"/>
-              <a:t>SCRIPT: One test, and it is the argument for the whole architecture. Run it live: flutter test test/quote_notifier_test.dart. Both OS identical.
-addTearDown(container.dispose) - always, or providers leak across tests.
-fireImmediately: true captures the initial Idle state so the sequence assertion includes it.</a:t>
-            </a:r>
-            <a:endParaRPr lang="en-US" dirty="0"/>
-          </a:p>
-        </p:txBody>
-      </p:sp>
-      <p:sp>
-        <p:nvSpPr>
-          <p:cNvPr id="4" name="Slide Number Placeholder 3"/>
-          <p:cNvSpPr>
-            <a:spLocks noGrp="1"/>
-          </p:cNvSpPr>
-          <p:nvPr>
-            <p:ph type="sldNum" sz="quarter" idx="10"/>
-          </p:nvPr>
-        </p:nvSpPr>
-        <p:spPr/>
-        <p:txBody>
-          <a:bodyPr/>
-          <a:lstStyle/>
-          <a:p>
-            <a:fld id="{F7021451-1387-4CA6-816F-3879F97B5CBC}" type="slidenum">
-              <a:rPr lang="en-US"/>
-              <a:t>22</a:t>
-            </a:fld>
-            <a:endParaRPr lang="en-US"/>
-          </a:p>
-        </p:txBody>
-      </p:sp>
-    </p:spTree>
-    <p:extLst>
-      <p:ext uri="{BB962C8B-B14F-4D97-AF65-F5344CB8AC3E}">
-        <p14:creationId xmlns:p14="http://schemas.microsoft.com/office/powerpoint/2010/main" val="1024086991"/>
-      </p:ext>
-    </p:extLst>
-  </p:cSld>
-  <p:clrMapOvr>
-    <a:masterClrMapping/>
-  </p:clrMapOvr>
-</p:notes>
-</file>
-
-<file path=ppt/notesSlides/notesSlide23.xml><?xml version="1.0" encoding="utf-8"?>
-<p:notes xmlns:a="http://schemas.openxmlformats.org/drawingml/2006/main" xmlns:r="http://schemas.openxmlformats.org/officeDocument/2006/relationships" xmlns:p="http://schemas.openxmlformats.org/presentationml/2006/main">
-  <p:cSld>
-    <p:spTree>
-      <p:nvGrpSpPr>
-        <p:cNvPr id="1" name=""/>
-        <p:cNvGrpSpPr/>
-        <p:nvPr/>
-      </p:nvGrpSpPr>
-      <p:grpSpPr>
-        <a:xfrm>
-          <a:off x="0" y="0"/>
-          <a:ext cx="0" cy="0"/>
-          <a:chOff x="0" y="0"/>
-          <a:chExt cx="0" cy="0"/>
-        </a:xfrm>
-      </p:grpSpPr>
-      <p:sp>
-        <p:nvSpPr>
-          <p:cNvPr id="2" name="Slide Image Placeholder 1"/>
-          <p:cNvSpPr>
-            <a:spLocks noGrp="1" noRot="1" noChangeAspect="1"/>
-          </p:cNvSpPr>
-          <p:nvPr>
-            <p:ph type="sldImg"/>
-          </p:nvPr>
-        </p:nvSpPr>
-        <p:spPr/>
-      </p:sp>
-      <p:sp>
-        <p:nvSpPr>
-          <p:cNvPr id="3" name="Notes Placeholder 2"/>
-          <p:cNvSpPr>
-            <a:spLocks noGrp="1"/>
-          </p:cNvSpPr>
-          <p:nvPr>
-            <p:ph type="body" idx="1"/>
-          </p:nvPr>
-        </p:nvSpPr>
-        <p:spPr/>
-        <p:txBody>
-          <a:bodyPr/>
-          <a:lstStyle/>
-          <a:p>
-            <a:r>
-              <a:rPr lang="en-US" dirty="0"/>
-              <a:t>WHY: some of these people will join Bloc codebases. They need to read Bloc fluently and to be able to explain the trade-off to a lead. A structured debate makes them own the comparison.
-EXPECTED: Q1 Cubit = state + methods that emit; Bloc = events in, states out via handlers; Bloc has events (traceability, transformations like debounce). Q2 global hook for every event/transition/error - audit log, analytics, crash context; insurers like audit trails. Q3 presentation = presentation/, business logic = notifiers/cubits, data = data/ + domain/. Q4 typical: explicit events for audit, enforced structure for large teams, mature tooling (bloc_test, hydrated_bloc), widely known.
-PRESENTER: do not take sides in the debate; the table on the next-next slide is your position.</a:t>
-            </a:r>
-            <a:endParaRPr lang="en-US" dirty="0"/>
-          </a:p>
-        </p:txBody>
-      </p:sp>
-      <p:sp>
-        <p:nvSpPr>
-          <p:cNvPr id="4" name="Slide Number Placeholder 3"/>
-          <p:cNvSpPr>
-            <a:spLocks noGrp="1"/>
-          </p:cNvSpPr>
-          <p:nvPr>
-            <p:ph type="sldNum" sz="quarter" idx="10"/>
-          </p:nvPr>
-        </p:nvSpPr>
-        <p:spPr/>
-        <p:txBody>
-          <a:bodyPr/>
-          <a:lstStyle/>
-          <a:p>
-            <a:fld id="{F7021451-1387-4CA6-816F-3879F97B5CBC}" type="slidenum">
-              <a:rPr lang="en-US"/>
-              <a:t>23</a:t>
-            </a:fld>
-            <a:endParaRPr lang="en-US"/>
-          </a:p>
-        </p:txBody>
-      </p:sp>
-    </p:spTree>
-    <p:extLst>
-      <p:ext uri="{BB962C8B-B14F-4D97-AF65-F5344CB8AC3E}">
-        <p14:creationId xmlns:p14="http://schemas.microsoft.com/office/powerpoint/2010/main" val="1024086991"/>
-      </p:ext>
-    </p:extLst>
-  </p:cSld>
-  <p:clrMapOvr>
-    <a:masterClrMapping/>
-  </p:clrMapOvr>
-</p:notes>
-</file>
-
-<file path=ppt/notesSlides/notesSlide24.xml><?xml version="1.0" encoding="utf-8"?>
-<p:notes xmlns:a="http://schemas.openxmlformats.org/drawingml/2006/main" xmlns:r="http://schemas.openxmlformats.org/officeDocument/2006/relationships" xmlns:p="http://schemas.openxmlformats.org/presentationml/2006/main">
-  <p:cSld>
-    <p:spTree>
-      <p:nvGrpSpPr>
-        <p:cNvPr id="1" name=""/>
-        <p:cNvGrpSpPr/>
-        <p:nvPr/>
-      </p:nvGrpSpPr>
-      <p:grpSpPr>
-        <a:xfrm>
-          <a:off x="0" y="0"/>
-          <a:ext cx="0" cy="0"/>
-          <a:chOff x="0" y="0"/>
-          <a:chExt cx="0" cy="0"/>
-        </a:xfrm>
-      </p:grpSpPr>
-      <p:sp>
-        <p:nvSpPr>
-          <p:cNvPr id="2" name="Slide Image Placeholder 1"/>
-          <p:cNvSpPr>
-            <a:spLocks noGrp="1" noRot="1" noChangeAspect="1"/>
-          </p:cNvSpPr>
-          <p:nvPr>
-            <p:ph type="sldImg"/>
-          </p:nvPr>
-        </p:nvSpPr>
-        <p:spPr/>
-      </p:sp>
-      <p:sp>
-        <p:nvSpPr>
-          <p:cNvPr id="3" name="Notes Placeholder 2"/>
-          <p:cNvSpPr>
-            <a:spLocks noGrp="1"/>
-          </p:cNvSpPr>
-          <p:nvPr>
-            <p:ph type="body" idx="1"/>
-          </p:nvPr>
-        </p:nvSpPr>
-        <p:spPr/>
-        <p:txBody>
-          <a:bodyPr/>
-          <a:lstStyle/>
-          <a:p>
-            <a:r>
-              <a:rPr lang="en-US" dirty="0"/>
-              <a:t>SCRIPT: Put it next to QuoteNotifier: identical structure. Cubit.emit == Notifier.state =. Bloc adds the event layer. That is the whole difference in code; the rest is ecosystem and team preference.
-Full Bloc with BlocObserver and the Riverpod ProviderObserver equivalent are in Appendix B - show them if the audit question comes up (it will).
-Do NOT build this in a lab. Awareness only, per the course outline.</a:t>
-            </a:r>
-            <a:endParaRPr lang="en-US" dirty="0"/>
-          </a:p>
-        </p:txBody>
-      </p:sp>
-      <p:sp>
-        <p:nvSpPr>
-          <p:cNvPr id="4" name="Slide Number Placeholder 3"/>
-          <p:cNvSpPr>
-            <a:spLocks noGrp="1"/>
-          </p:cNvSpPr>
-          <p:nvPr>
-            <p:ph type="sldNum" sz="quarter" idx="10"/>
-          </p:nvPr>
-        </p:nvSpPr>
-        <p:spPr/>
-        <p:txBody>
-          <a:bodyPr/>
-          <a:lstStyle/>
-          <a:p>
-            <a:fld id="{F7021451-1387-4CA6-816F-3879F97B5CBC}" type="slidenum">
-              <a:rPr lang="en-US"/>
-              <a:t>24</a:t>
-            </a:fld>
-            <a:endParaRPr lang="en-US"/>
-          </a:p>
-        </p:txBody>
-      </p:sp>
-    </p:spTree>
-    <p:extLst>
-      <p:ext uri="{BB962C8B-B14F-4D97-AF65-F5344CB8AC3E}">
-        <p14:creationId xmlns:p14="http://schemas.microsoft.com/office/powerpoint/2010/main" val="1024086991"/>
-      </p:ext>
-    </p:extLst>
-  </p:cSld>
-  <p:clrMapOvr>
-    <a:masterClrMapping/>
-  </p:clrMapOvr>
-</p:notes>
-</file>
-
-<file path=ppt/notesSlides/notesSlide25.xml><?xml version="1.0" encoding="utf-8"?>
-<p:notes xmlns:a="http://schemas.openxmlformats.org/drawingml/2006/main" xmlns:r="http://schemas.openxmlformats.org/officeDocument/2006/relationships" xmlns:p="http://schemas.openxmlformats.org/presentationml/2006/main">
-  <p:cSld>
-    <p:spTree>
-      <p:nvGrpSpPr>
-        <p:cNvPr id="1" name=""/>
-        <p:cNvGrpSpPr/>
-        <p:nvPr/>
-      </p:nvGrpSpPr>
-      <p:grpSpPr>
-        <a:xfrm>
-          <a:off x="0" y="0"/>
-          <a:ext cx="0" cy="0"/>
-          <a:chOff x="0" y="0"/>
-          <a:chExt cx="0" cy="0"/>
-        </a:xfrm>
-      </p:grpSpPr>
-      <p:sp>
-        <p:nvSpPr>
-          <p:cNvPr id="2" name="Slide Image Placeholder 1"/>
-          <p:cNvSpPr>
-            <a:spLocks noGrp="1" noRot="1" noChangeAspect="1"/>
-          </p:cNvSpPr>
-          <p:nvPr>
-            <p:ph type="sldImg"/>
-          </p:nvPr>
-        </p:nvSpPr>
-        <p:spPr/>
-      </p:sp>
-      <p:sp>
-        <p:nvSpPr>
-          <p:cNvPr id="3" name="Notes Placeholder 2"/>
-          <p:cNvSpPr>
-            <a:spLocks noGrp="1"/>
-          </p:cNvSpPr>
-          <p:nvPr>
-            <p:ph type="body" idx="1"/>
-          </p:nvPr>
-        </p:nvSpPr>
-        <p:spPr/>
-        <p:txBody>
-          <a:bodyPr/>
-          <a:lstStyle/>
-          <a:p>
-            <a:r>
-              <a:rPr lang="en-US" dirty="0"/>
-              <a:t>SCRIPT: Your position: either is production-grade; consistency across the codebase matters more than the choice. For this team (five developers, new to Flutter, pricing logic to test) Riverpod's lower ceremony wins. If the insurer's compliance team demands an event log, ProviderObserver gives state transitions; Bloc gives events too - that is the one concrete reason to pick Bloc here.
-Also mention: Riverpod has a code-generation flavour (riverpod_generator, @riverpod annotations) that removes more boilerplate; we teach the plain API so they understand what the generator produces.</a:t>
-            </a:r>
-            <a:endParaRPr lang="en-US" dirty="0"/>
-          </a:p>
-        </p:txBody>
-      </p:sp>
-      <p:sp>
-        <p:nvSpPr>
-          <p:cNvPr id="4" name="Slide Number Placeholder 3"/>
-          <p:cNvSpPr>
-            <a:spLocks noGrp="1"/>
-          </p:cNvSpPr>
-          <p:nvPr>
-            <p:ph type="sldNum" sz="quarter" idx="10"/>
-          </p:nvPr>
-        </p:nvSpPr>
-        <p:spPr/>
-        <p:txBody>
-          <a:bodyPr/>
-          <a:lstStyle/>
-          <a:p>
-            <a:fld id="{F7021451-1387-4CA6-816F-3879F97B5CBC}" type="slidenum">
-              <a:rPr lang="en-US"/>
-              <a:t>25</a:t>
-            </a:fld>
-            <a:endParaRPr lang="en-US"/>
-          </a:p>
-        </p:txBody>
-      </p:sp>
-    </p:spTree>
-    <p:extLst>
-      <p:ext uri="{BB962C8B-B14F-4D97-AF65-F5344CB8AC3E}">
-        <p14:creationId xmlns:p14="http://schemas.microsoft.com/office/powerpoint/2010/main" val="1024086991"/>
-      </p:ext>
-    </p:extLst>
-  </p:cSld>
-  <p:clrMapOvr>
-    <a:masterClrMapping/>
-  </p:clrMapOvr>
-</p:notes>
-</file>
-
-<file path=ppt/notesSlides/notesSlide26.xml><?xml version="1.0" encoding="utf-8"?>
-<p:notes xmlns:a="http://schemas.openxmlformats.org/drawingml/2006/main" xmlns:r="http://schemas.openxmlformats.org/officeDocument/2006/relationships" xmlns:p="http://schemas.openxmlformats.org/presentationml/2006/main">
-  <p:cSld>
-    <p:spTree>
-      <p:nvGrpSpPr>
-        <p:cNvPr id="1" name=""/>
-        <p:cNvGrpSpPr/>
-        <p:nvPr/>
-      </p:nvGrpSpPr>
-      <p:grpSpPr>
-        <a:xfrm>
-          <a:off x="0" y="0"/>
-          <a:ext cx="0" cy="0"/>
-          <a:chOff x="0" y="0"/>
-          <a:chExt cx="0" cy="0"/>
-        </a:xfrm>
-      </p:grpSpPr>
-      <p:sp>
-        <p:nvSpPr>
-          <p:cNvPr id="2" name="Slide Image Placeholder 1"/>
-          <p:cNvSpPr>
-            <a:spLocks noGrp="1" noRot="1" noChangeAspect="1"/>
-          </p:cNvSpPr>
-          <p:nvPr>
-            <p:ph type="sldImg"/>
-          </p:nvPr>
-        </p:nvSpPr>
-        <p:spPr/>
-      </p:sp>
-      <p:sp>
-        <p:nvSpPr>
-          <p:cNvPr id="3" name="Notes Placeholder 2"/>
-          <p:cNvSpPr>
-            <a:spLocks noGrp="1"/>
-          </p:cNvSpPr>
-          <p:nvPr>
-            <p:ph type="body" idx="1"/>
-          </p:nvPr>
-        </p:nvSpPr>
-        <p:spPr/>
-        <p:txBody>
-          <a:bodyPr/>
-          <a:lstStyle/>
-          <a:p>
-            <a:r>
-              <a:rPr lang="en-US" dirty="0"/>
-              <a:t>SCRIPT: This is the day's proof. Give the lab the full 60 minutes; the recap is short.</a:t>
-            </a:r>
-            <a:endParaRPr lang="en-US" dirty="0"/>
-          </a:p>
-        </p:txBody>
-      </p:sp>
-      <p:sp>
-        <p:nvSpPr>
-          <p:cNvPr id="4" name="Slide Number Placeholder 3"/>
-          <p:cNvSpPr>
-            <a:spLocks noGrp="1"/>
-          </p:cNvSpPr>
-          <p:nvPr>
-            <p:ph type="sldNum" sz="quarter" idx="10"/>
-          </p:nvPr>
-        </p:nvSpPr>
-        <p:spPr/>
-        <p:txBody>
-          <a:bodyPr/>
-          <a:lstStyle/>
-          <a:p>
-            <a:fld id="{F7021451-1387-4CA6-816F-3879F97B5CBC}" type="slidenum">
-              <a:rPr lang="en-US"/>
-              <a:t>26</a:t>
-            </a:fld>
-            <a:endParaRPr lang="en-US"/>
-          </a:p>
-        </p:txBody>
-      </p:sp>
-    </p:spTree>
-    <p:extLst>
-      <p:ext uri="{BB962C8B-B14F-4D97-AF65-F5344CB8AC3E}">
-        <p14:creationId xmlns:p14="http://schemas.microsoft.com/office/powerpoint/2010/main" val="1024086991"/>
-      </p:ext>
-    </p:extLst>
-  </p:cSld>
-  <p:clrMapOvr>
-    <a:masterClrMapping/>
-  </p:clrMapOvr>
-</p:notes>
-</file>
-
-<file path=ppt/notesSlides/notesSlide27.xml><?xml version="1.0" encoding="utf-8"?>
-<p:notes xmlns:a="http://schemas.openxmlformats.org/drawingml/2006/main" xmlns:r="http://schemas.openxmlformats.org/officeDocument/2006/relationships" xmlns:p="http://schemas.openxmlformats.org/presentationml/2006/main">
-  <p:cSld>
-    <p:spTree>
-      <p:nvGrpSpPr>
-        <p:cNvPr id="1" name=""/>
-        <p:cNvGrpSpPr/>
-        <p:nvPr/>
-      </p:nvGrpSpPr>
-      <p:grpSpPr>
-        <a:xfrm>
-          <a:off x="0" y="0"/>
-          <a:ext cx="0" cy="0"/>
-          <a:chOff x="0" y="0"/>
-          <a:chExt cx="0" cy="0"/>
-        </a:xfrm>
-      </p:grpSpPr>
-      <p:sp>
-        <p:nvSpPr>
-          <p:cNvPr id="2" name="Slide Image Placeholder 1"/>
-          <p:cNvSpPr>
-            <a:spLocks noGrp="1" noRot="1" noChangeAspect="1"/>
-          </p:cNvSpPr>
-          <p:nvPr>
-            <p:ph type="sldImg"/>
-          </p:nvPr>
-        </p:nvSpPr>
-        <p:spPr/>
-      </p:sp>
-      <p:sp>
-        <p:nvSpPr>
-          <p:cNvPr id="3" name="Notes Placeholder 2"/>
-          <p:cNvSpPr>
-            <a:spLocks noGrp="1"/>
-          </p:cNvSpPr>
-          <p:nvPr>
-            <p:ph type="body" idx="1"/>
-          </p:nvPr>
-        </p:nvSpPr>
-        <p:spPr/>
-        <p:txBody>
-          <a:bodyPr/>
-          <a:lstStyle/>
-          <a:p>
-            <a:r>
-              <a:rPr lang="en-US" dirty="0"/>
-              <a:t>SCRIPT: Draw the arrow on the whiteboard: UI → notifier → service. Say the rule: the notifier file must not import package:flutter/material.dart. If it does, you have leaked UI into logic.
-This diagram is also tomorrow's starting point: the service gets a dio implementation and a repository gets added beside it.</a:t>
-            </a:r>
-            <a:endParaRPr lang="en-US" dirty="0"/>
-          </a:p>
-        </p:txBody>
-      </p:sp>
-      <p:sp>
-        <p:nvSpPr>
-          <p:cNvPr id="4" name="Slide Number Placeholder 3"/>
-          <p:cNvSpPr>
-            <a:spLocks noGrp="1"/>
-          </p:cNvSpPr>
-          <p:nvPr>
-            <p:ph type="sldNum" sz="quarter" idx="10"/>
-          </p:nvPr>
-        </p:nvSpPr>
-        <p:spPr/>
-        <p:txBody>
-          <a:bodyPr/>
-          <a:lstStyle/>
-          <a:p>
-            <a:fld id="{F7021451-1387-4CA6-816F-3879F97B5CBC}" type="slidenum">
-              <a:rPr lang="en-US"/>
-              <a:t>27</a:t>
-            </a:fld>
-            <a:endParaRPr lang="en-US"/>
-          </a:p>
-        </p:txBody>
-      </p:sp>
-    </p:spTree>
-    <p:extLst>
-      <p:ext uri="{BB962C8B-B14F-4D97-AF65-F5344CB8AC3E}">
-        <p14:creationId xmlns:p14="http://schemas.microsoft.com/office/powerpoint/2010/main" val="1024086991"/>
-      </p:ext>
-    </p:extLst>
-  </p:cSld>
-  <p:clrMapOvr>
-    <a:masterClrMapping/>
-  </p:clrMapOvr>
-</p:notes>
-</file>
-
-<file path=ppt/notesSlides/notesSlide28.xml><?xml version="1.0" encoding="utf-8"?>
-<p:notes xmlns:a="http://schemas.openxmlformats.org/drawingml/2006/main" xmlns:ns2="http://schemas.microsoft.com/office/powerpoint/2010/main" xmlns:p="http://schemas.openxmlformats.org/presentationml/2006/main">
-  <p:cSld>
-    <p:spTree>
-      <p:nvGrpSpPr>
-        <p:cNvPr id="1" name=""/>
-        <p:cNvGrpSpPr/>
-        <p:nvPr/>
-      </p:nvGrpSpPr>
-      <p:grpSpPr>
-        <a:xfrm>
-          <a:off x="0" y="0"/>
-          <a:ext cx="0" cy="0"/>
-          <a:chOff x="0" y="0"/>
-          <a:chExt cx="0" cy="0"/>
-        </a:xfrm>
-      </p:grpSpPr>
-      <p:sp>
-        <p:nvSpPr>
-          <p:cNvPr id="2" name="Slide Image Placeholder 1"/>
-          <p:cNvSpPr>
-            <a:spLocks noGrp="1" noRot="1" noChangeAspect="1"/>
-          </p:cNvSpPr>
-          <p:nvPr>
-            <p:ph type="sldImg"/>
-          </p:nvPr>
-        </p:nvSpPr>
-        <p:spPr/>
-      </p:sp>
-      <p:sp>
-        <p:nvSpPr>
-          <p:cNvPr id="3" name="Notes Placeholder 2"/>
-          <p:cNvSpPr>
-            <a:spLocks noGrp="1"/>
-          </p:cNvSpPr>
-          <p:nvPr>
-            <p:ph type="body" idx="1"/>
-          </p:nvPr>
-        </p:nvSpPr>
-        <p:spPr/>
-        <p:txBody>
-          <a:bodyPr/>
-          <a:lstStyle/>
-          <a:p>
-            <a:r>
-              <a:rPr lang="en-US" dirty="0"/>
-              <a:t>RUN THE LAB: 60 min. Everyone must reach step 5; steps 6-8 are the quality bar.
-COMMON ERRORS: "The switch expression isn't exhaustive" → a state missing (good - that is the feature). "ref isn't defined" → State instead of ConsumerState. Spinner never stops → exception not caught in submit (check try/catch) or the service is awaited outside try. SnackBar shows twice → ref.listen placed in a builder that runs twice; keep it at the top of build. Test hangs → forgot await on submit, or the fake's delay is real (fine, 1.2 s).
-RETRY CONFUSION: if someone used a FutureProvider for the quote and sees repeated calls in the log, that is Riverpod 3 retry - point to the behaviours slide.
-FLUTTER TEST ON WINDOWS: identical command. If "No tests ran" → file must end in _test.dart under test/.
-SOLUTION: Appendix D, and the Lab 3.2 section of the delegate handbook.</a:t>
-            </a:r>
-            <a:endParaRPr lang="en-US" dirty="0"/>
-          </a:p>
-        </p:txBody>
-      </p:sp>
-      <p:sp>
-        <p:nvSpPr>
-          <p:cNvPr id="4" name="Slide Number Placeholder 3"/>
-          <p:cNvSpPr>
-            <a:spLocks noGrp="1"/>
-          </p:cNvSpPr>
-          <p:nvPr>
-            <p:ph type="sldNum" sz="quarter" idx="10"/>
-          </p:nvPr>
-        </p:nvSpPr>
-        <p:spPr/>
-        <p:txBody>
-          <a:bodyPr/>
-          <a:lstStyle/>
-          <a:p>
-            <a:fld id="{F7021451-1387-4CA6-816F-3879F97B5CBC}" type="slidenum">
-              <a:rPr lang="en-US"/>
-              <a:t>28</a:t>
-            </a:fld>
-            <a:endParaRPr lang="en-US"/>
-          </a:p>
-        </p:txBody>
-      </p:sp>
-    </p:spTree>
-    <p:extLst>
-      <p:ext uri="{BB962C8B-B14F-4D97-AF65-F5344CB8AC3E}">
-        <ns2:creationId val="1024086991"/>
-      </p:ext>
-    </p:extLst>
-  </p:cSld>
-  <p:clrMapOvr>
-    <a:masterClrMapping/>
-  </p:clrMapOvr>
-</p:notes>
-</file>
-
-<file path=ppt/notesSlides/notesSlide29.xml><?xml version="1.0" encoding="utf-8"?>
-<p:notes xmlns:a="http://schemas.openxmlformats.org/drawingml/2006/main" xmlns:r="http://schemas.openxmlformats.org/officeDocument/2006/relationships" xmlns:p="http://schemas.openxmlformats.org/presentationml/2006/main">
-  <p:cSld>
-    <p:spTree>
-      <p:nvGrpSpPr>
-        <p:cNvPr id="1" name=""/>
-        <p:cNvGrpSpPr/>
-        <p:nvPr/>
-      </p:nvGrpSpPr>
-      <p:grpSpPr>
-        <a:xfrm>
-          <a:off x="0" y="0"/>
-          <a:ext cx="0" cy="0"/>
-          <a:chOff x="0" y="0"/>
-          <a:chExt cx="0" cy="0"/>
-        </a:xfrm>
-      </p:grpSpPr>
-      <p:sp>
-        <p:nvSpPr>
-          <p:cNvPr id="2" name="Slide Image Placeholder 1"/>
-          <p:cNvSpPr>
-            <a:spLocks noGrp="1" noRot="1" noChangeAspect="1"/>
-          </p:cNvSpPr>
-          <p:nvPr>
-            <p:ph type="sldImg"/>
-          </p:nvPr>
-        </p:nvSpPr>
-        <p:spPr/>
-      </p:sp>
-      <p:sp>
-        <p:nvSpPr>
-          <p:cNvPr id="3" name="Notes Placeholder 2"/>
-          <p:cNvSpPr>
-            <a:spLocks noGrp="1"/>
-          </p:cNvSpPr>
-          <p:nvPr>
-            <p:ph type="body" idx="1"/>
-          </p:nvPr>
-        </p:nvSpPr>
-        <p:spPr/>
-        <p:txBody>
-          <a:bodyPr/>
-          <a:lstStyle/>
-          <a:p>
-            <a:r>
-              <a:rPr lang="en-US" dirty="0"/>
-              <a:t>WHY: tomorrow's first block is navigation and the survey is uneven (1 to 5). The reading levels it.
-EXPECTED: Q1 go replaces the stack (deep-link semantics, tabs); push adds a page (detail from a list). Q2 '/quote/:id' → state.pathParameters['id']. Q3 a function (context, state) → String? that returns a new location or null; check an onboarding flag. Q4 a route wrapper that keeps a persistent scaffold (bottom nav) while child routes change; Quote / Saved / Settings tabs.
-LINK CHECK: the go_router docs URL moves occasionally; pub.dev/packages/go_router always has the current link at the top of the README.</a:t>
-            </a:r>
-            <a:endParaRPr lang="en-US" dirty="0"/>
-          </a:p>
-        </p:txBody>
-      </p:sp>
-      <p:sp>
-        <p:nvSpPr>
-          <p:cNvPr id="4" name="Slide Number Placeholder 3"/>
-          <p:cNvSpPr>
-            <a:spLocks noGrp="1"/>
-          </p:cNvSpPr>
-          <p:nvPr>
-            <p:ph type="sldNum" sz="quarter" idx="10"/>
-          </p:nvPr>
-        </p:nvSpPr>
-        <p:spPr/>
-        <p:txBody>
-          <a:bodyPr/>
-          <a:lstStyle/>
-          <a:p>
-            <a:fld id="{F7021451-1387-4CA6-816F-3879F97B5CBC}" type="slidenum">
-              <a:rPr lang="en-US"/>
-              <a:t>29</a:t>
-            </a:fld>
-            <a:endParaRPr lang="en-US"/>
-          </a:p>
-        </p:txBody>
-      </p:sp>
-    </p:spTree>
-    <p:extLst>
-      <p:ext uri="{BB962C8B-B14F-4D97-AF65-F5344CB8AC3E}">
-        <p14:creationId xmlns:p14="http://schemas.microsoft.com/office/powerpoint/2010/main" val="1024086991"/>
-      </p:ext>
-    </p:extLst>
-  </p:cSld>
-  <p:clrMapOvr>
-    <a:masterClrMapping/>
-  </p:clrMapOvr>
-</p:notes>
-</file>
-
-<file path=ppt/notesSlides/notesSlide3.xml><?xml version="1.0" encoding="utf-8"?>
-<p:notes xmlns:a="http://schemas.openxmlformats.org/drawingml/2006/main" xmlns:r="http://schemas.openxmlformats.org/officeDocument/2006/relationships" xmlns:p="http://schemas.openxmlformats.org/presentationml/2006/main">
-  <p:cSld>
-    <p:spTree>
-      <p:nvGrpSpPr>
-        <p:cNvPr id="1" name=""/>
-        <p:cNvGrpSpPr/>
-        <p:nvPr/>
-      </p:nvGrpSpPr>
-      <p:grpSpPr>
-        <a:xfrm>
-          <a:off x="0" y="0"/>
-          <a:ext cx="0" cy="0"/>
-          <a:chOff x="0" y="0"/>
-          <a:chExt cx="0" cy="0"/>
-        </a:xfrm>
-      </p:grpSpPr>
-      <p:sp>
-        <p:nvSpPr>
-          <p:cNvPr id="2" name="Slide Image Placeholder 1"/>
-          <p:cNvSpPr>
-            <a:spLocks noGrp="1" noRot="1" noChangeAspect="1"/>
-          </p:cNvSpPr>
-          <p:nvPr>
-            <p:ph type="sldImg"/>
-          </p:nvPr>
-        </p:nvSpPr>
-        <p:spPr/>
-      </p:sp>
-      <p:sp>
-        <p:nvSpPr>
-          <p:cNvPr id="3" name="Notes Placeholder 2"/>
-          <p:cNvSpPr>
-            <a:spLocks noGrp="1"/>
-          </p:cNvSpPr>
-          <p:nvPr>
-            <p:ph type="body" idx="1"/>
-          </p:nvPr>
-        </p:nvSpPr>
-        <p:spPr/>
-        <p:txBody>
-          <a:bodyPr/>
-          <a:lstStyle/>
-          <a:p>
-            <a:r>
-              <a:rPr lang="en-US" dirty="0"/>
-              <a:t>SCRIPT: After the two delegates present. Confirm the classification of yesterday's four examples: form field text = ephemeral (stays in CaptureForm State); brand = app; last quote = app; dark mode = system, read via MediaQuery/ThemeMode, not stored.
-Write the three categories on the whiteboard and leave them there all day; every decision today is "which column?"
-Riverpod's why (Q3): compile-time safety, no BuildContext needed, testable, combine providers, autoDispose. Confirm the two they picked and say which two YOU would pick for insurance: testability (pricing logic without widgets) and no runtime ProviderNotFound.</a:t>
-            </a:r>
-            <a:endParaRPr lang="en-US" dirty="0"/>
-          </a:p>
-        </p:txBody>
-      </p:sp>
-      <p:sp>
-        <p:nvSpPr>
-          <p:cNvPr id="4" name="Slide Number Placeholder 3"/>
-          <p:cNvSpPr>
-            <a:spLocks noGrp="1"/>
-          </p:cNvSpPr>
-          <p:nvPr>
-            <p:ph type="sldNum" sz="quarter" idx="10"/>
-          </p:nvPr>
-        </p:nvSpPr>
-        <p:spPr/>
-        <p:txBody>
-          <a:bodyPr/>
-          <a:lstStyle/>
-          <a:p>
-            <a:fld id="{F7021451-1387-4CA6-816F-3879F97B5CBC}" type="slidenum">
-              <a:rPr lang="en-US"/>
-              <a:t>3</a:t>
-            </a:fld>
-            <a:endParaRPr lang="en-US"/>
-          </a:p>
-        </p:txBody>
-      </p:sp>
-    </p:spTree>
-    <p:extLst>
-      <p:ext uri="{BB962C8B-B14F-4D97-AF65-F5344CB8AC3E}">
-        <p14:creationId xmlns:p14="http://schemas.microsoft.com/office/powerpoint/2010/main" val="1024086991"/>
-      </p:ext>
-    </p:extLst>
-  </p:cSld>
-  <p:clrMapOvr>
-    <a:masterClrMapping/>
-  </p:clrMapOvr>
-</p:notes>
-</file>
-
-<file path=ppt/notesSlides/notesSlide30.xml><?xml version="1.0" encoding="utf-8"?>
-<p:notes xmlns:a="http://schemas.openxmlformats.org/drawingml/2006/main" xmlns:r="http://schemas.openxmlformats.org/officeDocument/2006/relationships" xmlns:p="http://schemas.openxmlformats.org/presentationml/2006/main">
-  <p:cSld>
-    <p:spTree>
-      <p:nvGrpSpPr>
-        <p:cNvPr id="1" name=""/>
-        <p:cNvGrpSpPr/>
-        <p:nvPr/>
-      </p:nvGrpSpPr>
-      <p:grpSpPr>
-        <a:xfrm>
-          <a:off x="0" y="0"/>
-          <a:ext cx="0" cy="0"/>
-          <a:chOff x="0" y="0"/>
-          <a:chExt cx="0" cy="0"/>
-        </a:xfrm>
-      </p:grpSpPr>
-      <p:sp>
-        <p:nvSpPr>
-          <p:cNvPr id="2" name="Slide Image Placeholder 1"/>
-          <p:cNvSpPr>
-            <a:spLocks noGrp="1" noRot="1" noChangeAspect="1"/>
-          </p:cNvSpPr>
-          <p:nvPr>
-            <p:ph type="sldImg"/>
-          </p:nvPr>
-        </p:nvSpPr>
-        <p:spPr/>
-      </p:sp>
-      <p:sp>
-        <p:nvSpPr>
-          <p:cNvPr id="3" name="Notes Placeholder 2"/>
-          <p:cNvSpPr>
-            <a:spLocks noGrp="1"/>
-          </p:cNvSpPr>
-          <p:nvPr>
-            <p:ph type="body" idx="1"/>
-          </p:nvPr>
-        </p:nvSpPr>
-        <p:spPr/>
-        <p:txBody>
-          <a:bodyPr/>
-          <a:lstStyle/>
-          <a:p>
-            <a:r>
-              <a:rPr lang="en-US" dirty="0"/>
-              <a:t>SCRIPT: recap, homework slide, Q&amp;A. Ask: "What would you have to change to add a fifth state, QuoteExpired?" - the answer (one class, then fix every compile error) is the day's lesson in one sentence.
-PRESENTER: tonight, deploy the quote API (Day 4 Appendix) and test it from your Mac AND from a Windows machine or the emulator; pin dio, go_router, sqflite, shared_preferences, json_serializable, build_runner versions in the starter branch.</a:t>
-            </a:r>
-            <a:endParaRPr lang="en-US" dirty="0"/>
-          </a:p>
-        </p:txBody>
-      </p:sp>
-      <p:sp>
-        <p:nvSpPr>
-          <p:cNvPr id="4" name="Slide Number Placeholder 3"/>
-          <p:cNvSpPr>
-            <a:spLocks noGrp="1"/>
-          </p:cNvSpPr>
-          <p:nvPr>
-            <p:ph type="sldNum" sz="quarter" idx="10"/>
-          </p:nvPr>
-        </p:nvSpPr>
-        <p:spPr/>
-        <p:txBody>
-          <a:bodyPr/>
-          <a:lstStyle/>
-          <a:p>
-            <a:fld id="{F7021451-1387-4CA6-816F-3879F97B5CBC}" type="slidenum">
-              <a:rPr lang="en-US"/>
-              <a:t>30</a:t>
-            </a:fld>
-            <a:endParaRPr lang="en-US"/>
-          </a:p>
-        </p:txBody>
-      </p:sp>
-    </p:spTree>
-    <p:extLst>
-      <p:ext uri="{BB962C8B-B14F-4D97-AF65-F5344CB8AC3E}">
-        <p14:creationId xmlns:p14="http://schemas.microsoft.com/office/powerpoint/2010/main" val="1024086991"/>
-      </p:ext>
-    </p:extLst>
-  </p:cSld>
-  <p:clrMapOvr>
-    <a:masterClrMapping/>
-  </p:clrMapOvr>
-</p:notes>
-</file>
-
-<file path=ppt/notesSlides/notesSlide31.xml><?xml version="1.0" encoding="utf-8"?>
-<p:notes xmlns:a="http://schemas.openxmlformats.org/drawingml/2006/main" xmlns:r="http://schemas.openxmlformats.org/officeDocument/2006/relationships" xmlns:p="http://schemas.openxmlformats.org/presentationml/2006/main">
-  <p:cSld>
-    <p:spTree>
-      <p:nvGrpSpPr>
-        <p:cNvPr id="1" name=""/>
-        <p:cNvGrpSpPr/>
-        <p:nvPr/>
-      </p:nvGrpSpPr>
-      <p:grpSpPr>
-        <a:xfrm>
-          <a:off x="0" y="0"/>
-          <a:ext cx="0" cy="0"/>
-          <a:chOff x="0" y="0"/>
-          <a:chExt cx="0" cy="0"/>
-        </a:xfrm>
-      </p:grpSpPr>
-      <p:sp>
-        <p:nvSpPr>
-          <p:cNvPr id="2" name="Slide Image Placeholder 1"/>
-          <p:cNvSpPr>
-            <a:spLocks noGrp="1" noRot="1" noChangeAspect="1"/>
-          </p:cNvSpPr>
-          <p:nvPr>
-            <p:ph type="sldImg"/>
-          </p:nvPr>
-        </p:nvSpPr>
-        <p:spPr/>
-      </p:sp>
-      <p:sp>
-        <p:nvSpPr>
-          <p:cNvPr id="3" name="Notes Placeholder 2"/>
-          <p:cNvSpPr>
-            <a:spLocks noGrp="1"/>
-          </p:cNvSpPr>
-          <p:nvPr>
-            <p:ph type="body" idx="1"/>
-          </p:nvPr>
-        </p:nvSpPr>
-        <p:spPr/>
-        <p:txBody>
-          <a:bodyPr/>
-          <a:lstStyle/>
-          <a:p>
-            <a:r>
-              <a:rPr lang="en-US" dirty="0"/>
-              <a:t>PRESENTER. Today is the lowest-confidence topic in the survey (1.8), so the room will be quiet and unsure - ask more questions than usual to check they are with you.
-VERSION SAFETY: before Monday, run the pre-flight script and write the resolved flutter_riverpod version on the workbook cover and on the pubspec of the start branch. If it is 2.x, the only slides that need a verbal caveat are "Riverpod 3 behaviours" and "family, autoDispose".
-IF THE LAB OVERRUNS: Lab 3.2 core is steps 1-5. Steps 6-8 (tests) can move to Friday morning, which is a testing day anyway.</a:t>
-            </a:r>
-            <a:endParaRPr lang="en-US" dirty="0"/>
-          </a:p>
-        </p:txBody>
-      </p:sp>
-      <p:sp>
-        <p:nvSpPr>
-          <p:cNvPr id="4" name="Slide Number Placeholder 3"/>
-          <p:cNvSpPr>
-            <a:spLocks noGrp="1"/>
-          </p:cNvSpPr>
-          <p:nvPr>
-            <p:ph type="sldNum" sz="quarter" idx="10"/>
-          </p:nvPr>
-        </p:nvSpPr>
-        <p:spPr/>
-        <p:txBody>
-          <a:bodyPr/>
-          <a:lstStyle/>
-          <a:p>
-            <a:fld id="{F7021451-1387-4CA6-816F-3879F97B5CBC}" type="slidenum">
-              <a:rPr lang="en-US"/>
-              <a:t>31</a:t>
-            </a:fld>
-            <a:endParaRPr lang="en-US"/>
-          </a:p>
-        </p:txBody>
-      </p:sp>
-    </p:spTree>
-    <p:extLst>
-      <p:ext uri="{BB962C8B-B14F-4D97-AF65-F5344CB8AC3E}">
-        <p14:creationId xmlns:p14="http://schemas.microsoft.com/office/powerpoint/2010/main" val="1024086991"/>
-      </p:ext>
-    </p:extLst>
-  </p:cSld>
-  <p:clrMapOvr>
-    <a:masterClrMapping/>
-  </p:clrMapOvr>
-</p:notes>
-</file>
-
-<file path=ppt/notesSlides/notesSlide32.xml><?xml version="1.0" encoding="utf-8"?>
-<p:notes xmlns:a="http://schemas.openxmlformats.org/drawingml/2006/main" xmlns:r="http://schemas.openxmlformats.org/officeDocument/2006/relationships" xmlns:p="http://schemas.openxmlformats.org/presentationml/2006/main">
-  <p:cSld>
-    <p:spTree>
-      <p:nvGrpSpPr>
-        <p:cNvPr id="1" name=""/>
-        <p:cNvGrpSpPr/>
-        <p:nvPr/>
-      </p:nvGrpSpPr>
-      <p:grpSpPr>
-        <a:xfrm>
-          <a:off x="0" y="0"/>
-          <a:ext cx="0" cy="0"/>
-          <a:chOff x="0" y="0"/>
-          <a:chExt cx="0" cy="0"/>
-        </a:xfrm>
-      </p:grpSpPr>
-      <p:sp>
-        <p:nvSpPr>
-          <p:cNvPr id="2" name="Slide Image Placeholder 1"/>
-          <p:cNvSpPr>
-            <a:spLocks noGrp="1" noRot="1" noChangeAspect="1"/>
-          </p:cNvSpPr>
-          <p:nvPr>
-            <p:ph type="sldImg"/>
-          </p:nvPr>
-        </p:nvSpPr>
-        <p:spPr/>
-      </p:sp>
-      <p:sp>
-        <p:nvSpPr>
-          <p:cNvPr id="3" name="Notes Placeholder 2"/>
-          <p:cNvSpPr>
-            <a:spLocks noGrp="1"/>
-          </p:cNvSpPr>
-          <p:nvPr>
-            <p:ph type="body" idx="1"/>
-          </p:nvPr>
-        </p:nvSpPr>
-        <p:spPr/>
-        <p:txBody>
-          <a:bodyPr/>
-          <a:lstStyle/>
-          <a:p>
-            <a:r>
-              <a:rPr lang="en-US" dirty="0"/>
-              <a:t>Appendix.</a:t>
-            </a:r>
-            <a:endParaRPr lang="en-US" dirty="0"/>
-          </a:p>
-        </p:txBody>
-      </p:sp>
-      <p:sp>
-        <p:nvSpPr>
-          <p:cNvPr id="4" name="Slide Number Placeholder 3"/>
-          <p:cNvSpPr>
-            <a:spLocks noGrp="1"/>
-          </p:cNvSpPr>
-          <p:nvPr>
-            <p:ph type="sldNum" sz="quarter" idx="10"/>
-          </p:nvPr>
-        </p:nvSpPr>
-        <p:spPr/>
-        <p:txBody>
-          <a:bodyPr/>
-          <a:lstStyle/>
-          <a:p>
-            <a:fld id="{F7021451-1387-4CA6-816F-3879F97B5CBC}" type="slidenum">
-              <a:rPr lang="en-US"/>
-              <a:t>32</a:t>
-            </a:fld>
-            <a:endParaRPr lang="en-US"/>
-          </a:p>
-        </p:txBody>
-      </p:sp>
-    </p:spTree>
-    <p:extLst>
-      <p:ext uri="{BB962C8B-B14F-4D97-AF65-F5344CB8AC3E}">
-        <p14:creationId xmlns:p14="http://schemas.microsoft.com/office/powerpoint/2010/main" val="1024086991"/>
-      </p:ext>
-    </p:extLst>
-  </p:cSld>
-  <p:clrMapOvr>
-    <a:masterClrMapping/>
-  </p:clrMapOvr>
-</p:notes>
-</file>
-
-<file path=ppt/notesSlides/notesSlide33.xml><?xml version="1.0" encoding="utf-8"?>
-<p:notes xmlns:a="http://schemas.openxmlformats.org/drawingml/2006/main" xmlns:r="http://schemas.openxmlformats.org/officeDocument/2006/relationships" xmlns:p="http://schemas.openxmlformats.org/presentationml/2006/main">
-  <p:cSld>
-    <p:spTree>
-      <p:nvGrpSpPr>
-        <p:cNvPr id="1" name=""/>
-        <p:cNvGrpSpPr/>
-        <p:nvPr/>
-      </p:nvGrpSpPr>
-      <p:grpSpPr>
-        <a:xfrm>
-          <a:off x="0" y="0"/>
-          <a:ext cx="0" cy="0"/>
-          <a:chOff x="0" y="0"/>
-          <a:chExt cx="0" cy="0"/>
-        </a:xfrm>
-      </p:grpSpPr>
-      <p:sp>
-        <p:nvSpPr>
-          <p:cNvPr id="2" name="Slide Image Placeholder 1"/>
-          <p:cNvSpPr>
-            <a:spLocks noGrp="1" noRot="1" noChangeAspect="1"/>
-          </p:cNvSpPr>
-          <p:nvPr>
-            <p:ph type="sldImg"/>
-          </p:nvPr>
-        </p:nvSpPr>
-        <p:spPr/>
-      </p:sp>
-      <p:sp>
-        <p:nvSpPr>
-          <p:cNvPr id="3" name="Notes Placeholder 2"/>
-          <p:cNvSpPr>
-            <a:spLocks noGrp="1"/>
-          </p:cNvSpPr>
-          <p:nvPr>
-            <p:ph type="body" idx="1"/>
-          </p:nvPr>
-        </p:nvSpPr>
-        <p:spPr/>
-        <p:txBody>
-          <a:bodyPr/>
-          <a:lstStyle/>
-          <a:p>
-            <a:r>
-              <a:rPr lang="en-US" dirty="0"/>
-              <a:t>Reference.</a:t>
-            </a:r>
-            <a:endParaRPr lang="en-US" dirty="0"/>
-          </a:p>
-        </p:txBody>
-      </p:sp>
-      <p:sp>
-        <p:nvSpPr>
-          <p:cNvPr id="4" name="Slide Number Placeholder 3"/>
-          <p:cNvSpPr>
-            <a:spLocks noGrp="1"/>
-          </p:cNvSpPr>
-          <p:nvPr>
-            <p:ph type="sldNum" sz="quarter" idx="10"/>
-          </p:nvPr>
-        </p:nvSpPr>
-        <p:spPr/>
-        <p:txBody>
-          <a:bodyPr/>
-          <a:lstStyle/>
-          <a:p>
-            <a:fld id="{F7021451-1387-4CA6-816F-3879F97B5CBC}" type="slidenum">
-              <a:rPr lang="en-US"/>
-              <a:t>33</a:t>
-            </a:fld>
-            <a:endParaRPr lang="en-US"/>
-          </a:p>
-        </p:txBody>
-      </p:sp>
-    </p:spTree>
-    <p:extLst>
-      <p:ext uri="{BB962C8B-B14F-4D97-AF65-F5344CB8AC3E}">
-        <p14:creationId xmlns:p14="http://schemas.microsoft.com/office/powerpoint/2010/main" val="1024086991"/>
-      </p:ext>
-    </p:extLst>
-  </p:cSld>
-  <p:clrMapOvr>
-    <a:masterClrMapping/>
-  </p:clrMapOvr>
-</p:notes>
-</file>
-
-<file path=ppt/notesSlides/notesSlide34.xml><?xml version="1.0" encoding="utf-8"?>
-<p:notes xmlns:a="http://schemas.openxmlformats.org/drawingml/2006/main" xmlns:r="http://schemas.openxmlformats.org/officeDocument/2006/relationships" xmlns:p="http://schemas.openxmlformats.org/presentationml/2006/main">
-  <p:cSld>
-    <p:spTree>
-      <p:nvGrpSpPr>
-        <p:cNvPr id="1" name=""/>
-        <p:cNvGrpSpPr/>
-        <p:nvPr/>
-      </p:nvGrpSpPr>
-      <p:grpSpPr>
-        <a:xfrm>
-          <a:off x="0" y="0"/>
-          <a:ext cx="0" cy="0"/>
-          <a:chOff x="0" y="0"/>
-          <a:chExt cx="0" cy="0"/>
-        </a:xfrm>
-      </p:grpSpPr>
-      <p:sp>
-        <p:nvSpPr>
-          <p:cNvPr id="2" name="Slide Image Placeholder 1"/>
-          <p:cNvSpPr>
-            <a:spLocks noGrp="1" noRot="1" noChangeAspect="1"/>
-          </p:cNvSpPr>
-          <p:nvPr>
-            <p:ph type="sldImg"/>
-          </p:nvPr>
-        </p:nvSpPr>
-        <p:spPr/>
-      </p:sp>
-      <p:sp>
-        <p:nvSpPr>
-          <p:cNvPr id="3" name="Notes Placeholder 2"/>
-          <p:cNvSpPr>
-            <a:spLocks noGrp="1"/>
-          </p:cNvSpPr>
-          <p:nvPr>
-            <p:ph type="body" idx="1"/>
-          </p:nvPr>
-        </p:nvSpPr>
-        <p:spPr/>
-        <p:txBody>
-          <a:bodyPr/>
-          <a:lstStyle/>
-          <a:p>
-            <a:r>
-              <a:rPr lang="en-US" dirty="0"/>
-              <a:t>Reference for the audit-trail question.</a:t>
-            </a:r>
-            <a:endParaRPr lang="en-US" dirty="0"/>
-          </a:p>
-        </p:txBody>
-      </p:sp>
-      <p:sp>
-        <p:nvSpPr>
-          <p:cNvPr id="4" name="Slide Number Placeholder 3"/>
-          <p:cNvSpPr>
-            <a:spLocks noGrp="1"/>
-          </p:cNvSpPr>
-          <p:nvPr>
-            <p:ph type="sldNum" sz="quarter" idx="10"/>
-          </p:nvPr>
-        </p:nvSpPr>
-        <p:spPr/>
-        <p:txBody>
-          <a:bodyPr/>
-          <a:lstStyle/>
-          <a:p>
-            <a:fld id="{F7021451-1387-4CA6-816F-3879F97B5CBC}" type="slidenum">
-              <a:rPr lang="en-US"/>
-              <a:t>34</a:t>
-            </a:fld>
-            <a:endParaRPr lang="en-US"/>
-          </a:p>
-        </p:txBody>
-      </p:sp>
-    </p:spTree>
-    <p:extLst>
-      <p:ext uri="{BB962C8B-B14F-4D97-AF65-F5344CB8AC3E}">
-        <p14:creationId xmlns:p14="http://schemas.microsoft.com/office/powerpoint/2010/main" val="1024086991"/>
-      </p:ext>
-    </p:extLst>
-  </p:cSld>
-  <p:clrMapOvr>
-    <a:masterClrMapping/>
-  </p:clrMapOvr>
-</p:notes>
-</file>
-
-<file path=ppt/notesSlides/notesSlide35.xml><?xml version="1.0" encoding="utf-8"?>
-<p:notes xmlns:a="http://schemas.openxmlformats.org/drawingml/2006/main" xmlns:r="http://schemas.openxmlformats.org/officeDocument/2006/relationships" xmlns:p="http://schemas.openxmlformats.org/presentationml/2006/main">
-  <p:cSld>
-    <p:spTree>
-      <p:nvGrpSpPr>
-        <p:cNvPr id="1" name=""/>
-        <p:cNvGrpSpPr/>
-        <p:nvPr/>
-      </p:nvGrpSpPr>
-      <p:grpSpPr>
-        <a:xfrm>
-          <a:off x="0" y="0"/>
-          <a:ext cx="0" cy="0"/>
-          <a:chOff x="0" y="0"/>
-          <a:chExt cx="0" cy="0"/>
-        </a:xfrm>
-      </p:grpSpPr>
-      <p:sp>
-        <p:nvSpPr>
-          <p:cNvPr id="2" name="Slide Image Placeholder 1"/>
-          <p:cNvSpPr>
-            <a:spLocks noGrp="1" noRot="1" noChangeAspect="1"/>
-          </p:cNvSpPr>
-          <p:nvPr>
-            <p:ph type="sldImg"/>
-          </p:nvPr>
-        </p:nvSpPr>
-        <p:spPr/>
-      </p:sp>
-      <p:sp>
-        <p:nvSpPr>
-          <p:cNvPr id="3" name="Notes Placeholder 2"/>
-          <p:cNvSpPr>
-            <a:spLocks noGrp="1"/>
-          </p:cNvSpPr>
-          <p:nvPr>
-            <p:ph type="body" idx="1"/>
-          </p:nvPr>
-        </p:nvSpPr>
-        <p:spPr/>
-        <p:txBody>
-          <a:bodyPr/>
-          <a:lstStyle/>
-          <a:p>
-            <a:r>
-              <a:rPr lang="en-US" dirty="0"/>
-              <a:t>Reference for the audit-trail question.</a:t>
-            </a:r>
-            <a:endParaRPr lang="en-US" dirty="0"/>
-          </a:p>
-        </p:txBody>
-      </p:sp>
-      <p:sp>
-        <p:nvSpPr>
-          <p:cNvPr id="4" name="Slide Number Placeholder 3"/>
-          <p:cNvSpPr>
-            <a:spLocks noGrp="1"/>
-          </p:cNvSpPr>
-          <p:nvPr>
-            <p:ph type="sldNum" sz="quarter" idx="10"/>
-          </p:nvPr>
-        </p:nvSpPr>
-        <p:spPr/>
-        <p:txBody>
-          <a:bodyPr/>
-          <a:lstStyle/>
-          <a:p>
-            <a:fld id="{F7021451-1387-4CA6-816F-3879F97B5CBC}" type="slidenum">
-              <a:rPr lang="en-US"/>
-              <a:t>35</a:t>
-            </a:fld>
-            <a:endParaRPr lang="en-US"/>
-          </a:p>
-        </p:txBody>
-      </p:sp>
-    </p:spTree>
-    <p:extLst>
-      <p:ext uri="{BB962C8B-B14F-4D97-AF65-F5344CB8AC3E}">
-        <p14:creationId xmlns:p14="http://schemas.microsoft.com/office/powerpoint/2010/main" val="1024086991"/>
-      </p:ext>
-    </p:extLst>
-  </p:cSld>
-  <p:clrMapOvr>
-    <a:masterClrMapping/>
-  </p:clrMapOvr>
-</p:notes>
-</file>
-
-<file path=ppt/notesSlides/notesSlide36.xml><?xml version="1.0" encoding="utf-8"?>
-<p:notes xmlns:a="http://schemas.openxmlformats.org/drawingml/2006/main" xmlns:r="http://schemas.openxmlformats.org/officeDocument/2006/relationships" xmlns:p="http://schemas.openxmlformats.org/presentationml/2006/main">
-  <p:cSld>
-    <p:spTree>
-      <p:nvGrpSpPr>
-        <p:cNvPr id="1" name=""/>
-        <p:cNvGrpSpPr/>
-        <p:nvPr/>
-      </p:nvGrpSpPr>
-      <p:grpSpPr>
-        <a:xfrm>
-          <a:off x="0" y="0"/>
-          <a:ext cx="0" cy="0"/>
-          <a:chOff x="0" y="0"/>
-          <a:chExt cx="0" cy="0"/>
-        </a:xfrm>
-      </p:grpSpPr>
-      <p:sp>
-        <p:nvSpPr>
-          <p:cNvPr id="2" name="Slide Image Placeholder 1"/>
-          <p:cNvSpPr>
-            <a:spLocks noGrp="1" noRot="1" noChangeAspect="1"/>
-          </p:cNvSpPr>
-          <p:nvPr>
-            <p:ph type="sldImg"/>
-          </p:nvPr>
-        </p:nvSpPr>
-        <p:spPr/>
-      </p:sp>
-      <p:sp>
-        <p:nvSpPr>
-          <p:cNvPr id="3" name="Notes Placeholder 2"/>
-          <p:cNvSpPr>
-            <a:spLocks noGrp="1"/>
-          </p:cNvSpPr>
-          <p:nvPr>
-            <p:ph type="body" idx="1"/>
-          </p:nvPr>
-        </p:nvSpPr>
-        <p:spPr/>
-        <p:txBody>
-          <a:bodyPr/>
-          <a:lstStyle/>
-          <a:p>
-            <a:r>
-              <a:rPr lang="en-US" dirty="0"/>
-              <a:t>Solution.</a:t>
-            </a:r>
-            <a:endParaRPr lang="en-US" dirty="0"/>
-          </a:p>
-        </p:txBody>
-      </p:sp>
-      <p:sp>
-        <p:nvSpPr>
-          <p:cNvPr id="4" name="Slide Number Placeholder 3"/>
-          <p:cNvSpPr>
-            <a:spLocks noGrp="1"/>
-          </p:cNvSpPr>
-          <p:nvPr>
-            <p:ph type="sldNum" sz="quarter" idx="10"/>
-          </p:nvPr>
-        </p:nvSpPr>
-        <p:spPr/>
-        <p:txBody>
-          <a:bodyPr/>
-          <a:lstStyle/>
-          <a:p>
-            <a:fld id="{F7021451-1387-4CA6-816F-3879F97B5CBC}" type="slidenum">
-              <a:rPr lang="en-US"/>
-              <a:t>36</a:t>
-            </a:fld>
-            <a:endParaRPr lang="en-US"/>
-          </a:p>
-        </p:txBody>
-      </p:sp>
-    </p:spTree>
-    <p:extLst>
-      <p:ext uri="{BB962C8B-B14F-4D97-AF65-F5344CB8AC3E}">
-        <p14:creationId xmlns:p14="http://schemas.microsoft.com/office/powerpoint/2010/main" val="1024086991"/>
-      </p:ext>
-    </p:extLst>
-  </p:cSld>
-  <p:clrMapOvr>
-    <a:masterClrMapping/>
-  </p:clrMapOvr>
-</p:notes>
-</file>
-
-<file path=ppt/notesSlides/notesSlide37.xml><?xml version="1.0" encoding="utf-8"?>
-<p:notes xmlns:a="http://schemas.openxmlformats.org/drawingml/2006/main" xmlns:r="http://schemas.openxmlformats.org/officeDocument/2006/relationships" xmlns:p="http://schemas.openxmlformats.org/presentationml/2006/main">
-  <p:cSld>
-    <p:spTree>
-      <p:nvGrpSpPr>
-        <p:cNvPr id="1" name=""/>
-        <p:cNvGrpSpPr/>
-        <p:nvPr/>
-      </p:nvGrpSpPr>
-      <p:grpSpPr>
-        <a:xfrm>
-          <a:off x="0" y="0"/>
-          <a:ext cx="0" cy="0"/>
-          <a:chOff x="0" y="0"/>
-          <a:chExt cx="0" cy="0"/>
-        </a:xfrm>
-      </p:grpSpPr>
-      <p:sp>
-        <p:nvSpPr>
-          <p:cNvPr id="2" name="Slide Image Placeholder 1"/>
-          <p:cNvSpPr>
-            <a:spLocks noGrp="1" noRot="1" noChangeAspect="1"/>
-          </p:cNvSpPr>
-          <p:nvPr>
-            <p:ph type="sldImg"/>
-          </p:nvPr>
-        </p:nvSpPr>
-        <p:spPr/>
-      </p:sp>
-      <p:sp>
-        <p:nvSpPr>
-          <p:cNvPr id="3" name="Notes Placeholder 2"/>
-          <p:cNvSpPr>
-            <a:spLocks noGrp="1"/>
-          </p:cNvSpPr>
-          <p:nvPr>
-            <p:ph type="body" idx="1"/>
-          </p:nvPr>
-        </p:nvSpPr>
-        <p:spPr/>
-        <p:txBody>
-          <a:bodyPr/>
-          <a:lstStyle/>
-          <a:p>
-            <a:r>
-              <a:rPr lang="en-US" dirty="0"/>
-              <a:t>Solution.</a:t>
-            </a:r>
-            <a:endParaRPr lang="en-US" dirty="0"/>
-          </a:p>
-        </p:txBody>
-      </p:sp>
-      <p:sp>
-        <p:nvSpPr>
-          <p:cNvPr id="4" name="Slide Number Placeholder 3"/>
-          <p:cNvSpPr>
-            <a:spLocks noGrp="1"/>
-          </p:cNvSpPr>
-          <p:nvPr>
-            <p:ph type="sldNum" sz="quarter" idx="10"/>
-          </p:nvPr>
-        </p:nvSpPr>
-        <p:spPr/>
-        <p:txBody>
-          <a:bodyPr/>
-          <a:lstStyle/>
-          <a:p>
-            <a:fld id="{F7021451-1387-4CA6-816F-3879F97B5CBC}" type="slidenum">
-              <a:rPr lang="en-US"/>
-              <a:t>37</a:t>
-            </a:fld>
-            <a:endParaRPr lang="en-US"/>
-          </a:p>
-        </p:txBody>
-      </p:sp>
-    </p:spTree>
-    <p:extLst>
-      <p:ext uri="{BB962C8B-B14F-4D97-AF65-F5344CB8AC3E}">
-        <p14:creationId xmlns:p14="http://schemas.microsoft.com/office/powerpoint/2010/main" val="1024086991"/>
-      </p:ext>
-    </p:extLst>
-  </p:cSld>
-  <p:clrMapOvr>
-    <a:masterClrMapping/>
-  </p:clrMapOvr>
-</p:notes>
-</file>
-
-<file path=ppt/notesSlides/notesSlide38.xml><?xml version="1.0" encoding="utf-8"?>
-<p:notes xmlns:a="http://schemas.openxmlformats.org/drawingml/2006/main" xmlns:r="http://schemas.openxmlformats.org/officeDocument/2006/relationships" xmlns:p="http://schemas.openxmlformats.org/presentationml/2006/main">
-  <p:cSld>
-    <p:spTree>
-      <p:nvGrpSpPr>
-        <p:cNvPr id="1" name=""/>
-        <p:cNvGrpSpPr/>
-        <p:nvPr/>
-      </p:nvGrpSpPr>
-      <p:grpSpPr>
-        <a:xfrm>
-          <a:off x="0" y="0"/>
-          <a:ext cx="0" cy="0"/>
-          <a:chOff x="0" y="0"/>
-          <a:chExt cx="0" cy="0"/>
-        </a:xfrm>
-      </p:grpSpPr>
-      <p:sp>
-        <p:nvSpPr>
-          <p:cNvPr id="2" name="Slide Image Placeholder 1"/>
-          <p:cNvSpPr>
-            <a:spLocks noGrp="1" noRot="1" noChangeAspect="1"/>
-          </p:cNvSpPr>
-          <p:nvPr>
-            <p:ph type="sldImg"/>
-          </p:nvPr>
-        </p:nvSpPr>
-        <p:spPr/>
-      </p:sp>
-      <p:sp>
-        <p:nvSpPr>
-          <p:cNvPr id="3" name="Notes Placeholder 2"/>
-          <p:cNvSpPr>
-            <a:spLocks noGrp="1"/>
-          </p:cNvSpPr>
-          <p:nvPr>
-            <p:ph type="body" idx="1"/>
-          </p:nvPr>
-        </p:nvSpPr>
-        <p:spPr/>
-        <p:txBody>
-          <a:bodyPr/>
-          <a:lstStyle/>
-          <a:p>
-            <a:r>
-              <a:rPr lang="en-US" dirty="0"/>
-              <a:t>Reference.</a:t>
-            </a:r>
-            <a:endParaRPr lang="en-US" dirty="0"/>
-          </a:p>
-        </p:txBody>
-      </p:sp>
-      <p:sp>
-        <p:nvSpPr>
-          <p:cNvPr id="4" name="Slide Number Placeholder 3"/>
-          <p:cNvSpPr>
-            <a:spLocks noGrp="1"/>
-          </p:cNvSpPr>
-          <p:nvPr>
-            <p:ph type="sldNum" sz="quarter" idx="10"/>
-          </p:nvPr>
-        </p:nvSpPr>
-        <p:spPr/>
-        <p:txBody>
-          <a:bodyPr/>
-          <a:lstStyle/>
-          <a:p>
-            <a:fld id="{F7021451-1387-4CA6-816F-3879F97B5CBC}" type="slidenum">
-              <a:rPr lang="en-US"/>
-              <a:t>38</a:t>
-            </a:fld>
-            <a:endParaRPr lang="en-US"/>
-          </a:p>
-        </p:txBody>
-      </p:sp>
-    </p:spTree>
-    <p:extLst>
-      <p:ext uri="{BB962C8B-B14F-4D97-AF65-F5344CB8AC3E}">
-        <p14:creationId xmlns:p14="http://schemas.microsoft.com/office/powerpoint/2010/main" val="1024086991"/>
-      </p:ext>
-    </p:extLst>
-  </p:cSld>
-  <p:clrMapOvr>
-    <a:masterClrMapping/>
-  </p:clrMapOvr>
-</p:notes>
-</file>
-
-<file path=ppt/notesSlides/notesSlide39.xml><?xml version="1.0" encoding="utf-8"?>
-<p:notes xmlns:a="http://schemas.openxmlformats.org/drawingml/2006/main" xmlns:r="http://schemas.openxmlformats.org/officeDocument/2006/relationships" xmlns:p="http://schemas.openxmlformats.org/presentationml/2006/main">
-  <p:cSld>
-    <p:spTree>
-      <p:nvGrpSpPr>
-        <p:cNvPr id="1" name=""/>
-        <p:cNvGrpSpPr/>
-        <p:nvPr/>
-      </p:nvGrpSpPr>
-      <p:grpSpPr>
-        <a:xfrm>
-          <a:off x="0" y="0"/>
-          <a:ext cx="0" cy="0"/>
-          <a:chOff x="0" y="0"/>
-          <a:chExt cx="0" cy="0"/>
-        </a:xfrm>
-      </p:grpSpPr>
-      <p:sp>
-        <p:nvSpPr>
-          <p:cNvPr id="2" name="Slide Image Placeholder 1"/>
-          <p:cNvSpPr>
-            <a:spLocks noGrp="1" noRot="1" noChangeAspect="1"/>
-          </p:cNvSpPr>
-          <p:nvPr>
-            <p:ph type="sldImg"/>
-          </p:nvPr>
-        </p:nvSpPr>
-        <p:spPr/>
-      </p:sp>
-      <p:sp>
-        <p:nvSpPr>
-          <p:cNvPr id="3" name="Notes Placeholder 2"/>
-          <p:cNvSpPr>
-            <a:spLocks noGrp="1"/>
-          </p:cNvSpPr>
-          <p:nvPr>
-            <p:ph type="body" idx="1"/>
-          </p:nvPr>
-        </p:nvSpPr>
-        <p:spPr/>
-        <p:txBody>
-          <a:bodyPr/>
-          <a:lstStyle/>
-          <a:p>
-            <a:r>
-              <a:rPr lang="en-US" dirty="0"/>
-              <a:t>Solution part 1.</a:t>
-            </a:r>
-            <a:endParaRPr lang="en-US" dirty="0"/>
-          </a:p>
-        </p:txBody>
-      </p:sp>
-      <p:sp>
-        <p:nvSpPr>
-          <p:cNvPr id="4" name="Slide Number Placeholder 3"/>
-          <p:cNvSpPr>
-            <a:spLocks noGrp="1"/>
-          </p:cNvSpPr>
-          <p:nvPr>
-            <p:ph type="sldNum" sz="quarter" idx="10"/>
-          </p:nvPr>
-        </p:nvSpPr>
-        <p:spPr/>
-        <p:txBody>
-          <a:bodyPr/>
-          <a:lstStyle/>
-          <a:p>
-            <a:fld id="{F7021451-1387-4CA6-816F-3879F97B5CBC}" type="slidenum">
-              <a:rPr lang="en-US"/>
-              <a:t>39</a:t>
-            </a:fld>
-            <a:endParaRPr lang="en-US"/>
-          </a:p>
-        </p:txBody>
-      </p:sp>
-    </p:spTree>
-    <p:extLst>
-      <p:ext uri="{BB962C8B-B14F-4D97-AF65-F5344CB8AC3E}">
-        <p14:creationId xmlns:p14="http://schemas.microsoft.com/office/powerpoint/2010/main" val="1024086991"/>
-      </p:ext>
-    </p:extLst>
-  </p:cSld>
-  <p:clrMapOvr>
-    <a:masterClrMapping/>
-  </p:clrMapOvr>
-</p:notes>
-</file>
-
-<file path=ppt/notesSlides/notesSlide4.xml><?xml version="1.0" encoding="utf-8"?>
-<p:notes xmlns:a="http://schemas.openxmlformats.org/drawingml/2006/main" xmlns:r="http://schemas.openxmlformats.org/officeDocument/2006/relationships" xmlns:p="http://schemas.openxmlformats.org/presentationml/2006/main">
-  <p:cSld>
-    <p:spTree>
-      <p:nvGrpSpPr>
-        <p:cNvPr id="1" name=""/>
-        <p:cNvGrpSpPr/>
-        <p:nvPr/>
-      </p:nvGrpSpPr>
-      <p:grpSpPr>
-        <a:xfrm>
-          <a:off x="0" y="0"/>
-          <a:ext cx="0" cy="0"/>
-          <a:chOff x="0" y="0"/>
-          <a:chExt cx="0" cy="0"/>
-        </a:xfrm>
-      </p:grpSpPr>
-      <p:sp>
-        <p:nvSpPr>
-          <p:cNvPr id="2" name="Slide Image Placeholder 1"/>
-          <p:cNvSpPr>
-            <a:spLocks noGrp="1" noRot="1" noChangeAspect="1"/>
-          </p:cNvSpPr>
-          <p:nvPr>
-            <p:ph type="sldImg"/>
-          </p:nvPr>
-        </p:nvSpPr>
-        <p:spPr/>
-      </p:sp>
-      <p:sp>
-        <p:nvSpPr>
-          <p:cNvPr id="3" name="Notes Placeholder 2"/>
-          <p:cNvSpPr>
-            <a:spLocks noGrp="1"/>
-          </p:cNvSpPr>
-          <p:nvPr>
-            <p:ph type="body" idx="1"/>
-          </p:nvPr>
-        </p:nvSpPr>
-        <p:spPr/>
-        <p:txBody>
-          <a:bodyPr/>
-          <a:lstStyle/>
-          <a:p>
-            <a:r>
-              <a:rPr lang="en-US" dirty="0"/>
-              <a:t>SCRIPT: Build the problem before the solution. The room is senior; they will accept Riverpod much faster if they have seen the failure mode of the naive approach on their own code from yesterday.</a:t>
-            </a:r>
-            <a:endParaRPr lang="en-US" dirty="0"/>
-          </a:p>
-        </p:txBody>
-      </p:sp>
-      <p:sp>
-        <p:nvSpPr>
-          <p:cNvPr id="4" name="Slide Number Placeholder 3"/>
-          <p:cNvSpPr>
-            <a:spLocks noGrp="1"/>
-          </p:cNvSpPr>
-          <p:nvPr>
-            <p:ph type="sldNum" sz="quarter" idx="10"/>
-          </p:nvPr>
-        </p:nvSpPr>
-        <p:spPr/>
-        <p:txBody>
-          <a:bodyPr/>
-          <a:lstStyle/>
-          <a:p>
-            <a:fld id="{F7021451-1387-4CA6-816F-3879F97B5CBC}" type="slidenum">
-              <a:rPr lang="en-US"/>
-              <a:t>4</a:t>
-            </a:fld>
-            <a:endParaRPr lang="en-US"/>
-          </a:p>
-        </p:txBody>
-      </p:sp>
-    </p:spTree>
-    <p:extLst>
-      <p:ext uri="{BB962C8B-B14F-4D97-AF65-F5344CB8AC3E}">
-        <p14:creationId xmlns:p14="http://schemas.microsoft.com/office/powerpoint/2010/main" val="1024086991"/>
-      </p:ext>
-    </p:extLst>
-  </p:cSld>
-  <p:clrMapOvr>
-    <a:masterClrMapping/>
-  </p:clrMapOvr>
-</p:notes>
-</file>
-
-<file path=ppt/notesSlides/notesSlide40.xml><?xml version="1.0" encoding="utf-8"?>
-<p:notes xmlns:a="http://schemas.openxmlformats.org/drawingml/2006/main" xmlns:r="http://schemas.openxmlformats.org/officeDocument/2006/relationships" xmlns:p="http://schemas.openxmlformats.org/presentationml/2006/main">
-  <p:cSld>
-    <p:spTree>
-      <p:nvGrpSpPr>
-        <p:cNvPr id="1" name=""/>
-        <p:cNvGrpSpPr/>
-        <p:nvPr/>
-      </p:nvGrpSpPr>
-      <p:grpSpPr>
-        <a:xfrm>
-          <a:off x="0" y="0"/>
-          <a:ext cx="0" cy="0"/>
-          <a:chOff x="0" y="0"/>
-          <a:chExt cx="0" cy="0"/>
-        </a:xfrm>
-      </p:grpSpPr>
-      <p:sp>
-        <p:nvSpPr>
-          <p:cNvPr id="2" name="Slide Image Placeholder 1"/>
-          <p:cNvSpPr>
-            <a:spLocks noGrp="1" noRot="1" noChangeAspect="1"/>
-          </p:cNvSpPr>
-          <p:nvPr>
-            <p:ph type="sldImg"/>
-          </p:nvPr>
-        </p:nvSpPr>
-        <p:spPr/>
-      </p:sp>
-      <p:sp>
-        <p:nvSpPr>
-          <p:cNvPr id="3" name="Notes Placeholder 2"/>
-          <p:cNvSpPr>
-            <a:spLocks noGrp="1"/>
-          </p:cNvSpPr>
-          <p:nvPr>
-            <p:ph type="body" idx="1"/>
-          </p:nvPr>
-        </p:nvSpPr>
-        <p:spPr/>
-        <p:txBody>
-          <a:bodyPr/>
-          <a:lstStyle/>
-          <a:p>
-            <a:r>
-              <a:rPr lang="en-US" dirty="0"/>
-              <a:t>Solution part 1.</a:t>
-            </a:r>
-            <a:endParaRPr lang="en-US" dirty="0"/>
-          </a:p>
-        </p:txBody>
-      </p:sp>
-      <p:sp>
-        <p:nvSpPr>
-          <p:cNvPr id="4" name="Slide Number Placeholder 3"/>
-          <p:cNvSpPr>
-            <a:spLocks noGrp="1"/>
-          </p:cNvSpPr>
-          <p:nvPr>
-            <p:ph type="sldNum" sz="quarter" idx="10"/>
-          </p:nvPr>
-        </p:nvSpPr>
-        <p:spPr/>
-        <p:txBody>
-          <a:bodyPr/>
-          <a:lstStyle/>
-          <a:p>
-            <a:fld id="{F7021451-1387-4CA6-816F-3879F97B5CBC}" type="slidenum">
-              <a:rPr lang="en-US"/>
-              <a:t>40</a:t>
-            </a:fld>
-            <a:endParaRPr lang="en-US"/>
-          </a:p>
-        </p:txBody>
-      </p:sp>
-    </p:spTree>
-    <p:extLst>
-      <p:ext uri="{BB962C8B-B14F-4D97-AF65-F5344CB8AC3E}">
-        <p14:creationId xmlns:p14="http://schemas.microsoft.com/office/powerpoint/2010/main" val="1024086991"/>
-      </p:ext>
-    </p:extLst>
-  </p:cSld>
-  <p:clrMapOvr>
-    <a:masterClrMapping/>
-  </p:clrMapOvr>
-</p:notes>
-</file>
-
-<file path=ppt/notesSlides/notesSlide41.xml><?xml version="1.0" encoding="utf-8"?>
-<p:notes xmlns:a="http://schemas.openxmlformats.org/drawingml/2006/main" xmlns:r="http://schemas.openxmlformats.org/officeDocument/2006/relationships" xmlns:p="http://schemas.openxmlformats.org/presentationml/2006/main">
-  <p:cSld>
-    <p:spTree>
-      <p:nvGrpSpPr>
-        <p:cNvPr id="1" name=""/>
-        <p:cNvGrpSpPr/>
-        <p:nvPr/>
-      </p:nvGrpSpPr>
-      <p:grpSpPr>
-        <a:xfrm>
-          <a:off x="0" y="0"/>
-          <a:ext cx="0" cy="0"/>
-          <a:chOff x="0" y="0"/>
-          <a:chExt cx="0" cy="0"/>
-        </a:xfrm>
-      </p:grpSpPr>
-      <p:sp>
-        <p:nvSpPr>
-          <p:cNvPr id="2" name="Slide Image Placeholder 1"/>
-          <p:cNvSpPr>
-            <a:spLocks noGrp="1" noRot="1" noChangeAspect="1"/>
-          </p:cNvSpPr>
-          <p:nvPr>
-            <p:ph type="sldImg"/>
-          </p:nvPr>
-        </p:nvSpPr>
-        <p:spPr/>
-      </p:sp>
-      <p:sp>
-        <p:nvSpPr>
-          <p:cNvPr id="3" name="Notes Placeholder 2"/>
-          <p:cNvSpPr>
-            <a:spLocks noGrp="1"/>
-          </p:cNvSpPr>
-          <p:nvPr>
-            <p:ph type="body" idx="1"/>
-          </p:nvPr>
-        </p:nvSpPr>
-        <p:spPr/>
-        <p:txBody>
-          <a:bodyPr/>
-          <a:lstStyle/>
-          <a:p>
-            <a:r>
-              <a:rPr lang="en-US" dirty="0"/>
-              <a:t>Solution part 2.</a:t>
-            </a:r>
-            <a:endParaRPr lang="en-US" dirty="0"/>
-          </a:p>
-        </p:txBody>
-      </p:sp>
-      <p:sp>
-        <p:nvSpPr>
-          <p:cNvPr id="4" name="Slide Number Placeholder 3"/>
-          <p:cNvSpPr>
-            <a:spLocks noGrp="1"/>
-          </p:cNvSpPr>
-          <p:nvPr>
-            <p:ph type="sldNum" sz="quarter" idx="10"/>
-          </p:nvPr>
-        </p:nvSpPr>
-        <p:spPr/>
-        <p:txBody>
-          <a:bodyPr/>
-          <a:lstStyle/>
-          <a:p>
-            <a:fld id="{F7021451-1387-4CA6-816F-3879F97B5CBC}" type="slidenum">
-              <a:rPr lang="en-US"/>
-              <a:t>41</a:t>
-            </a:fld>
-            <a:endParaRPr lang="en-US"/>
-          </a:p>
-        </p:txBody>
-      </p:sp>
-    </p:spTree>
-    <p:extLst>
-      <p:ext uri="{BB962C8B-B14F-4D97-AF65-F5344CB8AC3E}">
-        <p14:creationId xmlns:p14="http://schemas.microsoft.com/office/powerpoint/2010/main" val="1024086991"/>
-      </p:ext>
-    </p:extLst>
-  </p:cSld>
-  <p:clrMapOvr>
-    <a:masterClrMapping/>
-  </p:clrMapOvr>
-</p:notes>
-</file>
-
-<file path=ppt/notesSlides/notesSlide42.xml><?xml version="1.0" encoding="utf-8"?>
-<p:notes xmlns:a="http://schemas.openxmlformats.org/drawingml/2006/main" xmlns:r="http://schemas.openxmlformats.org/officeDocument/2006/relationships" xmlns:p="http://schemas.openxmlformats.org/presentationml/2006/main">
-  <p:cSld>
-    <p:spTree>
-      <p:nvGrpSpPr>
-        <p:cNvPr id="1" name=""/>
-        <p:cNvGrpSpPr/>
-        <p:nvPr/>
-      </p:nvGrpSpPr>
-      <p:grpSpPr>
-        <a:xfrm>
-          <a:off x="0" y="0"/>
-          <a:ext cx="0" cy="0"/>
-          <a:chOff x="0" y="0"/>
-          <a:chExt cx="0" cy="0"/>
-        </a:xfrm>
-      </p:grpSpPr>
-      <p:sp>
-        <p:nvSpPr>
-          <p:cNvPr id="2" name="Slide Image Placeholder 1"/>
-          <p:cNvSpPr>
-            <a:spLocks noGrp="1" noRot="1" noChangeAspect="1"/>
-          </p:cNvSpPr>
-          <p:nvPr>
-            <p:ph type="sldImg"/>
-          </p:nvPr>
-        </p:nvSpPr>
-        <p:spPr/>
-      </p:sp>
-      <p:sp>
-        <p:nvSpPr>
-          <p:cNvPr id="3" name="Notes Placeholder 2"/>
-          <p:cNvSpPr>
-            <a:spLocks noGrp="1"/>
-          </p:cNvSpPr>
-          <p:nvPr>
-            <p:ph type="body" idx="1"/>
-          </p:nvPr>
-        </p:nvSpPr>
-        <p:spPr/>
-        <p:txBody>
-          <a:bodyPr/>
-          <a:lstStyle/>
-          <a:p>
-            <a:r>
-              <a:rPr lang="en-US" dirty="0"/>
-              <a:t>Solution part 2.</a:t>
-            </a:r>
-            <a:endParaRPr lang="en-US" dirty="0"/>
-          </a:p>
-        </p:txBody>
-      </p:sp>
-      <p:sp>
-        <p:nvSpPr>
-          <p:cNvPr id="4" name="Slide Number Placeholder 3"/>
-          <p:cNvSpPr>
-            <a:spLocks noGrp="1"/>
-          </p:cNvSpPr>
-          <p:nvPr>
-            <p:ph type="sldNum" sz="quarter" idx="10"/>
-          </p:nvPr>
-        </p:nvSpPr>
-        <p:spPr/>
-        <p:txBody>
-          <a:bodyPr/>
-          <a:lstStyle/>
-          <a:p>
-            <a:fld id="{F7021451-1387-4CA6-816F-3879F97B5CBC}" type="slidenum">
-              <a:rPr lang="en-US"/>
-              <a:t>42</a:t>
-            </a:fld>
-            <a:endParaRPr lang="en-US"/>
-          </a:p>
-        </p:txBody>
-      </p:sp>
-    </p:spTree>
-    <p:extLst>
-      <p:ext uri="{BB962C8B-B14F-4D97-AF65-F5344CB8AC3E}">
-        <p14:creationId xmlns:p14="http://schemas.microsoft.com/office/powerpoint/2010/main" val="1024086991"/>
-      </p:ext>
-    </p:extLst>
-  </p:cSld>
-  <p:clrMapOvr>
-    <a:masterClrMapping/>
-  </p:clrMapOvr>
-</p:notes>
-</file>
-
-<file path=ppt/notesSlides/notesSlide43.xml><?xml version="1.0" encoding="utf-8"?>
-<p:notes xmlns:a="http://schemas.openxmlformats.org/drawingml/2006/main" xmlns:r="http://schemas.openxmlformats.org/officeDocument/2006/relationships" xmlns:p="http://schemas.openxmlformats.org/presentationml/2006/main">
-  <p:cSld>
-    <p:spTree>
-      <p:nvGrpSpPr>
-        <p:cNvPr id="1" name=""/>
-        <p:cNvGrpSpPr/>
-        <p:nvPr/>
-      </p:nvGrpSpPr>
-      <p:grpSpPr>
-        <a:xfrm>
-          <a:off x="0" y="0"/>
-          <a:ext cx="0" cy="0"/>
-          <a:chOff x="0" y="0"/>
-          <a:chExt cx="0" cy="0"/>
-        </a:xfrm>
-      </p:grpSpPr>
-      <p:sp>
-        <p:nvSpPr>
-          <p:cNvPr id="2" name="Slide Image Placeholder 1"/>
-          <p:cNvSpPr>
-            <a:spLocks noGrp="1" noRot="1" noChangeAspect="1"/>
-          </p:cNvSpPr>
-          <p:nvPr>
-            <p:ph type="sldImg"/>
-          </p:nvPr>
-        </p:nvSpPr>
-        <p:spPr/>
-      </p:sp>
-      <p:sp>
-        <p:nvSpPr>
-          <p:cNvPr id="3" name="Notes Placeholder 2"/>
-          <p:cNvSpPr>
-            <a:spLocks noGrp="1"/>
-          </p:cNvSpPr>
-          <p:nvPr>
-            <p:ph type="body" idx="1"/>
-          </p:nvPr>
-        </p:nvSpPr>
-        <p:spPr/>
-        <p:txBody>
-          <a:bodyPr/>
-          <a:lstStyle/>
-          <a:p>
-            <a:r>
-              <a:rPr lang="en-US" dirty="0"/>
-              <a:t>Solution part 2.</a:t>
-            </a:r>
-            <a:endParaRPr lang="en-US" dirty="0"/>
-          </a:p>
-        </p:txBody>
-      </p:sp>
-      <p:sp>
-        <p:nvSpPr>
-          <p:cNvPr id="4" name="Slide Number Placeholder 3"/>
-          <p:cNvSpPr>
-            <a:spLocks noGrp="1"/>
-          </p:cNvSpPr>
-          <p:nvPr>
-            <p:ph type="sldNum" sz="quarter" idx="10"/>
-          </p:nvPr>
-        </p:nvSpPr>
-        <p:spPr/>
-        <p:txBody>
-          <a:bodyPr/>
-          <a:lstStyle/>
-          <a:p>
-            <a:fld id="{F7021451-1387-4CA6-816F-3879F97B5CBC}" type="slidenum">
-              <a:rPr lang="en-US"/>
-              <a:t>43</a:t>
-            </a:fld>
-            <a:endParaRPr lang="en-US"/>
-          </a:p>
-        </p:txBody>
-      </p:sp>
-    </p:spTree>
-    <p:extLst>
-      <p:ext uri="{BB962C8B-B14F-4D97-AF65-F5344CB8AC3E}">
-        <p14:creationId xmlns:p14="http://schemas.microsoft.com/office/powerpoint/2010/main" val="1024086991"/>
-      </p:ext>
-    </p:extLst>
-  </p:cSld>
-  <p:clrMapOvr>
-    <a:masterClrMapping/>
-  </p:clrMapOvr>
-</p:notes>
-</file>
-
-<file path=ppt/notesSlides/notesSlide44.xml><?xml version="1.0" encoding="utf-8"?>
-<p:notes xmlns:a="http://schemas.openxmlformats.org/drawingml/2006/main" xmlns:r="http://schemas.openxmlformats.org/officeDocument/2006/relationships" xmlns:p="http://schemas.openxmlformats.org/presentationml/2006/main">
-  <p:cSld>
-    <p:spTree>
-      <p:nvGrpSpPr>
-        <p:cNvPr id="1" name=""/>
-        <p:cNvGrpSpPr/>
-        <p:nvPr/>
-      </p:nvGrpSpPr>
-      <p:grpSpPr>
-        <a:xfrm>
-          <a:off x="0" y="0"/>
-          <a:ext cx="0" cy="0"/>
-          <a:chOff x="0" y="0"/>
-          <a:chExt cx="0" cy="0"/>
-        </a:xfrm>
-      </p:grpSpPr>
-      <p:sp>
-        <p:nvSpPr>
-          <p:cNvPr id="2" name="Slide Image Placeholder 1"/>
-          <p:cNvSpPr>
-            <a:spLocks noGrp="1" noRot="1" noChangeAspect="1"/>
-          </p:cNvSpPr>
-          <p:nvPr>
-            <p:ph type="sldImg"/>
-          </p:nvPr>
-        </p:nvSpPr>
-        <p:spPr/>
-      </p:sp>
-      <p:sp>
-        <p:nvSpPr>
-          <p:cNvPr id="3" name="Notes Placeholder 2"/>
-          <p:cNvSpPr>
-            <a:spLocks noGrp="1"/>
-          </p:cNvSpPr>
-          <p:nvPr>
-            <p:ph type="body" idx="1"/>
-          </p:nvPr>
-        </p:nvSpPr>
-        <p:spPr/>
-        <p:txBody>
-          <a:bodyPr/>
-          <a:lstStyle/>
-          <a:p>
-            <a:r>
-              <a:rPr lang="en-US" dirty="0"/>
-              <a:t>Solution part 3. Test imports: package:flutter_test/flutter_test.dart and package:flutter_riverpod/flutter_riverpod.dart.</a:t>
-            </a:r>
-            <a:endParaRPr lang="en-US" dirty="0"/>
-          </a:p>
-        </p:txBody>
-      </p:sp>
-      <p:sp>
-        <p:nvSpPr>
-          <p:cNvPr id="4" name="Slide Number Placeholder 3"/>
-          <p:cNvSpPr>
-            <a:spLocks noGrp="1"/>
-          </p:cNvSpPr>
-          <p:nvPr>
-            <p:ph type="sldNum" sz="quarter" idx="10"/>
-          </p:nvPr>
-        </p:nvSpPr>
-        <p:spPr/>
-        <p:txBody>
-          <a:bodyPr/>
-          <a:lstStyle/>
-          <a:p>
-            <a:fld id="{F7021451-1387-4CA6-816F-3879F97B5CBC}" type="slidenum">
-              <a:rPr lang="en-US"/>
-              <a:t>44</a:t>
-            </a:fld>
-            <a:endParaRPr lang="en-US"/>
-          </a:p>
-        </p:txBody>
-      </p:sp>
-    </p:spTree>
-    <p:extLst>
-      <p:ext uri="{BB962C8B-B14F-4D97-AF65-F5344CB8AC3E}">
-        <p14:creationId xmlns:p14="http://schemas.microsoft.com/office/powerpoint/2010/main" val="1024086991"/>
-      </p:ext>
-    </p:extLst>
-  </p:cSld>
-  <p:clrMapOvr>
-    <a:masterClrMapping/>
-  </p:clrMapOvr>
-</p:notes>
-</file>
-
-<file path=ppt/notesSlides/notesSlide45.xml><?xml version="1.0" encoding="utf-8"?>
-<p:notes xmlns:a="http://schemas.openxmlformats.org/drawingml/2006/main" xmlns:r="http://schemas.openxmlformats.org/officeDocument/2006/relationships" xmlns:p="http://schemas.openxmlformats.org/presentationml/2006/main">
-  <p:cSld>
-    <p:spTree>
-      <p:nvGrpSpPr>
-        <p:cNvPr id="1" name=""/>
-        <p:cNvGrpSpPr/>
-        <p:nvPr/>
-      </p:nvGrpSpPr>
-      <p:grpSpPr>
-        <a:xfrm>
-          <a:off x="0" y="0"/>
-          <a:ext cx="0" cy="0"/>
-          <a:chOff x="0" y="0"/>
-          <a:chExt cx="0" cy="0"/>
-        </a:xfrm>
-      </p:grpSpPr>
-      <p:sp>
-        <p:nvSpPr>
-          <p:cNvPr id="2" name="Slide Image Placeholder 1"/>
-          <p:cNvSpPr>
-            <a:spLocks noGrp="1" noRot="1" noChangeAspect="1"/>
-          </p:cNvSpPr>
-          <p:nvPr>
-            <p:ph type="sldImg"/>
-          </p:nvPr>
-        </p:nvSpPr>
-        <p:spPr/>
-      </p:sp>
-      <p:sp>
-        <p:nvSpPr>
-          <p:cNvPr id="3" name="Notes Placeholder 2"/>
-          <p:cNvSpPr>
-            <a:spLocks noGrp="1"/>
-          </p:cNvSpPr>
-          <p:nvPr>
-            <p:ph type="body" idx="1"/>
-          </p:nvPr>
-        </p:nvSpPr>
-        <p:spPr/>
-        <p:txBody>
-          <a:bodyPr/>
-          <a:lstStyle/>
-          <a:p>
-            <a:r>
-              <a:rPr lang="en-US" dirty="0"/>
-              <a:t>Keep on the second display during labs.</a:t>
-            </a:r>
-            <a:endParaRPr lang="en-US" dirty="0"/>
-          </a:p>
-        </p:txBody>
-      </p:sp>
-      <p:sp>
-        <p:nvSpPr>
-          <p:cNvPr id="4" name="Slide Number Placeholder 3"/>
-          <p:cNvSpPr>
-            <a:spLocks noGrp="1"/>
-          </p:cNvSpPr>
-          <p:nvPr>
-            <p:ph type="sldNum" sz="quarter" idx="10"/>
-          </p:nvPr>
-        </p:nvSpPr>
-        <p:spPr/>
-        <p:txBody>
-          <a:bodyPr/>
-          <a:lstStyle/>
-          <a:p>
-            <a:fld id="{F7021451-1387-4CA6-816F-3879F97B5CBC}" type="slidenum">
-              <a:rPr lang="en-US"/>
-              <a:t>45</a:t>
-            </a:fld>
-            <a:endParaRPr lang="en-US"/>
-          </a:p>
-        </p:txBody>
-      </p:sp>
-    </p:spTree>
-    <p:extLst>
-      <p:ext uri="{BB962C8B-B14F-4D97-AF65-F5344CB8AC3E}">
-        <p14:creationId xmlns:p14="http://schemas.microsoft.com/office/powerpoint/2010/main" val="1024086991"/>
-      </p:ext>
-    </p:extLst>
-  </p:cSld>
-  <p:clrMapOvr>
-    <a:masterClrMapping/>
-  </p:clrMapOvr>
-</p:notes>
-</file>
-
-<file path=ppt/notesSlides/notesSlide46.xml><?xml version="1.0" encoding="utf-8"?>
-<p:notes xmlns:a="http://schemas.openxmlformats.org/drawingml/2006/main" xmlns:r="http://schemas.openxmlformats.org/officeDocument/2006/relationships" xmlns:p="http://schemas.openxmlformats.org/presentationml/2006/main">
-  <p:cSld>
-    <p:spTree>
-      <p:nvGrpSpPr>
-        <p:cNvPr id="1" name=""/>
-        <p:cNvGrpSpPr/>
-        <p:nvPr/>
-      </p:nvGrpSpPr>
-      <p:grpSpPr>
-        <a:xfrm>
-          <a:off x="0" y="0"/>
-          <a:ext cx="0" cy="0"/>
-          <a:chOff x="0" y="0"/>
-          <a:chExt cx="0" cy="0"/>
-        </a:xfrm>
-      </p:grpSpPr>
-      <p:sp>
-        <p:nvSpPr>
-          <p:cNvPr id="2" name="Slide Image Placeholder 1"/>
-          <p:cNvSpPr>
-            <a:spLocks noGrp="1" noRot="1" noChangeAspect="1"/>
-          </p:cNvSpPr>
-          <p:nvPr>
-            <p:ph type="sldImg"/>
-          </p:nvPr>
-        </p:nvSpPr>
-        <p:spPr/>
-      </p:sp>
-      <p:sp>
-        <p:nvSpPr>
-          <p:cNvPr id="3" name="Notes Placeholder 2"/>
-          <p:cNvSpPr>
-            <a:spLocks noGrp="1"/>
-          </p:cNvSpPr>
-          <p:nvPr>
-            <p:ph type="body" idx="1"/>
-          </p:nvPr>
-        </p:nvSpPr>
-        <p:spPr/>
-        <p:txBody>
-          <a:bodyPr/>
-          <a:lstStyle/>
-          <a:p>
-            <a:r>
-              <a:rPr lang="en-US" dirty="0"/>
-              <a:t>Replace the repo placeholder.</a:t>
-            </a:r>
-            <a:endParaRPr lang="en-US" dirty="0"/>
-          </a:p>
-        </p:txBody>
-      </p:sp>
-      <p:sp>
-        <p:nvSpPr>
-          <p:cNvPr id="4" name="Slide Number Placeholder 3"/>
-          <p:cNvSpPr>
-            <a:spLocks noGrp="1"/>
-          </p:cNvSpPr>
-          <p:nvPr>
-            <p:ph type="sldNum" sz="quarter" idx="10"/>
-          </p:nvPr>
-        </p:nvSpPr>
-        <p:spPr/>
-        <p:txBody>
-          <a:bodyPr/>
-          <a:lstStyle/>
-          <a:p>
-            <a:fld id="{F7021451-1387-4CA6-816F-3879F97B5CBC}" type="slidenum">
-              <a:rPr lang="en-US"/>
-              <a:t>46</a:t>
-            </a:fld>
-            <a:endParaRPr lang="en-US"/>
-          </a:p>
-        </p:txBody>
-      </p:sp>
-    </p:spTree>
-    <p:extLst>
-      <p:ext uri="{BB962C8B-B14F-4D97-AF65-F5344CB8AC3E}">
-        <p14:creationId xmlns:p14="http://schemas.microsoft.com/office/powerpoint/2010/main" val="1024086991"/>
-      </p:ext>
-    </p:extLst>
-  </p:cSld>
-  <p:clrMapOvr>
-    <a:masterClrMapping/>
-  </p:clrMapOvr>
-</p:notes>
-</file>
-
-<file path=ppt/notesSlides/notesSlide5.xml><?xml version="1.0" encoding="utf-8"?>
-<p:notes xmlns:a="http://schemas.openxmlformats.org/drawingml/2006/main" xmlns:r="http://schemas.openxmlformats.org/officeDocument/2006/relationships" xmlns:p="http://schemas.openxmlformats.org/presentationml/2006/main">
-  <p:cSld>
-    <p:spTree>
-      <p:nvGrpSpPr>
-        <p:cNvPr id="1" name=""/>
-        <p:cNvGrpSpPr/>
-        <p:nvPr/>
-      </p:nvGrpSpPr>
-      <p:grpSpPr>
-        <a:xfrm>
-          <a:off x="0" y="0"/>
-          <a:ext cx="0" cy="0"/>
-          <a:chOff x="0" y="0"/>
-          <a:chExt cx="0" cy="0"/>
-        </a:xfrm>
-      </p:grpSpPr>
-      <p:sp>
-        <p:nvSpPr>
-          <p:cNvPr id="2" name="Slide Image Placeholder 1"/>
-          <p:cNvSpPr>
-            <a:spLocks noGrp="1" noRot="1" noChangeAspect="1"/>
-          </p:cNvSpPr>
-          <p:nvPr>
-            <p:ph type="sldImg"/>
-          </p:nvPr>
-        </p:nvSpPr>
-        <p:spPr/>
-      </p:sp>
-      <p:sp>
-        <p:nvSpPr>
-          <p:cNvPr id="3" name="Notes Placeholder 2"/>
-          <p:cNvSpPr>
-            <a:spLocks noGrp="1"/>
-          </p:cNvSpPr>
-          <p:nvPr>
-            <p:ph type="body" idx="1"/>
-          </p:nvPr>
-        </p:nvSpPr>
-        <p:spPr/>
-        <p:txBody>
-          <a:bodyPr/>
-          <a:lstStyle/>
-          <a:p>
-            <a:r>
-              <a:rPr lang="en-US" dirty="0"/>
-              <a:t>SCRIPT: Open yesterday's app.dart on the projector. Count the hops: QuoteApp → CaptureScreen → AppBar action. Now imagine a SettingsScreen and a ResultScreen that both need the brand. That is three more parameter pairs and setState at the root rebuilding MaterialApp every time.
-React people: same story as useState in App.js with props drilled down; you reached for Context, then Redux/Zustand. Angular people: the equivalent is passing @Input/@Output through five components instead of injecting a service.
-Do not bash setState. It is correct for ephemeral state and we keep using it inside CaptureForm.</a:t>
-            </a:r>
-            <a:endParaRPr lang="en-US" dirty="0"/>
-          </a:p>
-        </p:txBody>
-      </p:sp>
-      <p:sp>
-        <p:nvSpPr>
-          <p:cNvPr id="4" name="Slide Number Placeholder 3"/>
-          <p:cNvSpPr>
-            <a:spLocks noGrp="1"/>
-          </p:cNvSpPr>
-          <p:nvPr>
-            <p:ph type="sldNum" sz="quarter" idx="10"/>
-          </p:nvPr>
-        </p:nvSpPr>
-        <p:spPr/>
-        <p:txBody>
-          <a:bodyPr/>
-          <a:lstStyle/>
-          <a:p>
-            <a:fld id="{F7021451-1387-4CA6-816F-3879F97B5CBC}" type="slidenum">
-              <a:rPr lang="en-US"/>
-              <a:t>5</a:t>
-            </a:fld>
-            <a:endParaRPr lang="en-US"/>
-          </a:p>
-        </p:txBody>
-      </p:sp>
-    </p:spTree>
-    <p:extLst>
-      <p:ext uri="{BB962C8B-B14F-4D97-AF65-F5344CB8AC3E}">
-        <p14:creationId xmlns:p14="http://schemas.microsoft.com/office/powerpoint/2010/main" val="1024086991"/>
-      </p:ext>
-    </p:extLst>
-  </p:cSld>
-  <p:clrMapOvr>
-    <a:masterClrMapping/>
-  </p:clrMapOvr>
-</p:notes>
-</file>
-
-<file path=ppt/notesSlides/notesSlide6.xml><?xml version="1.0" encoding="utf-8"?>
-<p:notes xmlns:a="http://schemas.openxmlformats.org/drawingml/2006/main" xmlns:r="http://schemas.openxmlformats.org/officeDocument/2006/relationships" xmlns:p="http://schemas.openxmlformats.org/presentationml/2006/main">
-  <p:cSld>
-    <p:spTree>
-      <p:nvGrpSpPr>
-        <p:cNvPr id="1" name=""/>
-        <p:cNvGrpSpPr/>
-        <p:nvPr/>
-      </p:nvGrpSpPr>
-      <p:grpSpPr>
-        <a:xfrm>
-          <a:off x="0" y="0"/>
-          <a:ext cx="0" cy="0"/>
-          <a:chOff x="0" y="0"/>
-          <a:chExt cx="0" cy="0"/>
-        </a:xfrm>
-      </p:grpSpPr>
-      <p:sp>
-        <p:nvSpPr>
-          <p:cNvPr id="2" name="Slide Image Placeholder 1"/>
-          <p:cNvSpPr>
-            <a:spLocks noGrp="1" noRot="1" noChangeAspect="1"/>
-          </p:cNvSpPr>
-          <p:nvPr>
-            <p:ph type="sldImg"/>
-          </p:nvPr>
-        </p:nvSpPr>
-        <p:spPr/>
-      </p:sp>
-      <p:sp>
-        <p:nvSpPr>
-          <p:cNvPr id="3" name="Notes Placeholder 2"/>
-          <p:cNvSpPr>
-            <a:spLocks noGrp="1"/>
-          </p:cNvSpPr>
-          <p:nvPr>
-            <p:ph type="body" idx="1"/>
-          </p:nvPr>
-        </p:nvSpPr>
-        <p:spPr/>
-        <p:txBody>
-          <a:bodyPr/>
-          <a:lstStyle/>
-          <a:p>
-            <a:r>
-              <a:rPr lang="en-US" dirty="0"/>
-              <a:t>SCRIPT: Ten minutes on the mechanism, so Provider and Riverpod are not magic. Show BrandScope: provide it once above MaterialApp, read it with BrandScope.of(context) in the header. Hot reload. Then ask "how does the AppBar button CHANGE the brand?" - it cannot; InheritedWidget is read-only from below. That is the gap.
-Angular mapping: InheritedWidget ≈ a value provided in the injector tree; Riverpod ≈ injectable services with observables.
-Do not have them build this in a lab - it is understanding, not a pattern we use directly.</a:t>
-            </a:r>
-            <a:endParaRPr lang="en-US" dirty="0"/>
-          </a:p>
-        </p:txBody>
-      </p:sp>
-      <p:sp>
-        <p:nvSpPr>
-          <p:cNvPr id="4" name="Slide Number Placeholder 3"/>
-          <p:cNvSpPr>
-            <a:spLocks noGrp="1"/>
-          </p:cNvSpPr>
-          <p:nvPr>
-            <p:ph type="sldNum" sz="quarter" idx="10"/>
-          </p:nvPr>
-        </p:nvSpPr>
-        <p:spPr/>
-        <p:txBody>
-          <a:bodyPr/>
-          <a:lstStyle/>
-          <a:p>
-            <a:fld id="{F7021451-1387-4CA6-816F-3879F97B5CBC}" type="slidenum">
-              <a:rPr lang="en-US"/>
-              <a:t>6</a:t>
-            </a:fld>
-            <a:endParaRPr lang="en-US"/>
-          </a:p>
-        </p:txBody>
-      </p:sp>
-    </p:spTree>
-    <p:extLst>
-      <p:ext uri="{BB962C8B-B14F-4D97-AF65-F5344CB8AC3E}">
-        <p14:creationId xmlns:p14="http://schemas.microsoft.com/office/powerpoint/2010/main" val="1024086991"/>
-      </p:ext>
-    </p:extLst>
-  </p:cSld>
-  <p:clrMapOvr>
-    <a:masterClrMapping/>
-  </p:clrMapOvr>
-</p:notes>
-</file>
-
-<file path=ppt/notesSlides/notesSlide7.xml><?xml version="1.0" encoding="utf-8"?>
-<p:notes xmlns:a="http://schemas.openxmlformats.org/drawingml/2006/main" xmlns:r="http://schemas.openxmlformats.org/officeDocument/2006/relationships" xmlns:p="http://schemas.openxmlformats.org/presentationml/2006/main">
-  <p:cSld>
-    <p:spTree>
-      <p:nvGrpSpPr>
-        <p:cNvPr id="1" name=""/>
-        <p:cNvGrpSpPr/>
-        <p:nvPr/>
-      </p:nvGrpSpPr>
-      <p:grpSpPr>
-        <a:xfrm>
-          <a:off x="0" y="0"/>
-          <a:ext cx="0" cy="0"/>
-          <a:chOff x="0" y="0"/>
-          <a:chExt cx="0" cy="0"/>
-        </a:xfrm>
-      </p:grpSpPr>
-      <p:sp>
-        <p:nvSpPr>
-          <p:cNvPr id="2" name="Slide Image Placeholder 1"/>
-          <p:cNvSpPr>
-            <a:spLocks noGrp="1" noRot="1" noChangeAspect="1"/>
-          </p:cNvSpPr>
-          <p:nvPr>
-            <p:ph type="sldImg"/>
-          </p:nvPr>
-        </p:nvSpPr>
-        <p:spPr/>
-      </p:sp>
-      <p:sp>
-        <p:nvSpPr>
-          <p:cNvPr id="3" name="Notes Placeholder 2"/>
-          <p:cNvSpPr>
-            <a:spLocks noGrp="1"/>
-          </p:cNvSpPr>
-          <p:nvPr>
-            <p:ph type="body" idx="1"/>
-          </p:nvPr>
-        </p:nvSpPr>
-        <p:spPr/>
-        <p:txBody>
-          <a:bodyPr/>
-          <a:lstStyle/>
-          <a:p>
-            <a:r>
-              <a:rPr lang="en-US" dirty="0"/>
-              <a:t>SCRIPT: You will meet all three in existing codebases and Stack Overflow answers, so know them. ValueNotifier for one value; ChangeNotifier for an object; Provider to make a ChangeNotifier available via context.
-PROVIDER CODE: Appendix A. Show it for 60 seconds so context.watch looks familiar, then say the three reasons we use Riverpod instead: no BuildContext dependency (usable in services and tests), compile-time safety (a provider is a global final, cannot be "not found"), immutable state by convention.
-A senior dev may say "Provider is enough for us." Fair. Answer: for a small app, yes; for a multi-brand insurance platform with a pricing engine you want to unit test, Riverpod's testability pays for itself in week two.</a:t>
-            </a:r>
-            <a:endParaRPr lang="en-US" dirty="0"/>
-          </a:p>
-        </p:txBody>
-      </p:sp>
-      <p:sp>
-        <p:nvSpPr>
-          <p:cNvPr id="4" name="Slide Number Placeholder 3"/>
-          <p:cNvSpPr>
-            <a:spLocks noGrp="1"/>
-          </p:cNvSpPr>
-          <p:nvPr>
-            <p:ph type="sldNum" sz="quarter" idx="10"/>
-          </p:nvPr>
-        </p:nvSpPr>
-        <p:spPr/>
-        <p:txBody>
-          <a:bodyPr/>
-          <a:lstStyle/>
-          <a:p>
-            <a:fld id="{F7021451-1387-4CA6-816F-3879F97B5CBC}" type="slidenum">
-              <a:rPr lang="en-US"/>
-              <a:t>7</a:t>
-            </a:fld>
-            <a:endParaRPr lang="en-US"/>
-          </a:p>
-        </p:txBody>
-      </p:sp>
-    </p:spTree>
-    <p:extLst>
-      <p:ext uri="{BB962C8B-B14F-4D97-AF65-F5344CB8AC3E}">
-        <p14:creationId xmlns:p14="http://schemas.microsoft.com/office/powerpoint/2010/main" val="1024086991"/>
-      </p:ext>
-    </p:extLst>
-  </p:cSld>
-  <p:clrMapOvr>
-    <a:masterClrMapping/>
-  </p:clrMapOvr>
-</p:notes>
-</file>
-
-<file path=ppt/notesSlides/notesSlide8.xml><?xml version="1.0" encoding="utf-8"?>
-<p:notes xmlns:a="http://schemas.openxmlformats.org/drawingml/2006/main" xmlns:r="http://schemas.openxmlformats.org/officeDocument/2006/relationships" xmlns:p="http://schemas.openxmlformats.org/presentationml/2006/main">
-  <p:cSld>
-    <p:spTree>
-      <p:nvGrpSpPr>
-        <p:cNvPr id="1" name=""/>
-        <p:cNvGrpSpPr/>
-        <p:nvPr/>
-      </p:nvGrpSpPr>
-      <p:grpSpPr>
-        <a:xfrm>
-          <a:off x="0" y="0"/>
-          <a:ext cx="0" cy="0"/>
-          <a:chOff x="0" y="0"/>
-          <a:chExt cx="0" cy="0"/>
-        </a:xfrm>
-      </p:grpSpPr>
-      <p:sp>
-        <p:nvSpPr>
-          <p:cNvPr id="2" name="Slide Image Placeholder 1"/>
-          <p:cNvSpPr>
-            <a:spLocks noGrp="1" noRot="1" noChangeAspect="1"/>
-          </p:cNvSpPr>
-          <p:nvPr>
-            <p:ph type="sldImg"/>
-          </p:nvPr>
-        </p:nvSpPr>
-        <p:spPr/>
-      </p:sp>
-      <p:sp>
-        <p:nvSpPr>
-          <p:cNvPr id="3" name="Notes Placeholder 2"/>
-          <p:cNvSpPr>
-            <a:spLocks noGrp="1"/>
-          </p:cNvSpPr>
-          <p:nvPr>
-            <p:ph type="body" idx="1"/>
-          </p:nvPr>
-        </p:nvSpPr>
-        <p:spPr/>
-        <p:txBody>
-          <a:bodyPr/>
-          <a:lstStyle/>
-          <a:p>
-            <a:r>
-              <a:rPr lang="en-US" dirty="0"/>
-              <a:t>WHY: the official doc teaches Provider. Reading it right before Riverpod lets them see Riverpod as "Provider with the sharp edges removed", not as a rival religion.
-EXPECTED: Q1 above MaterialApp (as high as needed, as low as possible) - same for brand key. Q2 Consumer/watch rebuilds on change (header); Provider.of listen:false / read for callbacks (toggle). Q3 a new model every rebuild - state resets and listeners leak. Q4 async loading/error modelling, DI of services, testing without widgets, disposing scoped state.</a:t>
-            </a:r>
-            <a:endParaRPr lang="en-US" dirty="0"/>
-          </a:p>
-        </p:txBody>
-      </p:sp>
-      <p:sp>
-        <p:nvSpPr>
-          <p:cNvPr id="4" name="Slide Number Placeholder 3"/>
-          <p:cNvSpPr>
-            <a:spLocks noGrp="1"/>
-          </p:cNvSpPr>
-          <p:nvPr>
-            <p:ph type="sldNum" sz="quarter" idx="10"/>
-          </p:nvPr>
-        </p:nvSpPr>
-        <p:spPr/>
-        <p:txBody>
-          <a:bodyPr/>
-          <a:lstStyle/>
-          <a:p>
-            <a:fld id="{F7021451-1387-4CA6-816F-3879F97B5CBC}" type="slidenum">
-              <a:rPr lang="en-US"/>
-              <a:t>8</a:t>
-            </a:fld>
-            <a:endParaRPr lang="en-US"/>
-          </a:p>
-        </p:txBody>
-      </p:sp>
-    </p:spTree>
-    <p:extLst>
-      <p:ext uri="{BB962C8B-B14F-4D97-AF65-F5344CB8AC3E}">
-        <p14:creationId xmlns:p14="http://schemas.microsoft.com/office/powerpoint/2010/main" val="1024086991"/>
-      </p:ext>
-    </p:extLst>
-  </p:cSld>
-  <p:clrMapOvr>
-    <a:masterClrMapping/>
-  </p:clrMapOvr>
-</p:notes>
-</file>
-
-<file path=ppt/notesSlides/notesSlide9.xml><?xml version="1.0" encoding="utf-8"?>
-<p:notes xmlns:a="http://schemas.openxmlformats.org/drawingml/2006/main" xmlns:r="http://schemas.openxmlformats.org/officeDocument/2006/relationships" xmlns:p="http://schemas.openxmlformats.org/presentationml/2006/main">
-  <p:cSld>
-    <p:spTree>
-      <p:nvGrpSpPr>
-        <p:cNvPr id="1" name=""/>
-        <p:cNvGrpSpPr/>
-        <p:nvPr/>
-      </p:nvGrpSpPr>
-      <p:grpSpPr>
-        <a:xfrm>
-          <a:off x="0" y="0"/>
-          <a:ext cx="0" cy="0"/>
-          <a:chOff x="0" y="0"/>
-          <a:chExt cx="0" cy="0"/>
-        </a:xfrm>
-      </p:grpSpPr>
-      <p:sp>
-        <p:nvSpPr>
-          <p:cNvPr id="2" name="Slide Image Placeholder 1"/>
-          <p:cNvSpPr>
-            <a:spLocks noGrp="1" noRot="1" noChangeAspect="1"/>
-          </p:cNvSpPr>
-          <p:nvPr>
-            <p:ph type="sldImg"/>
-          </p:nvPr>
-        </p:nvSpPr>
-        <p:spPr/>
-      </p:sp>
-      <p:sp>
-        <p:nvSpPr>
-          <p:cNvPr id="3" name="Notes Placeholder 2"/>
-          <p:cNvSpPr>
-            <a:spLocks noGrp="1"/>
-          </p:cNvSpPr>
-          <p:nvPr>
-            <p:ph type="body" idx="1"/>
-          </p:nvPr>
-        </p:nvSpPr>
-        <p:spPr/>
-        <p:txBody>
-          <a:bodyPr/>
-          <a:lstStyle/>
-          <a:p>
-            <a:r>
-              <a:rPr lang="en-US" dirty="0"/>
-              <a:t>SCRIPT: The course pattern. Everything from here to Friday uses it. Go slowly on watch vs read - that is the mistake everyone makes in week one.
-VERSION: the course is built on flutter_riverpod 3.x. If the room resolved 2.x for some reason, the Notifier/NotifierProvider code on these slides is identical; the differences are on the "Riverpod 3 behaviours" slide.</a:t>
-            </a:r>
-            <a:endParaRPr lang="en-US" dirty="0"/>
-          </a:p>
-        </p:txBody>
-      </p:sp>
-      <p:sp>
-        <p:nvSpPr>
-          <p:cNvPr id="4" name="Slide Number Placeholder 3"/>
-          <p:cNvSpPr>
-            <a:spLocks noGrp="1"/>
-          </p:cNvSpPr>
-          <p:nvPr>
-            <p:ph type="sldNum" sz="quarter" idx="10"/>
-          </p:nvPr>
-        </p:nvSpPr>
-        <p:spPr/>
-        <p:txBody>
-          <a:bodyPr/>
-          <a:lstStyle/>
-          <a:p>
-            <a:fld id="{F7021451-1387-4CA6-816F-3879F97B5CBC}" type="slidenum">
-              <a:rPr lang="en-US"/>
-              <a:t>9</a:t>
-            </a:fld>
-            <a:endParaRPr lang="en-US"/>
-          </a:p>
-        </p:txBody>
-      </p:sp>
-    </p:spTree>
-    <p:extLst>
-      <p:ext uri="{BB962C8B-B14F-4D97-AF65-F5344CB8AC3E}">
-        <p14:creationId xmlns:p14="http://schemas.microsoft.com/office/powerpoint/2010/main" val="1024086991"/>
-      </p:ext>
-    </p:extLst>
-  </p:cSld>
-  <p:clrMapOvr>
-    <a:masterClrMapping/>
-  </p:clrMapOvr>
-</p:notes>
 </file>
 
 <file path=ppt/slideLayouts/slideLayout1.xml><?xml version="1.0" encoding="utf-8"?>
@@ -4907,7 +808,7 @@
 </file>
 
 <file path=ppt/slides/slide1.xml><?xml version="1.0" encoding="utf-8"?>
-<p:sld xmlns:a="http://schemas.openxmlformats.org/drawingml/2006/main" xmlns:r="http://schemas.openxmlformats.org/officeDocument/2006/relationships" xmlns:p="http://schemas.openxmlformats.org/presentationml/2006/main">
+<p:sld xmlns:a="http://schemas.openxmlformats.org/drawingml/2006/main" xmlns:p="http://schemas.openxmlformats.org/presentationml/2006/main">
   <p:cSld name="Slide 1">
     <p:bg>
       <p:bgPr>
@@ -5186,7 +1087,7 @@
                 <a:ea typeface="Calibri" pitchFamily="34" charset="-122"/>
                 <a:cs typeface="Calibri" pitchFamily="34" charset="-120"/>
               </a:rPr>
-              <a:t>Lowest confidence in the survey (1.8) - from setState to a scalable pattern  ·  Instructor: Clynton Botterill</a:t>
+              <a:t>From setState to a scalable pattern  ·  Instructor: Clynton Botterill</a:t>
             </a:r>
             <a:endParaRPr lang="en-US" sz="1200" dirty="0"/>
           </a:p>
@@ -23318,7 +19219,7 @@
 </file>
 
 <file path=ppt/slides/slide29.xml><?xml version="1.0" encoding="utf-8"?>
-<p:sld xmlns:a="http://schemas.openxmlformats.org/drawingml/2006/main" xmlns:r="http://schemas.openxmlformats.org/officeDocument/2006/relationships" xmlns:p="http://schemas.openxmlformats.org/presentationml/2006/main">
+<p:sld xmlns:a="http://schemas.openxmlformats.org/drawingml/2006/main" xmlns:p="http://schemas.openxmlformats.org/presentationml/2006/main">
   <p:cSld name="Slide 29">
     <p:bg>
       <p:bgPr>
@@ -23898,7 +19799,7 @@
                 <a:ea typeface="Calibri" pitchFamily="34" charset="-122"/>
                 <a:cs typeface="Calibri" pitchFamily="34" charset="-120"/>
               </a:rPr>
-              <a:t>Navigation scored 3.2 in the survey - the reading closes the gap for the people at 1.</a:t>
+              <a:t>The reading levels the room before tomorrow.</a:t>
             </a:r>
             <a:endParaRPr lang="en-US" sz="1250" dirty="0"/>
           </a:p>
@@ -24916,1151 +20817,6 @@
                 <a:cs typeface="Calibri" pitchFamily="34" charset="-120"/>
               </a:rPr>
               <a:t>29</a:t>
-            </a:r>
-            <a:endParaRPr lang="en-US" sz="900" dirty="0"/>
-          </a:p>
-        </p:txBody>
-      </p:sp>
-    </p:spTree>
-  </p:cSld>
-  <p:clrMapOvr>
-    <a:masterClrMapping/>
-  </p:clrMapOvr>
-</p:sld>
-</file>
-
-<file path=ppt/slides/slide31.xml><?xml version="1.0" encoding="utf-8"?>
-<p:sld xmlns:a="http://schemas.openxmlformats.org/drawingml/2006/main" xmlns:ns2="http://schemas.microsoft.com/office/powerpoint/2010/main" xmlns:p="http://schemas.openxmlformats.org/presentationml/2006/main">
-  <p:cSld name="Slide 31">
-    <p:bg>
-      <p:bgPr>
-        <a:solidFill>
-          <a:srgbClr val="FFFFFF"/>
-        </a:solidFill>
-      </p:bgPr>
-    </p:bg>
-    <p:spTree>
-      <p:nvGrpSpPr>
-        <p:cNvPr id="1" name=""/>
-        <p:cNvGrpSpPr/>
-        <p:nvPr/>
-      </p:nvGrpSpPr>
-      <p:grpSpPr>
-        <a:xfrm>
-          <a:off x="0" y="0"/>
-          <a:ext cx="0" cy="0"/>
-          <a:chOff x="0" y="0"/>
-          <a:chExt cx="0" cy="0"/>
-        </a:xfrm>
-      </p:grpSpPr>
-      <p:sp>
-        <p:nvSpPr>
-          <p:cNvPr id="2" name="Text 0"/>
-          <p:cNvSpPr txBox="1"/>
-          <p:nvPr/>
-        </p:nvSpPr>
-        <p:spPr>
-          <a:xfrm>
-            <a:off x="548640" y="365760"/>
-            <a:ext cx="11091672" cy="731520"/>
-          </a:xfrm>
-          <a:prstGeom prst="rect">
-            <a:avLst/>
-          </a:prstGeom>
-          <a:noFill/>
-          <a:ln/>
-        </p:spPr>
-        <p:txBody>
-          <a:bodyPr wrap="square" lIns="0" tIns="0" rIns="0" bIns="0" rtlCol="0" anchor="ctr"/>
-          <a:lstStyle/>
-          <a:p>
-            <a:pPr indent="0" marL="0">
-              <a:buNone/>
-            </a:pPr>
-            <a:r>
-              <a:rPr lang="en-US" sz="3000" b="1" dirty="0">
-                <a:solidFill>
-                  <a:srgbClr val="0B2545"/>
-                </a:solidFill>
-                <a:latin typeface="Calibri" pitchFamily="34" charset="0"/>
-                <a:ea typeface="Calibri" pitchFamily="34" charset="-122"/>
-                <a:cs typeface="Calibri" pitchFamily="34" charset="-120"/>
-              </a:rPr>
-              <a:t>PLAN B · When it breaks in class</a:t>
-            </a:r>
-            <a:endParaRPr lang="en-US" sz="3000" dirty="0"/>
-          </a:p>
-        </p:txBody>
-      </p:sp>
-      <p:graphicFrame>
-        <p:nvGraphicFramePr>
-          <p:cNvPr id="32" name="Table 0"/>
-          <p:cNvGraphicFramePr>
-            <a:graphicFrameLocks noGrp="1"/>
-          </p:cNvGraphicFramePr>
-          <p:nvPr>
-            <p:extLst>
-              <p:ext uri="{D42A27DB-BD31-4B8C-83A1-F6EECF244321}">
-                <ns2:modId val="1579011935"/>
-              </p:ext>
-            </p:extLst>
-          </p:nvPr>
-        </p:nvGraphicFramePr>
-        <p:xfrm>
-          <a:off x="548640" y="1325880"/>
-          <a:ext cx="11091672" cy="914400"/>
-        </p:xfrm>
-        <a:graphic>
-          <a:graphicData uri="http://schemas.openxmlformats.org/drawingml/2006/table">
-            <a:tbl>
-              <a:tblPr/>
-              <a:tblGrid>
-                <a:gridCol w="3993002"/>
-                <a:gridCol w="7098670"/>
-              </a:tblGrid>
-              <a:tr h="0">
-                <a:tc>
-                  <a:txBody>
-                    <a:bodyPr/>
-                    <a:lstStyle/>
-                    <a:p>
-                      <a:pPr indent="0" marL="0">
-                        <a:buNone/>
-                      </a:pPr>
-                      <a:r>
-                        <a:rPr lang="en-US" sz="1050" b="1" dirty="0">
-                          <a:solidFill>
-                            <a:srgbClr val="FFFFFF"/>
-                          </a:solidFill>
-                          <a:latin typeface="Calibri" pitchFamily="34" charset="0"/>
-                          <a:ea typeface="Calibri" pitchFamily="34" charset="-122"/>
-                          <a:cs typeface="Calibri" pitchFamily="34" charset="-120"/>
-                        </a:rPr>
-                        <a:t>If this happens</a:t>
-                      </a:r>
-                      <a:endParaRPr lang="en-US" sz="1050" dirty="0">
-                        <a:latin typeface="Calibri" charset="0"/>
-                        <a:ea typeface="Calibri" charset="0"/>
-                        <a:cs typeface="Calibri" charset="0"/>
-                      </a:endParaRPr>
-                    </a:p>
-                  </a:txBody>
-                  <a:tcPr marL="54864" marR="54864" marT="54864" marB="54864" anchor="ctr">
-                    <a:lnL w="6350" cap="flat" cmpd="sng" algn="ctr">
-                      <a:solidFill>
-                        <a:srgbClr val="D9DEE3"/>
-                      </a:solidFill>
-                      <a:prstDash val="solid"/>
-                      <a:round/>
-                      <a:headEnd type="none" w="med" len="med"/>
-                      <a:tailEnd type="none" w="med" len="med"/>
-                    </a:lnL>
-                    <a:lnR w="6350" cap="flat" cmpd="sng" algn="ctr">
-                      <a:solidFill>
-                        <a:srgbClr val="D9DEE3"/>
-                      </a:solidFill>
-                      <a:prstDash val="solid"/>
-                      <a:round/>
-                      <a:headEnd type="none" w="med" len="med"/>
-                      <a:tailEnd type="none" w="med" len="med"/>
-                    </a:lnR>
-                    <a:lnT w="6350" cap="flat" cmpd="sng" algn="ctr">
-                      <a:solidFill>
-                        <a:srgbClr val="D9DEE3"/>
-                      </a:solidFill>
-                      <a:prstDash val="solid"/>
-                      <a:round/>
-                      <a:headEnd type="none" w="med" len="med"/>
-                      <a:tailEnd type="none" w="med" len="med"/>
-                    </a:lnT>
-                    <a:lnB w="6350" cap="flat" cmpd="sng" algn="ctr">
-                      <a:solidFill>
-                        <a:srgbClr val="D9DEE3"/>
-                      </a:solidFill>
-                      <a:prstDash val="solid"/>
-                      <a:round/>
-                      <a:headEnd type="none" w="med" len="med"/>
-                      <a:tailEnd type="none" w="med" len="med"/>
-                    </a:lnB>
-                    <a:solidFill>
-                      <a:srgbClr val="0B2545"/>
-                    </a:solidFill>
-                  </a:tcPr>
-                </a:tc>
-                <a:tc>
-                  <a:txBody>
-                    <a:bodyPr/>
-                    <a:lstStyle/>
-                    <a:p>
-                      <a:pPr indent="0" marL="0">
-                        <a:buNone/>
-                      </a:pPr>
-                      <a:r>
-                        <a:rPr lang="en-US" sz="1050" b="1" dirty="0">
-                          <a:solidFill>
-                            <a:srgbClr val="FFFFFF"/>
-                          </a:solidFill>
-                          <a:latin typeface="Calibri" pitchFamily="34" charset="0"/>
-                          <a:ea typeface="Calibri" pitchFamily="34" charset="-122"/>
-                          <a:cs typeface="Calibri" pitchFamily="34" charset="-120"/>
-                        </a:rPr>
-                        <a:t>Do this instead</a:t>
-                      </a:r>
-                      <a:endParaRPr lang="en-US" sz="1050" dirty="0">
-                        <a:latin typeface="Calibri" charset="0"/>
-                        <a:ea typeface="Calibri" charset="0"/>
-                        <a:cs typeface="Calibri" charset="0"/>
-                      </a:endParaRPr>
-                    </a:p>
-                  </a:txBody>
-                  <a:tcPr marL="54864" marR="54864" marT="54864" marB="54864" anchor="ctr">
-                    <a:lnL w="6350" cap="flat" cmpd="sng" algn="ctr">
-                      <a:solidFill>
-                        <a:srgbClr val="D9DEE3"/>
-                      </a:solidFill>
-                      <a:prstDash val="solid"/>
-                      <a:round/>
-                      <a:headEnd type="none" w="med" len="med"/>
-                      <a:tailEnd type="none" w="med" len="med"/>
-                    </a:lnL>
-                    <a:lnR w="6350" cap="flat" cmpd="sng" algn="ctr">
-                      <a:solidFill>
-                        <a:srgbClr val="D9DEE3"/>
-                      </a:solidFill>
-                      <a:prstDash val="solid"/>
-                      <a:round/>
-                      <a:headEnd type="none" w="med" len="med"/>
-                      <a:tailEnd type="none" w="med" len="med"/>
-                    </a:lnR>
-                    <a:lnT w="6350" cap="flat" cmpd="sng" algn="ctr">
-                      <a:solidFill>
-                        <a:srgbClr val="D9DEE3"/>
-                      </a:solidFill>
-                      <a:prstDash val="solid"/>
-                      <a:round/>
-                      <a:headEnd type="none" w="med" len="med"/>
-                      <a:tailEnd type="none" w="med" len="med"/>
-                    </a:lnT>
-                    <a:lnB w="6350" cap="flat" cmpd="sng" algn="ctr">
-                      <a:solidFill>
-                        <a:srgbClr val="D9DEE3"/>
-                      </a:solidFill>
-                      <a:prstDash val="solid"/>
-                      <a:round/>
-                      <a:headEnd type="none" w="med" len="med"/>
-                      <a:tailEnd type="none" w="med" len="med"/>
-                    </a:lnB>
-                    <a:solidFill>
-                      <a:srgbClr val="0B2545"/>
-                    </a:solidFill>
-                  </a:tcPr>
-                </a:tc>
-              </a:tr>
-              <a:tr h="0">
-                <a:tc>
-                  <a:txBody>
-                    <a:bodyPr/>
-                    <a:lstStyle/>
-                    <a:p>
-                      <a:pPr indent="0" marL="0">
-                        <a:buNone/>
-                      </a:pPr>
-                      <a:r>
-                        <a:rPr lang="en-US" sz="950" b="1" dirty="0">
-                          <a:solidFill>
-                            <a:srgbClr val="1F2933"/>
-                          </a:solidFill>
-                          <a:latin typeface="Courier New" pitchFamily="34" charset="0"/>
-                          <a:ea typeface="Courier New" pitchFamily="34" charset="-122"/>
-                          <a:cs typeface="Courier New" pitchFamily="34" charset="-120"/>
-                        </a:rPr>
-                        <a:t>flutter pub add flutter_riverpod fails (network)</a:t>
-                      </a:r>
-                      <a:endParaRPr lang="en-US" sz="950" dirty="0">
-                        <a:latin typeface="Courier New" charset="0"/>
-                        <a:ea typeface="Courier New" charset="0"/>
-                        <a:cs typeface="Courier New" charset="0"/>
-                      </a:endParaRPr>
-                    </a:p>
-                  </a:txBody>
-                  <a:tcPr marL="54864" marR="54864" marT="54864" marB="54864" anchor="ctr">
-                    <a:lnL w="6350" cap="flat" cmpd="sng" algn="ctr">
-                      <a:solidFill>
-                        <a:srgbClr val="D9DEE3"/>
-                      </a:solidFill>
-                      <a:prstDash val="solid"/>
-                      <a:round/>
-                      <a:headEnd type="none" w="med" len="med"/>
-                      <a:tailEnd type="none" w="med" len="med"/>
-                    </a:lnL>
-                    <a:lnR w="6350" cap="flat" cmpd="sng" algn="ctr">
-                      <a:solidFill>
-                        <a:srgbClr val="D9DEE3"/>
-                      </a:solidFill>
-                      <a:prstDash val="solid"/>
-                      <a:round/>
-                      <a:headEnd type="none" w="med" len="med"/>
-                      <a:tailEnd type="none" w="med" len="med"/>
-                    </a:lnR>
-                    <a:lnT w="6350" cap="flat" cmpd="sng" algn="ctr">
-                      <a:solidFill>
-                        <a:srgbClr val="D9DEE3"/>
-                      </a:solidFill>
-                      <a:prstDash val="solid"/>
-                      <a:round/>
-                      <a:headEnd type="none" w="med" len="med"/>
-                      <a:tailEnd type="none" w="med" len="med"/>
-                    </a:lnT>
-                    <a:lnB w="6350" cap="flat" cmpd="sng" algn="ctr">
-                      <a:solidFill>
-                        <a:srgbClr val="D9DEE3"/>
-                      </a:solidFill>
-                      <a:prstDash val="solid"/>
-                      <a:round/>
-                      <a:headEnd type="none" w="med" len="med"/>
-                      <a:tailEnd type="none" w="med" len="med"/>
-                    </a:lnB>
-                    <a:solidFill>
-                      <a:srgbClr val="FFFFFF"/>
-                    </a:solidFill>
-                  </a:tcPr>
-                </a:tc>
-                <a:tc>
-                  <a:txBody>
-                    <a:bodyPr/>
-                    <a:lstStyle/>
-                    <a:p>
-                      <a:pPr indent="0" marL="0">
-                        <a:buNone/>
-                      </a:pPr>
-                      <a:r>
-                        <a:rPr lang="en-US" sz="1050" dirty="0">
-                          <a:solidFill>
-                            <a:srgbClr val="1F2933"/>
-                          </a:solidFill>
-                          <a:latin typeface="Calibri" pitchFamily="34" charset="0"/>
-                          <a:ea typeface="Calibri" pitchFamily="34" charset="-122"/>
-                          <a:cs typeface="Calibri" pitchFamily="34" charset="-120"/>
-                        </a:rPr>
-                        <a:t>Copy the pre-warmed pub cache from the USB stick into ~/.pub-cache (mac) / %LOCALAPPDATA%\Pub\Cache (win), then flutter pub get --offline. Add flutter_riverpod: ^3.0.0 to pubspec by hand first.</a:t>
-                      </a:r>
-                      <a:endParaRPr lang="en-US" sz="1050" dirty="0">
-                        <a:latin typeface="Calibri" charset="0"/>
-                        <a:ea typeface="Calibri" charset="0"/>
-                        <a:cs typeface="Calibri" charset="0"/>
-                      </a:endParaRPr>
-                    </a:p>
-                  </a:txBody>
-                  <a:tcPr marL="54864" marR="54864" marT="54864" marB="54864" anchor="ctr">
-                    <a:lnL w="6350" cap="flat" cmpd="sng" algn="ctr">
-                      <a:solidFill>
-                        <a:srgbClr val="D9DEE3"/>
-                      </a:solidFill>
-                      <a:prstDash val="solid"/>
-                      <a:round/>
-                      <a:headEnd type="none" w="med" len="med"/>
-                      <a:tailEnd type="none" w="med" len="med"/>
-                    </a:lnL>
-                    <a:lnR w="6350" cap="flat" cmpd="sng" algn="ctr">
-                      <a:solidFill>
-                        <a:srgbClr val="D9DEE3"/>
-                      </a:solidFill>
-                      <a:prstDash val="solid"/>
-                      <a:round/>
-                      <a:headEnd type="none" w="med" len="med"/>
-                      <a:tailEnd type="none" w="med" len="med"/>
-                    </a:lnR>
-                    <a:lnT w="6350" cap="flat" cmpd="sng" algn="ctr">
-                      <a:solidFill>
-                        <a:srgbClr val="D9DEE3"/>
-                      </a:solidFill>
-                      <a:prstDash val="solid"/>
-                      <a:round/>
-                      <a:headEnd type="none" w="med" len="med"/>
-                      <a:tailEnd type="none" w="med" len="med"/>
-                    </a:lnT>
-                    <a:lnB w="6350" cap="flat" cmpd="sng" algn="ctr">
-                      <a:solidFill>
-                        <a:srgbClr val="D9DEE3"/>
-                      </a:solidFill>
-                      <a:prstDash val="solid"/>
-                      <a:round/>
-                      <a:headEnd type="none" w="med" len="med"/>
-                      <a:tailEnd type="none" w="med" len="med"/>
-                    </a:lnB>
-                    <a:solidFill>
-                      <a:srgbClr val="FFFFFF"/>
-                    </a:solidFill>
-                  </a:tcPr>
-                </a:tc>
-              </a:tr>
-              <a:tr h="0">
-                <a:tc>
-                  <a:txBody>
-                    <a:bodyPr/>
-                    <a:lstStyle/>
-                    <a:p>
-                      <a:pPr indent="0" marL="0">
-                        <a:buNone/>
-                      </a:pPr>
-                      <a:r>
-                        <a:rPr lang="en-US" sz="1050" b="1" dirty="0">
-                          <a:solidFill>
-                            <a:srgbClr val="1F2933"/>
-                          </a:solidFill>
-                          <a:latin typeface="Calibri" pitchFamily="34" charset="0"/>
-                          <a:ea typeface="Calibri" pitchFamily="34" charset="-122"/>
-                          <a:cs typeface="Calibri" pitchFamily="34" charset="-120"/>
-                        </a:rPr>
-                        <a:t>Riverpod resolves to a different major than you tested</a:t>
-                      </a:r>
-                      <a:endParaRPr lang="en-US" sz="1050" dirty="0">
-                        <a:latin typeface="Calibri" charset="0"/>
-                        <a:ea typeface="Calibri" charset="0"/>
-                        <a:cs typeface="Calibri" charset="0"/>
-                      </a:endParaRPr>
-                    </a:p>
-                  </a:txBody>
-                  <a:tcPr marL="54864" marR="54864" marT="54864" marB="54864" anchor="ctr">
-                    <a:lnL w="6350" cap="flat" cmpd="sng" algn="ctr">
-                      <a:solidFill>
-                        <a:srgbClr val="D9DEE3"/>
-                      </a:solidFill>
-                      <a:prstDash val="solid"/>
-                      <a:round/>
-                      <a:headEnd type="none" w="med" len="med"/>
-                      <a:tailEnd type="none" w="med" len="med"/>
-                    </a:lnL>
-                    <a:lnR w="6350" cap="flat" cmpd="sng" algn="ctr">
-                      <a:solidFill>
-                        <a:srgbClr val="D9DEE3"/>
-                      </a:solidFill>
-                      <a:prstDash val="solid"/>
-                      <a:round/>
-                      <a:headEnd type="none" w="med" len="med"/>
-                      <a:tailEnd type="none" w="med" len="med"/>
-                    </a:lnR>
-                    <a:lnT w="6350" cap="flat" cmpd="sng" algn="ctr">
-                      <a:solidFill>
-                        <a:srgbClr val="D9DEE3"/>
-                      </a:solidFill>
-                      <a:prstDash val="solid"/>
-                      <a:round/>
-                      <a:headEnd type="none" w="med" len="med"/>
-                      <a:tailEnd type="none" w="med" len="med"/>
-                    </a:lnT>
-                    <a:lnB w="6350" cap="flat" cmpd="sng" algn="ctr">
-                      <a:solidFill>
-                        <a:srgbClr val="D9DEE3"/>
-                      </a:solidFill>
-                      <a:prstDash val="solid"/>
-                      <a:round/>
-                      <a:headEnd type="none" w="med" len="med"/>
-                      <a:tailEnd type="none" w="med" len="med"/>
-                    </a:lnB>
-                    <a:solidFill>
-                      <a:srgbClr val="F3F5F8"/>
-                    </a:solidFill>
-                  </a:tcPr>
-                </a:tc>
-                <a:tc>
-                  <a:txBody>
-                    <a:bodyPr/>
-                    <a:lstStyle/>
-                    <a:p>
-                      <a:pPr indent="0" marL="0">
-                        <a:buNone/>
-                      </a:pPr>
-                      <a:r>
-                        <a:rPr lang="en-US" sz="1050" dirty="0">
-                          <a:solidFill>
-                            <a:srgbClr val="1F2933"/>
-                          </a:solidFill>
-                          <a:latin typeface="Calibri" pitchFamily="34" charset="0"/>
-                          <a:ea typeface="Calibri" pitchFamily="34" charset="-122"/>
-                          <a:cs typeface="Calibri" pitchFamily="34" charset="-120"/>
-                        </a:rPr>
-                        <a:t>The Notifier / NotifierProvider / ref.watch / ref.read code in every lab is IDENTICAL across 2.x and 3.x. Only the family, legacy-import and retry slides differ - none of them is a lab step. Carry on and flag the difference verbally.</a:t>
-                      </a:r>
-                      <a:endParaRPr lang="en-US" sz="1050" dirty="0">
-                        <a:latin typeface="Calibri" charset="0"/>
-                        <a:ea typeface="Calibri" charset="0"/>
-                        <a:cs typeface="Calibri" charset="0"/>
-                      </a:endParaRPr>
-                    </a:p>
-                  </a:txBody>
-                  <a:tcPr marL="54864" marR="54864" marT="54864" marB="54864" anchor="ctr">
-                    <a:lnL w="6350" cap="flat" cmpd="sng" algn="ctr">
-                      <a:solidFill>
-                        <a:srgbClr val="D9DEE3"/>
-                      </a:solidFill>
-                      <a:prstDash val="solid"/>
-                      <a:round/>
-                      <a:headEnd type="none" w="med" len="med"/>
-                      <a:tailEnd type="none" w="med" len="med"/>
-                    </a:lnL>
-                    <a:lnR w="6350" cap="flat" cmpd="sng" algn="ctr">
-                      <a:solidFill>
-                        <a:srgbClr val="D9DEE3"/>
-                      </a:solidFill>
-                      <a:prstDash val="solid"/>
-                      <a:round/>
-                      <a:headEnd type="none" w="med" len="med"/>
-                      <a:tailEnd type="none" w="med" len="med"/>
-                    </a:lnR>
-                    <a:lnT w="6350" cap="flat" cmpd="sng" algn="ctr">
-                      <a:solidFill>
-                        <a:srgbClr val="D9DEE3"/>
-                      </a:solidFill>
-                      <a:prstDash val="solid"/>
-                      <a:round/>
-                      <a:headEnd type="none" w="med" len="med"/>
-                      <a:tailEnd type="none" w="med" len="med"/>
-                    </a:lnT>
-                    <a:lnB w="6350" cap="flat" cmpd="sng" algn="ctr">
-                      <a:solidFill>
-                        <a:srgbClr val="D9DEE3"/>
-                      </a:solidFill>
-                      <a:prstDash val="solid"/>
-                      <a:round/>
-                      <a:headEnd type="none" w="med" len="med"/>
-                      <a:tailEnd type="none" w="med" len="med"/>
-                    </a:lnB>
-                    <a:solidFill>
-                      <a:srgbClr val="F3F5F8"/>
-                    </a:solidFill>
-                  </a:tcPr>
-                </a:tc>
-              </a:tr>
-              <a:tr h="0">
-                <a:tc>
-                  <a:txBody>
-                    <a:bodyPr/>
-                    <a:lstStyle/>
-                    <a:p>
-                      <a:pPr indent="0" marL="0">
-                        <a:buNone/>
-                      </a:pPr>
-                      <a:r>
-                        <a:rPr lang="en-US" sz="1050" b="1" dirty="0">
-                          <a:solidFill>
-                            <a:srgbClr val="1F2933"/>
-                          </a:solidFill>
-                          <a:latin typeface="Calibri" pitchFamily="34" charset="0"/>
-                          <a:ea typeface="Calibri" pitchFamily="34" charset="-122"/>
-                          <a:cs typeface="Calibri" pitchFamily="34" charset="-120"/>
-                        </a:rPr>
-                        <a:t>A delegate cannot install the package at all</a:t>
-                      </a:r>
-                      <a:endParaRPr lang="en-US" sz="1050" dirty="0">
-                        <a:latin typeface="Calibri" charset="0"/>
-                        <a:ea typeface="Calibri" charset="0"/>
-                        <a:cs typeface="Calibri" charset="0"/>
-                      </a:endParaRPr>
-                    </a:p>
-                  </a:txBody>
-                  <a:tcPr marL="54864" marR="54864" marT="54864" marB="54864" anchor="ctr">
-                    <a:lnL w="6350" cap="flat" cmpd="sng" algn="ctr">
-                      <a:solidFill>
-                        <a:srgbClr val="D9DEE3"/>
-                      </a:solidFill>
-                      <a:prstDash val="solid"/>
-                      <a:round/>
-                      <a:headEnd type="none" w="med" len="med"/>
-                      <a:tailEnd type="none" w="med" len="med"/>
-                    </a:lnL>
-                    <a:lnR w="6350" cap="flat" cmpd="sng" algn="ctr">
-                      <a:solidFill>
-                        <a:srgbClr val="D9DEE3"/>
-                      </a:solidFill>
-                      <a:prstDash val="solid"/>
-                      <a:round/>
-                      <a:headEnd type="none" w="med" len="med"/>
-                      <a:tailEnd type="none" w="med" len="med"/>
-                    </a:lnR>
-                    <a:lnT w="6350" cap="flat" cmpd="sng" algn="ctr">
-                      <a:solidFill>
-                        <a:srgbClr val="D9DEE3"/>
-                      </a:solidFill>
-                      <a:prstDash val="solid"/>
-                      <a:round/>
-                      <a:headEnd type="none" w="med" len="med"/>
-                      <a:tailEnd type="none" w="med" len="med"/>
-                    </a:lnT>
-                    <a:lnB w="6350" cap="flat" cmpd="sng" algn="ctr">
-                      <a:solidFill>
-                        <a:srgbClr val="D9DEE3"/>
-                      </a:solidFill>
-                      <a:prstDash val="solid"/>
-                      <a:round/>
-                      <a:headEnd type="none" w="med" len="med"/>
-                      <a:tailEnd type="none" w="med" len="med"/>
-                    </a:lnB>
-                    <a:solidFill>
-                      <a:srgbClr val="FFFFFF"/>
-                    </a:solidFill>
-                  </a:tcPr>
-                </a:tc>
-                <a:tc>
-                  <a:txBody>
-                    <a:bodyPr/>
-                    <a:lstStyle/>
-                    <a:p>
-                      <a:pPr indent="0" marL="0">
-                        <a:buNone/>
-                      </a:pPr>
-                      <a:r>
-                        <a:rPr lang="en-US" sz="1050" dirty="0">
-                          <a:solidFill>
-                            <a:srgbClr val="1F2933"/>
-                          </a:solidFill>
-                          <a:latin typeface="Calibri" pitchFamily="34" charset="0"/>
-                          <a:ea typeface="Calibri" pitchFamily="34" charset="-122"/>
-                          <a:cs typeface="Calibri" pitchFamily="34" charset="-120"/>
-                        </a:rPr>
-                        <a:t>They follow the refactor on the projector and rebuild from the handbook Lab 3.2 solution afterwards. Understanding the pattern matters more than typing it.</a:t>
-                      </a:r>
-                      <a:endParaRPr lang="en-US" sz="1050" dirty="0">
-                        <a:latin typeface="Calibri" charset="0"/>
-                        <a:ea typeface="Calibri" charset="0"/>
-                        <a:cs typeface="Calibri" charset="0"/>
-                      </a:endParaRPr>
-                    </a:p>
-                  </a:txBody>
-                  <a:tcPr marL="54864" marR="54864" marT="54864" marB="54864" anchor="ctr">
-                    <a:lnL w="6350" cap="flat" cmpd="sng" algn="ctr">
-                      <a:solidFill>
-                        <a:srgbClr val="D9DEE3"/>
-                      </a:solidFill>
-                      <a:prstDash val="solid"/>
-                      <a:round/>
-                      <a:headEnd type="none" w="med" len="med"/>
-                      <a:tailEnd type="none" w="med" len="med"/>
-                    </a:lnL>
-                    <a:lnR w="6350" cap="flat" cmpd="sng" algn="ctr">
-                      <a:solidFill>
-                        <a:srgbClr val="D9DEE3"/>
-                      </a:solidFill>
-                      <a:prstDash val="solid"/>
-                      <a:round/>
-                      <a:headEnd type="none" w="med" len="med"/>
-                      <a:tailEnd type="none" w="med" len="med"/>
-                    </a:lnR>
-                    <a:lnT w="6350" cap="flat" cmpd="sng" algn="ctr">
-                      <a:solidFill>
-                        <a:srgbClr val="D9DEE3"/>
-                      </a:solidFill>
-                      <a:prstDash val="solid"/>
-                      <a:round/>
-                      <a:headEnd type="none" w="med" len="med"/>
-                      <a:tailEnd type="none" w="med" len="med"/>
-                    </a:lnT>
-                    <a:lnB w="6350" cap="flat" cmpd="sng" algn="ctr">
-                      <a:solidFill>
-                        <a:srgbClr val="D9DEE3"/>
-                      </a:solidFill>
-                      <a:prstDash val="solid"/>
-                      <a:round/>
-                      <a:headEnd type="none" w="med" len="med"/>
-                      <a:tailEnd type="none" w="med" len="med"/>
-                    </a:lnB>
-                    <a:solidFill>
-                      <a:srgbClr val="FFFFFF"/>
-                    </a:solidFill>
-                  </a:tcPr>
-                </a:tc>
-              </a:tr>
-              <a:tr h="0">
-                <a:tc>
-                  <a:txBody>
-                    <a:bodyPr/>
-                    <a:lstStyle/>
-                    <a:p>
-                      <a:pPr indent="0" marL="0">
-                        <a:buNone/>
-                      </a:pPr>
-                      <a:r>
-                        <a:rPr lang="en-US" sz="1050" b="1" dirty="0">
-                          <a:solidFill>
-                            <a:srgbClr val="1F2933"/>
-                          </a:solidFill>
-                          <a:latin typeface="Calibri" pitchFamily="34" charset="0"/>
-                          <a:ea typeface="Calibri" pitchFamily="34" charset="-122"/>
-                          <a:cs typeface="Calibri" pitchFamily="34" charset="-120"/>
-                        </a:rPr>
-                        <a:t>Your live refactor demo breaks</a:t>
-                      </a:r>
-                      <a:endParaRPr lang="en-US" sz="1050" dirty="0">
-                        <a:latin typeface="Calibri" charset="0"/>
-                        <a:ea typeface="Calibri" charset="0"/>
-                        <a:cs typeface="Calibri" charset="0"/>
-                      </a:endParaRPr>
-                    </a:p>
-                  </a:txBody>
-                  <a:tcPr marL="54864" marR="54864" marT="54864" marB="54864" anchor="ctr">
-                    <a:lnL w="6350" cap="flat" cmpd="sng" algn="ctr">
-                      <a:solidFill>
-                        <a:srgbClr val="D9DEE3"/>
-                      </a:solidFill>
-                      <a:prstDash val="solid"/>
-                      <a:round/>
-                      <a:headEnd type="none" w="med" len="med"/>
-                      <a:tailEnd type="none" w="med" len="med"/>
-                    </a:lnL>
-                    <a:lnR w="6350" cap="flat" cmpd="sng" algn="ctr">
-                      <a:solidFill>
-                        <a:srgbClr val="D9DEE3"/>
-                      </a:solidFill>
-                      <a:prstDash val="solid"/>
-                      <a:round/>
-                      <a:headEnd type="none" w="med" len="med"/>
-                      <a:tailEnd type="none" w="med" len="med"/>
-                    </a:lnR>
-                    <a:lnT w="6350" cap="flat" cmpd="sng" algn="ctr">
-                      <a:solidFill>
-                        <a:srgbClr val="D9DEE3"/>
-                      </a:solidFill>
-                      <a:prstDash val="solid"/>
-                      <a:round/>
-                      <a:headEnd type="none" w="med" len="med"/>
-                      <a:tailEnd type="none" w="med" len="med"/>
-                    </a:lnT>
-                    <a:lnB w="6350" cap="flat" cmpd="sng" algn="ctr">
-                      <a:solidFill>
-                        <a:srgbClr val="D9DEE3"/>
-                      </a:solidFill>
-                      <a:prstDash val="solid"/>
-                      <a:round/>
-                      <a:headEnd type="none" w="med" len="med"/>
-                      <a:tailEnd type="none" w="med" len="med"/>
-                    </a:lnB>
-                    <a:solidFill>
-                      <a:srgbClr val="F3F5F8"/>
-                    </a:solidFill>
-                  </a:tcPr>
-                </a:tc>
-                <a:tc>
-                  <a:txBody>
-                    <a:bodyPr/>
-                    <a:lstStyle/>
-                    <a:p>
-                      <a:pPr indent="0" marL="0">
-                        <a:buNone/>
-                      </a:pPr>
-                      <a:r>
-                        <a:rPr lang="en-US" sz="1050" dirty="0">
-                          <a:solidFill>
-                            <a:srgbClr val="1F2933"/>
-                          </a:solidFill>
-                          <a:latin typeface="Calibri" pitchFamily="34" charset="0"/>
-                          <a:ea typeface="Calibri" pitchFamily="34" charset="-122"/>
-                          <a:cs typeface="Calibri" pitchFamily="34" charset="-120"/>
-                        </a:rPr>
-                        <a:t>Put the handbook Lab 3.1 solution on the projector beside yesterday’s app.dart and walk the three changed files - the before/after IS the lesson, and it is faster than debugging live.</a:t>
-                      </a:r>
-                      <a:endParaRPr lang="en-US" sz="1050" dirty="0">
-                        <a:latin typeface="Calibri" charset="0"/>
-                        <a:ea typeface="Calibri" charset="0"/>
-                        <a:cs typeface="Calibri" charset="0"/>
-                      </a:endParaRPr>
-                    </a:p>
-                  </a:txBody>
-                  <a:tcPr marL="54864" marR="54864" marT="54864" marB="54864" anchor="ctr">
-                    <a:lnL w="6350" cap="flat" cmpd="sng" algn="ctr">
-                      <a:solidFill>
-                        <a:srgbClr val="D9DEE3"/>
-                      </a:solidFill>
-                      <a:prstDash val="solid"/>
-                      <a:round/>
-                      <a:headEnd type="none" w="med" len="med"/>
-                      <a:tailEnd type="none" w="med" len="med"/>
-                    </a:lnL>
-                    <a:lnR w="6350" cap="flat" cmpd="sng" algn="ctr">
-                      <a:solidFill>
-                        <a:srgbClr val="D9DEE3"/>
-                      </a:solidFill>
-                      <a:prstDash val="solid"/>
-                      <a:round/>
-                      <a:headEnd type="none" w="med" len="med"/>
-                      <a:tailEnd type="none" w="med" len="med"/>
-                    </a:lnR>
-                    <a:lnT w="6350" cap="flat" cmpd="sng" algn="ctr">
-                      <a:solidFill>
-                        <a:srgbClr val="D9DEE3"/>
-                      </a:solidFill>
-                      <a:prstDash val="solid"/>
-                      <a:round/>
-                      <a:headEnd type="none" w="med" len="med"/>
-                      <a:tailEnd type="none" w="med" len="med"/>
-                    </a:lnT>
-                    <a:lnB w="6350" cap="flat" cmpd="sng" algn="ctr">
-                      <a:solidFill>
-                        <a:srgbClr val="D9DEE3"/>
-                      </a:solidFill>
-                      <a:prstDash val="solid"/>
-                      <a:round/>
-                      <a:headEnd type="none" w="med" len="med"/>
-                      <a:tailEnd type="none" w="med" len="med"/>
-                    </a:lnB>
-                    <a:solidFill>
-                      <a:srgbClr val="F3F5F8"/>
-                    </a:solidFill>
-                  </a:tcPr>
-                </a:tc>
-              </a:tr>
-              <a:tr h="0">
-                <a:tc>
-                  <a:txBody>
-                    <a:bodyPr/>
-                    <a:lstStyle/>
-                    <a:p>
-                      <a:pPr indent="0" marL="0">
-                        <a:buNone/>
-                      </a:pPr>
-                      <a:r>
-                        <a:rPr lang="en-US" sz="1050" b="1" dirty="0">
-                          <a:solidFill>
-                            <a:srgbClr val="1F2933"/>
-                          </a:solidFill>
-                          <a:latin typeface="Calibri" pitchFamily="34" charset="0"/>
-                          <a:ea typeface="Calibri" pitchFamily="34" charset="-122"/>
-                          <a:cs typeface="Calibri" pitchFamily="34" charset="-120"/>
-                        </a:rPr>
-                        <a:t>"Why not Provider / Bloc?" turns into a long argument</a:t>
-                      </a:r>
-                      <a:endParaRPr lang="en-US" sz="1050" dirty="0">
-                        <a:latin typeface="Calibri" charset="0"/>
-                        <a:ea typeface="Calibri" charset="0"/>
-                        <a:cs typeface="Calibri" charset="0"/>
-                      </a:endParaRPr>
-                    </a:p>
-                  </a:txBody>
-                  <a:tcPr marL="54864" marR="54864" marT="54864" marB="54864" anchor="ctr">
-                    <a:lnL w="6350" cap="flat" cmpd="sng" algn="ctr">
-                      <a:solidFill>
-                        <a:srgbClr val="D9DEE3"/>
-                      </a:solidFill>
-                      <a:prstDash val="solid"/>
-                      <a:round/>
-                      <a:headEnd type="none" w="med" len="med"/>
-                      <a:tailEnd type="none" w="med" len="med"/>
-                    </a:lnL>
-                    <a:lnR w="6350" cap="flat" cmpd="sng" algn="ctr">
-                      <a:solidFill>
-                        <a:srgbClr val="D9DEE3"/>
-                      </a:solidFill>
-                      <a:prstDash val="solid"/>
-                      <a:round/>
-                      <a:headEnd type="none" w="med" len="med"/>
-                      <a:tailEnd type="none" w="med" len="med"/>
-                    </a:lnR>
-                    <a:lnT w="6350" cap="flat" cmpd="sng" algn="ctr">
-                      <a:solidFill>
-                        <a:srgbClr val="D9DEE3"/>
-                      </a:solidFill>
-                      <a:prstDash val="solid"/>
-                      <a:round/>
-                      <a:headEnd type="none" w="med" len="med"/>
-                      <a:tailEnd type="none" w="med" len="med"/>
-                    </a:lnT>
-                    <a:lnB w="6350" cap="flat" cmpd="sng" algn="ctr">
-                      <a:solidFill>
-                        <a:srgbClr val="D9DEE3"/>
-                      </a:solidFill>
-                      <a:prstDash val="solid"/>
-                      <a:round/>
-                      <a:headEnd type="none" w="med" len="med"/>
-                      <a:tailEnd type="none" w="med" len="med"/>
-                    </a:lnB>
-                    <a:solidFill>
-                      <a:srgbClr val="FFFFFF"/>
-                    </a:solidFill>
-                  </a:tcPr>
-                </a:tc>
-                <a:tc>
-                  <a:txBody>
-                    <a:bodyPr/>
-                    <a:lstStyle/>
-                    <a:p>
-                      <a:pPr indent="0" marL="0">
-                        <a:buNone/>
-                      </a:pPr>
-                      <a:r>
-                        <a:rPr lang="en-US" sz="1050" dirty="0">
-                          <a:solidFill>
-                            <a:srgbClr val="1F2933"/>
-                          </a:solidFill>
-                          <a:latin typeface="Calibri" pitchFamily="34" charset="0"/>
-                          <a:ea typeface="Calibri" pitchFamily="34" charset="-122"/>
-                          <a:cs typeface="Calibri" pitchFamily="34" charset="-120"/>
-                        </a:rPr>
-                        <a:t>Go to the comparison table, say "either is production-grade, consistency beats the choice", and put the question on the whiteboard for the Friday clinic. Do not spend lab time on it.</a:t>
-                      </a:r>
-                      <a:endParaRPr lang="en-US" sz="1050" dirty="0">
-                        <a:latin typeface="Calibri" charset="0"/>
-                        <a:ea typeface="Calibri" charset="0"/>
-                        <a:cs typeface="Calibri" charset="0"/>
-                      </a:endParaRPr>
-                    </a:p>
-                  </a:txBody>
-                  <a:tcPr marL="54864" marR="54864" marT="54864" marB="54864" anchor="ctr">
-                    <a:lnL w="6350" cap="flat" cmpd="sng" algn="ctr">
-                      <a:solidFill>
-                        <a:srgbClr val="D9DEE3"/>
-                      </a:solidFill>
-                      <a:prstDash val="solid"/>
-                      <a:round/>
-                      <a:headEnd type="none" w="med" len="med"/>
-                      <a:tailEnd type="none" w="med" len="med"/>
-                    </a:lnL>
-                    <a:lnR w="6350" cap="flat" cmpd="sng" algn="ctr">
-                      <a:solidFill>
-                        <a:srgbClr val="D9DEE3"/>
-                      </a:solidFill>
-                      <a:prstDash val="solid"/>
-                      <a:round/>
-                      <a:headEnd type="none" w="med" len="med"/>
-                      <a:tailEnd type="none" w="med" len="med"/>
-                    </a:lnR>
-                    <a:lnT w="6350" cap="flat" cmpd="sng" algn="ctr">
-                      <a:solidFill>
-                        <a:srgbClr val="D9DEE3"/>
-                      </a:solidFill>
-                      <a:prstDash val="solid"/>
-                      <a:round/>
-                      <a:headEnd type="none" w="med" len="med"/>
-                      <a:tailEnd type="none" w="med" len="med"/>
-                    </a:lnT>
-                    <a:lnB w="6350" cap="flat" cmpd="sng" algn="ctr">
-                      <a:solidFill>
-                        <a:srgbClr val="D9DEE3"/>
-                      </a:solidFill>
-                      <a:prstDash val="solid"/>
-                      <a:round/>
-                      <a:headEnd type="none" w="med" len="med"/>
-                      <a:tailEnd type="none" w="med" len="med"/>
-                    </a:lnB>
-                    <a:solidFill>
-                      <a:srgbClr val="FFFFFF"/>
-                    </a:solidFill>
-                  </a:tcPr>
-                </a:tc>
-              </a:tr>
-              <a:tr h="0">
-                <a:tc>
-                  <a:txBody>
-                    <a:bodyPr/>
-                    <a:lstStyle/>
-                    <a:p>
-                      <a:pPr indent="0" marL="0">
-                        <a:buNone/>
-                      </a:pPr>
-                      <a:r>
-                        <a:rPr lang="en-US" sz="1050" b="1" dirty="0">
-                          <a:solidFill>
-                            <a:srgbClr val="1F2933"/>
-                          </a:solidFill>
-                          <a:latin typeface="Calibri" pitchFamily="34" charset="0"/>
-                          <a:ea typeface="Calibri" pitchFamily="34" charset="-122"/>
-                          <a:cs typeface="Calibri" pitchFamily="34" charset="-120"/>
-                        </a:rPr>
-                        <a:t>Providers behave oddly in a demo (repeat calls, no rebuild)</a:t>
-                      </a:r>
-                      <a:endParaRPr lang="en-US" sz="1050" dirty="0">
-                        <a:latin typeface="Calibri" charset="0"/>
-                        <a:ea typeface="Calibri" charset="0"/>
-                        <a:cs typeface="Calibri" charset="0"/>
-                      </a:endParaRPr>
-                    </a:p>
-                  </a:txBody>
-                  <a:tcPr marL="54864" marR="54864" marT="54864" marB="54864" anchor="ctr">
-                    <a:lnL w="6350" cap="flat" cmpd="sng" algn="ctr">
-                      <a:solidFill>
-                        <a:srgbClr val="D9DEE3"/>
-                      </a:solidFill>
-                      <a:prstDash val="solid"/>
-                      <a:round/>
-                      <a:headEnd type="none" w="med" len="med"/>
-                      <a:tailEnd type="none" w="med" len="med"/>
-                    </a:lnL>
-                    <a:lnR w="6350" cap="flat" cmpd="sng" algn="ctr">
-                      <a:solidFill>
-                        <a:srgbClr val="D9DEE3"/>
-                      </a:solidFill>
-                      <a:prstDash val="solid"/>
-                      <a:round/>
-                      <a:headEnd type="none" w="med" len="med"/>
-                      <a:tailEnd type="none" w="med" len="med"/>
-                    </a:lnR>
-                    <a:lnT w="6350" cap="flat" cmpd="sng" algn="ctr">
-                      <a:solidFill>
-                        <a:srgbClr val="D9DEE3"/>
-                      </a:solidFill>
-                      <a:prstDash val="solid"/>
-                      <a:round/>
-                      <a:headEnd type="none" w="med" len="med"/>
-                      <a:tailEnd type="none" w="med" len="med"/>
-                    </a:lnT>
-                    <a:lnB w="6350" cap="flat" cmpd="sng" algn="ctr">
-                      <a:solidFill>
-                        <a:srgbClr val="D9DEE3"/>
-                      </a:solidFill>
-                      <a:prstDash val="solid"/>
-                      <a:round/>
-                      <a:headEnd type="none" w="med" len="med"/>
-                      <a:tailEnd type="none" w="med" len="med"/>
-                    </a:lnB>
-                    <a:solidFill>
-                      <a:srgbClr val="F3F5F8"/>
-                    </a:solidFill>
-                  </a:tcPr>
-                </a:tc>
-                <a:tc>
-                  <a:txBody>
-                    <a:bodyPr/>
-                    <a:lstStyle/>
-                    <a:p>
-                      <a:pPr indent="0" marL="0">
-                        <a:buNone/>
-                      </a:pPr>
-                      <a:r>
-                        <a:rPr lang="en-US" sz="1050" dirty="0">
-                          <a:solidFill>
-                            <a:srgbClr val="1F2933"/>
-                          </a:solidFill>
-                          <a:latin typeface="Calibri" pitchFamily="34" charset="0"/>
-                          <a:ea typeface="Calibri" pitchFamily="34" charset="-122"/>
-                          <a:cs typeface="Calibri" pitchFamily="34" charset="-120"/>
-                        </a:rPr>
-                        <a:t>Two usual causes: Riverpod 3 automatic retry (disable with ProviderScope(retry: (c, e) =&gt; null)), or ref.read where ref.watch belongs. Both are on the slides - turn to them rather than debugging blind.</a:t>
-                      </a:r>
-                      <a:endParaRPr lang="en-US" sz="1050" dirty="0">
-                        <a:latin typeface="Calibri" charset="0"/>
-                        <a:ea typeface="Calibri" charset="0"/>
-                        <a:cs typeface="Calibri" charset="0"/>
-                      </a:endParaRPr>
-                    </a:p>
-                  </a:txBody>
-                  <a:tcPr marL="54864" marR="54864" marT="54864" marB="54864" anchor="ctr">
-                    <a:lnL w="6350" cap="flat" cmpd="sng" algn="ctr">
-                      <a:solidFill>
-                        <a:srgbClr val="D9DEE3"/>
-                      </a:solidFill>
-                      <a:prstDash val="solid"/>
-                      <a:round/>
-                      <a:headEnd type="none" w="med" len="med"/>
-                      <a:tailEnd type="none" w="med" len="med"/>
-                    </a:lnL>
-                    <a:lnR w="6350" cap="flat" cmpd="sng" algn="ctr">
-                      <a:solidFill>
-                        <a:srgbClr val="D9DEE3"/>
-                      </a:solidFill>
-                      <a:prstDash val="solid"/>
-                      <a:round/>
-                      <a:headEnd type="none" w="med" len="med"/>
-                      <a:tailEnd type="none" w="med" len="med"/>
-                    </a:lnR>
-                    <a:lnT w="6350" cap="flat" cmpd="sng" algn="ctr">
-                      <a:solidFill>
-                        <a:srgbClr val="D9DEE3"/>
-                      </a:solidFill>
-                      <a:prstDash val="solid"/>
-                      <a:round/>
-                      <a:headEnd type="none" w="med" len="med"/>
-                      <a:tailEnd type="none" w="med" len="med"/>
-                    </a:lnT>
-                    <a:lnB w="6350" cap="flat" cmpd="sng" algn="ctr">
-                      <a:solidFill>
-                        <a:srgbClr val="D9DEE3"/>
-                      </a:solidFill>
-                      <a:prstDash val="solid"/>
-                      <a:round/>
-                      <a:headEnd type="none" w="med" len="med"/>
-                      <a:tailEnd type="none" w="med" len="med"/>
-                    </a:lnB>
-                    <a:solidFill>
-                      <a:srgbClr val="F3F5F8"/>
-                    </a:solidFill>
-                  </a:tcPr>
-                </a:tc>
-              </a:tr>
-            </a:tbl>
-          </a:graphicData>
-        </a:graphic>
-      </p:graphicFrame>
-      <p:sp>
-        <p:nvSpPr>
-          <p:cNvPr id="4" name="Text 1"/>
-          <p:cNvSpPr txBox="1"/>
-          <p:nvPr/>
-        </p:nvSpPr>
-        <p:spPr>
-          <a:xfrm>
-            <a:off x="548640" y="6473952"/>
-            <a:ext cx="9994392" cy="274320"/>
-          </a:xfrm>
-          <a:prstGeom prst="rect">
-            <a:avLst/>
-          </a:prstGeom>
-          <a:noFill/>
-          <a:ln/>
-        </p:spPr>
-        <p:txBody>
-          <a:bodyPr wrap="square" lIns="0" tIns="0" rIns="0" bIns="0" rtlCol="0" anchor="ctr"/>
-          <a:lstStyle/>
-          <a:p>
-            <a:pPr indent="0" marL="0">
-              <a:buNone/>
-            </a:pPr>
-            <a:r>
-              <a:rPr lang="en-US" sz="900" dirty="0">
-                <a:solidFill>
-                  <a:srgbClr val="5B6773"/>
-                </a:solidFill>
-                <a:latin typeface="Calibri" pitchFamily="34" charset="0"/>
-                <a:ea typeface="Calibri" pitchFamily="34" charset="-122"/>
-                <a:cs typeface="Calibri" pitchFamily="34" charset="-120"/>
-              </a:rPr>
-              <a:t>MO Integrations · Flutter Training · Day 3 - State Management</a:t>
-            </a:r>
-            <a:endParaRPr lang="en-US" sz="900" dirty="0"/>
-          </a:p>
-        </p:txBody>
-      </p:sp>
-      <p:sp>
-        <p:nvSpPr>
-          <p:cNvPr id="5" name="Text 2"/>
-          <p:cNvSpPr txBox="1"/>
-          <p:nvPr/>
-        </p:nvSpPr>
-        <p:spPr>
-          <a:xfrm>
-            <a:off x="10543032" y="6473952"/>
-            <a:ext cx="1097280" cy="274320"/>
-          </a:xfrm>
-          <a:prstGeom prst="rect">
-            <a:avLst/>
-          </a:prstGeom>
-          <a:noFill/>
-          <a:ln/>
-        </p:spPr>
-        <p:txBody>
-          <a:bodyPr wrap="square" lIns="0" tIns="0" rIns="0" bIns="0" rtlCol="0" anchor="ctr"/>
-          <a:lstStyle/>
-          <a:p>
-            <a:pPr algn="r" indent="0" marL="0">
-              <a:buNone/>
-            </a:pPr>
-            <a:r>
-              <a:rPr lang="en-US" sz="900" dirty="0">
-                <a:solidFill>
-                  <a:srgbClr val="5B6773"/>
-                </a:solidFill>
-                <a:latin typeface="Calibri" pitchFamily="34" charset="0"/>
-                <a:ea typeface="Calibri" pitchFamily="34" charset="-122"/>
-                <a:cs typeface="Calibri" pitchFamily="34" charset="-120"/>
-              </a:rPr>
-              <a:t>30</a:t>
             </a:r>
             <a:endParaRPr lang="en-US" sz="900" dirty="0"/>
           </a:p>
